--- a/examples/moe-llms.pptx
+++ b/examples/moe-llms.pptx
@@ -17,10 +17,9 @@
     <p:sldId id="265" r:id="rId11"/>
     <p:sldId id="266" r:id="rId12"/>
     <p:sldId id="267" r:id="rId13"/>
-    <p:sldId id="268" r:id="rId14"/>
   </p:sldIdLst>
   <p:notesMasterIdLst>
-    <p:notesMasterId r:id="rId15"/>
+    <p:notesMasterId r:id="rId14"/>
   </p:notesMasterIdLst>
   <p:sldSz cx="12191695" cy="6858000"/>
   <p:notesSz cx="6858000" cy="12191695"/>
@@ -820,94 +819,6 @@
 </p:notes>
 </file>
 
-<file path=ppt/notesSlides/notesSlide13.xml><?xml version="1.0" encoding="utf-8"?>
-<p:notes xmlns:a="http://schemas.openxmlformats.org/drawingml/2006/main" xmlns:r="http://schemas.openxmlformats.org/officeDocument/2006/relationships" xmlns:p="http://schemas.openxmlformats.org/presentationml/2006/main">
-  <p:cSld>
-    <p:spTree>
-      <p:nvGrpSpPr>
-        <p:cNvPr id="1" name=""/>
-        <p:cNvGrpSpPr/>
-        <p:nvPr/>
-      </p:nvGrpSpPr>
-      <p:grpSpPr>
-        <a:xfrm>
-          <a:off x="0" y="0"/>
-          <a:ext cx="0" cy="0"/>
-          <a:chOff x="0" y="0"/>
-          <a:chExt cx="0" cy="0"/>
-        </a:xfrm>
-      </p:grpSpPr>
-      <p:sp>
-        <p:nvSpPr>
-          <p:cNvPr id="2" name="Slide Image Placeholder 1"/>
-          <p:cNvSpPr>
-            <a:spLocks noGrp="1" noRot="1" noChangeAspect="1"/>
-          </p:cNvSpPr>
-          <p:nvPr>
-            <p:ph type="sldImg"/>
-          </p:nvPr>
-        </p:nvSpPr>
-        <p:spPr/>
-      </p:sp>
-      <p:sp>
-        <p:nvSpPr>
-          <p:cNvPr id="3" name="Notes Placeholder 2"/>
-          <p:cNvSpPr>
-            <a:spLocks noGrp="1"/>
-          </p:cNvSpPr>
-          <p:nvPr>
-            <p:ph type="body" idx="1"/>
-          </p:nvPr>
-        </p:nvSpPr>
-        <p:spPr/>
-        <p:txBody>
-          <a:bodyPr/>
-          <a:lstStyle/>
-          <a:p>
-            <a:r>
-              <a:rPr lang="en-US" dirty="0"/>
-              <a:t/>
-            </a:r>
-            <a:endParaRPr lang="en-US" dirty="0"/>
-          </a:p>
-        </p:txBody>
-      </p:sp>
-      <p:sp>
-        <p:nvSpPr>
-          <p:cNvPr id="4" name="Slide Number Placeholder 3"/>
-          <p:cNvSpPr>
-            <a:spLocks noGrp="1"/>
-          </p:cNvSpPr>
-          <p:nvPr>
-            <p:ph type="sldNum" sz="quarter" idx="10"/>
-          </p:nvPr>
-        </p:nvSpPr>
-        <p:spPr/>
-        <p:txBody>
-          <a:bodyPr/>
-          <a:lstStyle/>
-          <a:p>
-            <a:fld id="{F7021451-1387-4CA6-816F-3879F97B5CBC}" type="slidenum">
-              <a:rPr lang="en-US"/>
-              <a:t>13</a:t>
-            </a:fld>
-            <a:endParaRPr lang="en-US"/>
-          </a:p>
-        </p:txBody>
-      </p:sp>
-    </p:spTree>
-    <p:extLst>
-      <p:ext uri="{BB962C8B-B14F-4D97-AF65-F5344CB8AC3E}">
-        <p14:creationId xmlns:p14="http://schemas.microsoft.com/office/powerpoint/2010/main" val="1024086991"/>
-      </p:ext>
-    </p:extLst>
-  </p:cSld>
-  <p:clrMapOvr>
-    <a:masterClrMapping/>
-  </p:clrMapOvr>
-</p:notes>
-</file>
-
 <file path=ppt/notesSlides/notesSlide2.xml><?xml version="1.0" encoding="utf-8"?>
 <p:notes xmlns:a="http://schemas.openxmlformats.org/drawingml/2006/main" xmlns:r="http://schemas.openxmlformats.org/officeDocument/2006/relationships" xmlns:p="http://schemas.openxmlformats.org/presentationml/2006/main">
   <p:cSld>
@@ -1943,15 +1854,45 @@
           <a:chExt cx="0" cy="0"/>
         </a:xfrm>
       </p:grpSpPr>
-      <p:sp>
-        <p:nvSpPr>
-          <p:cNvPr id="2" name="Text 0"/>
-          <p:cNvSpPr/>
-          <p:nvPr/>
-        </p:nvSpPr>
-        <p:spPr>
-          <a:xfrm>
-            <a:off x="400050" y="457200"/>
+      <p:pic>
+        <p:nvPicPr>
+          <p:cNvPr id="2" name="Image 0" descr="/Users/dpadmana/projects/ppt-gen/themes/scientific/logo.svg">    </p:cNvPr>
+          <p:cNvPicPr>
+            <a:picLocks noChangeAspect="1"/>
+          </p:cNvPicPr>
+          <p:nvPr/>
+        </p:nvPicPr>
+        <p:blipFill>
+          <a:blip r:embed="rId1">
+            <a:extLst>
+              <a:ext uri="{96DAC541-7B7A-43D3-8B79-37D633B846F1}">
+                <asvg:svgBlip xmlns:asvg="http://schemas.microsoft.com/office/drawing/2016/SVG/main" r:embed="rId2"/>
+              </a:ext>
+            </a:extLst>
+          </a:blip>
+          <a:stretch>
+            <a:fillRect/>
+          </a:stretch>
+        </p:blipFill>
+        <p:spPr>
+          <a:xfrm>
+            <a:off x="11430000" y="266700"/>
+            <a:ext cx="419100" cy="419100"/>
+          </a:xfrm>
+          <a:prstGeom prst="rect">
+            <a:avLst/>
+          </a:prstGeom>
+        </p:spPr>
+      </p:pic>
+      <p:sp>
+        <p:nvSpPr>
+          <p:cNvPr id="3" name="Text 0"/>
+          <p:cNvSpPr/>
+          <p:nvPr/>
+        </p:nvSpPr>
+        <p:spPr>
+          <a:xfrm>
+            <a:off x="400050" y="381000"/>
             <a:ext cx="3048000" cy="171450"/>
           </a:xfrm>
           <a:prstGeom prst="rect">
@@ -1984,14 +1925,14 @@
       </p:sp>
       <p:sp>
         <p:nvSpPr>
-          <p:cNvPr id="3" name="Text 1"/>
-          <p:cNvSpPr/>
-          <p:nvPr/>
-        </p:nvSpPr>
-        <p:spPr>
-          <a:xfrm>
-            <a:off x="400050" y="1143000"/>
-            <a:ext cx="7239000" cy="2095500"/>
+          <p:cNvPr id="4" name="Text 1"/>
+          <p:cNvSpPr/>
+          <p:nvPr/>
+        </p:nvSpPr>
+        <p:spPr>
+          <a:xfrm>
+            <a:off x="400050" y="838200"/>
+            <a:ext cx="7239000" cy="914400"/>
           </a:xfrm>
           <a:prstGeom prst="rect">
             <a:avLst/>
@@ -2007,7 +1948,7 @@
               <a:buNone/>
             </a:pPr>
             <a:r>
-              <a:rPr lang="en-US" sz="4400" b="1" dirty="0">
+              <a:rPr lang="en-US" sz="4000" b="1" dirty="0">
                 <a:solidFill>
                   <a:srgbClr val="EAEAEA"/>
                 </a:solidFill>
@@ -2015,40 +1956,61 @@
                 <a:ea typeface="Helvetica Neue" pitchFamily="34" charset="-122"/>
                 <a:cs typeface="Helvetica Neue" pitchFamily="34" charset="-120"/>
               </a:rPr>
-              <a:t>Mixture of Experts
-for large language models
-</a:t>
-            </a:r>
-            <a:endParaRPr lang="en-US" sz="4400" dirty="0"/>
-          </a:p>
-        </p:txBody>
-      </p:sp>
-      <p:sp>
-        <p:nvSpPr>
-          <p:cNvPr id="4" name="Text 2"/>
-          <p:cNvSpPr/>
-          <p:nvPr/>
-        </p:nvSpPr>
-        <p:spPr>
-          <a:xfrm>
-            <a:off x="400050" y="3429000"/>
-            <a:ext cx="6858000" cy="666750"/>
-          </a:xfrm>
-          <a:prstGeom prst="rect">
-            <a:avLst/>
-          </a:prstGeom>
-          <a:noFill/>
-          <a:ln/>
-        </p:spPr>
-        <p:txBody>
-          <a:bodyPr wrap="square" lIns="0" tIns="0" rIns="0" bIns="0" rtlCol="0" anchor="t"/>
-          <a:lstStyle/>
+              <a:t>Mixture of Experts</a:t>
+            </a:r>
+            <a:endParaRPr lang="en-US" sz="4000" dirty="0"/>
+          </a:p>
           <a:p>
             <a:pPr algn="l" indent="0" marL="0">
               <a:buNone/>
             </a:pPr>
             <a:r>
-              <a:rPr lang="en-US" sz="2000" dirty="0">
+              <a:rPr lang="en-US" sz="4000" b="1" dirty="0">
+                <a:solidFill>
+                  <a:srgbClr val="EAEAEA"/>
+                </a:solidFill>
+                <a:latin typeface="Helvetica Neue" pitchFamily="34" charset="0"/>
+                <a:ea typeface="Helvetica Neue" pitchFamily="34" charset="-122"/>
+                <a:cs typeface="Helvetica Neue" pitchFamily="34" charset="-120"/>
+              </a:rPr>
+              <a:t>for large language models</a:t>
+            </a:r>
+            <a:endParaRPr lang="en-US" sz="4000" dirty="0"/>
+          </a:p>
+          <a:p>
+            <a:pPr algn="l" indent="0" marL="0">
+              <a:buNone/>
+            </a:pPr>
+            <a:endParaRPr lang="en-US" sz="4000" dirty="0"/>
+          </a:p>
+        </p:txBody>
+      </p:sp>
+      <p:sp>
+        <p:nvSpPr>
+          <p:cNvPr id="5" name="Text 2"/>
+          <p:cNvSpPr/>
+          <p:nvPr/>
+        </p:nvSpPr>
+        <p:spPr>
+          <a:xfrm>
+            <a:off x="400050" y="1924050"/>
+            <a:ext cx="6858000" cy="609600"/>
+          </a:xfrm>
+          <a:prstGeom prst="rect">
+            <a:avLst/>
+          </a:prstGeom>
+          <a:noFill/>
+          <a:ln/>
+        </p:spPr>
+        <p:txBody>
+          <a:bodyPr wrap="square" lIns="0" tIns="0" rIns="0" bIns="0" rtlCol="0" anchor="t"/>
+          <a:lstStyle/>
+          <a:p>
+            <a:pPr algn="l" indent="0" marL="0">
+              <a:buNone/>
+            </a:pPr>
+            <a:r>
+              <a:rPr lang="en-US" sz="1700" dirty="0">
                 <a:solidFill>
                   <a:srgbClr val="6C6C8A"/>
                 </a:solidFill>
@@ -2058,19 +2020,19 @@
               </a:rPr>
               <a:t>Sparse activation, dense capacity—how routing, load balance and capacity interact at scale.</a:t>
             </a:r>
-            <a:endParaRPr lang="en-US" sz="2000" dirty="0"/>
-          </a:p>
-        </p:txBody>
-      </p:sp>
-      <p:sp>
-        <p:nvSpPr>
-          <p:cNvPr id="5" name="Shape 3"/>
-          <p:cNvSpPr/>
-          <p:nvPr/>
-        </p:nvSpPr>
-        <p:spPr>
-          <a:xfrm>
-            <a:off x="400050" y="4381500"/>
+            <a:endParaRPr lang="en-US" sz="1700" dirty="0"/>
+          </a:p>
+        </p:txBody>
+      </p:sp>
+      <p:sp>
+        <p:nvSpPr>
+          <p:cNvPr id="6" name="Shape 3"/>
+          <p:cNvSpPr/>
+          <p:nvPr/>
+        </p:nvSpPr>
+        <p:spPr>
+          <a:xfrm>
+            <a:off x="400050" y="2609850"/>
             <a:ext cx="1238250" cy="285750"/>
           </a:xfrm>
           <a:prstGeom prst="roundRect">
@@ -2091,13 +2053,13 @@
       </p:sp>
       <p:sp>
         <p:nvSpPr>
-          <p:cNvPr id="6" name="Text 4"/>
-          <p:cNvSpPr/>
-          <p:nvPr/>
-        </p:nvSpPr>
-        <p:spPr>
-          <a:xfrm>
-            <a:off x="476250" y="4438650"/>
+          <p:cNvPr id="7" name="Text 4"/>
+          <p:cNvSpPr/>
+          <p:nvPr/>
+        </p:nvSpPr>
+        <p:spPr>
+          <a:xfrm>
+            <a:off x="476250" y="2667000"/>
             <a:ext cx="1085850" cy="171450"/>
           </a:xfrm>
           <a:prstGeom prst="rect">
@@ -2130,13 +2092,13 @@
       </p:sp>
       <p:sp>
         <p:nvSpPr>
-          <p:cNvPr id="7" name="Text 5"/>
-          <p:cNvSpPr/>
-          <p:nvPr/>
-        </p:nvSpPr>
-        <p:spPr>
-          <a:xfrm>
-            <a:off x="400050" y="4876800"/>
+          <p:cNvPr id="8" name="Text 5"/>
+          <p:cNvSpPr/>
+          <p:nvPr/>
+        </p:nvSpPr>
+        <p:spPr>
+          <a:xfrm>
+            <a:off x="400050" y="3028950"/>
             <a:ext cx="6667500" cy="342900"/>
           </a:xfrm>
           <a:prstGeom prst="rect">
@@ -2169,7 +2131,7 @@
       </p:sp>
       <p:sp>
         <p:nvSpPr>
-          <p:cNvPr id="8" name="Shape 6"/>
+          <p:cNvPr id="9" name="Shape 6"/>
           <p:cNvSpPr/>
           <p:nvPr/>
         </p:nvSpPr>
@@ -2196,7 +2158,7 @@
       </p:sp>
       <p:sp>
         <p:nvSpPr>
-          <p:cNvPr id="9" name="Shape 7"/>
+          <p:cNvPr id="10" name="Shape 7"/>
           <p:cNvSpPr/>
           <p:nvPr/>
         </p:nvSpPr>
@@ -2223,7 +2185,7 @@
       </p:sp>
       <p:sp>
         <p:nvSpPr>
-          <p:cNvPr id="10" name="Shape 8"/>
+          <p:cNvPr id="11" name="Shape 8"/>
           <p:cNvSpPr/>
           <p:nvPr/>
         </p:nvSpPr>
@@ -2250,7 +2212,7 @@
       </p:sp>
       <p:sp>
         <p:nvSpPr>
-          <p:cNvPr id="11" name="Shape 9"/>
+          <p:cNvPr id="12" name="Shape 9"/>
           <p:cNvSpPr/>
           <p:nvPr/>
         </p:nvSpPr>
@@ -2277,7 +2239,7 @@
       </p:sp>
       <p:sp>
         <p:nvSpPr>
-          <p:cNvPr id="12" name="Shape 10"/>
+          <p:cNvPr id="13" name="Shape 10"/>
           <p:cNvSpPr/>
           <p:nvPr/>
         </p:nvSpPr>
@@ -2304,7 +2266,7 @@
       </p:sp>
       <p:sp>
         <p:nvSpPr>
-          <p:cNvPr id="13" name="Shape 11"/>
+          <p:cNvPr id="14" name="Shape 11"/>
           <p:cNvSpPr/>
           <p:nvPr/>
         </p:nvSpPr>
@@ -2331,7 +2293,7 @@
       </p:sp>
       <p:sp>
         <p:nvSpPr>
-          <p:cNvPr id="14" name="Text 12"/>
+          <p:cNvPr id="15" name="Text 12"/>
           <p:cNvSpPr/>
           <p:nvPr/>
         </p:nvSpPr>
@@ -2370,14 +2332,14 @@
       </p:sp>
       <p:sp>
         <p:nvSpPr>
-          <p:cNvPr id="15" name="Text 13"/>
+          <p:cNvPr id="16" name="Text 13"/>
           <p:cNvSpPr/>
           <p:nvPr/>
         </p:nvSpPr>
         <p:spPr>
           <a:xfrm>
             <a:off x="400050" y="6457950"/>
-            <a:ext cx="8572500" cy="171450"/>
+            <a:ext cx="4953000" cy="171450"/>
           </a:xfrm>
           <a:prstGeom prst="rect">
             <a:avLst/>
@@ -2409,7 +2371,7 @@
       </p:sp>
       <p:sp>
         <p:nvSpPr>
-          <p:cNvPr id="16" name="Text 14"/>
+          <p:cNvPr id="17" name="Text 14"/>
           <p:cNvSpPr/>
           <p:nvPr/>
         </p:nvSpPr>
@@ -2440,7 +2402,7 @@
                 <a:ea typeface="Helvetica Neue" pitchFamily="34" charset="-122"/>
                 <a:cs typeface="Helvetica Neue" pitchFamily="34" charset="-120"/>
               </a:rPr>
-              <a:t>00</a:t>
+              <a:t>01</a:t>
             </a:r>
             <a:endParaRPr lang="en-US" sz="1200" dirty="0"/>
           </a:p>
@@ -2478,16 +2440,46 @@
           <a:chExt cx="0" cy="0"/>
         </a:xfrm>
       </p:grpSpPr>
-      <p:sp>
-        <p:nvSpPr>
-          <p:cNvPr id="2" name="Text 0"/>
-          <p:cNvSpPr/>
-          <p:nvPr/>
-        </p:nvSpPr>
-        <p:spPr>
-          <a:xfrm>
-            <a:off x="400050" y="304800"/>
-            <a:ext cx="11049000" cy="533400"/>
+      <p:pic>
+        <p:nvPicPr>
+          <p:cNvPr id="2" name="Image 0" descr="/Users/dpadmana/projects/ppt-gen/themes/scientific/logo.svg">    </p:cNvPr>
+          <p:cNvPicPr>
+            <a:picLocks noChangeAspect="1"/>
+          </p:cNvPicPr>
+          <p:nvPr/>
+        </p:nvPicPr>
+        <p:blipFill>
+          <a:blip r:embed="rId1">
+            <a:extLst>
+              <a:ext uri="{96DAC541-7B7A-43D3-8B79-37D633B846F1}">
+                <asvg:svgBlip xmlns:asvg="http://schemas.microsoft.com/office/drawing/2016/SVG/main" r:embed="rId2"/>
+              </a:ext>
+            </a:extLst>
+          </a:blip>
+          <a:stretch>
+            <a:fillRect/>
+          </a:stretch>
+        </p:blipFill>
+        <p:spPr>
+          <a:xfrm>
+            <a:off x="11430000" y="266700"/>
+            <a:ext cx="419100" cy="419100"/>
+          </a:xfrm>
+          <a:prstGeom prst="rect">
+            <a:avLst/>
+          </a:prstGeom>
+        </p:spPr>
+      </p:pic>
+      <p:sp>
+        <p:nvSpPr>
+          <p:cNvPr id="3" name="Text 0"/>
+          <p:cNvSpPr/>
+          <p:nvPr/>
+        </p:nvSpPr>
+        <p:spPr>
+          <a:xfrm>
+            <a:off x="400050" y="247650"/>
+            <a:ext cx="10839450" cy="381000"/>
           </a:xfrm>
           <a:prstGeom prst="rect">
             <a:avLst/>
@@ -2503,7 +2495,7 @@
               <a:buNone/>
             </a:pPr>
             <a:r>
-              <a:rPr lang="en-US" sz="3200" b="1" dirty="0">
+              <a:rPr lang="en-US" sz="3000" b="1" dirty="0">
                 <a:solidFill>
                   <a:srgbClr val="EAEAEA"/>
                 </a:solidFill>
@@ -2511,22 +2503,22 @@
                 <a:ea typeface="Helvetica Neue" pitchFamily="34" charset="-122"/>
                 <a:cs typeface="Helvetica Neue" pitchFamily="34" charset="-120"/>
               </a:rPr>
-              <a:t>Design choices</a:t>
-            </a:r>
-            <a:endParaRPr lang="en-US" sz="3200" dirty="0"/>
-          </a:p>
-        </p:txBody>
-      </p:sp>
-      <p:sp>
-        <p:nvSpPr>
-          <p:cNvPr id="3" name="Text 1"/>
+              <a:t>Design space and operating points</a:t>
+            </a:r>
+            <a:endParaRPr lang="en-US" sz="3000" dirty="0"/>
+          </a:p>
+        </p:txBody>
+      </p:sp>
+      <p:sp>
+        <p:nvSpPr>
+          <p:cNvPr id="4" name="Text 1"/>
           <p:cNvSpPr/>
           <p:nvPr/>
         </p:nvSpPr>
         <p:spPr>
           <a:xfrm>
             <a:off x="400050" y="6457950"/>
-            <a:ext cx="8572500" cy="171450"/>
+            <a:ext cx="4953000" cy="171450"/>
           </a:xfrm>
           <a:prstGeom prst="rect">
             <a:avLst/>
@@ -2558,7 +2550,7 @@
       </p:sp>
       <p:sp>
         <p:nvSpPr>
-          <p:cNvPr id="4" name="Text 2"/>
+          <p:cNvPr id="5" name="Text 2"/>
           <p:cNvSpPr/>
           <p:nvPr/>
         </p:nvSpPr>
@@ -2597,18 +2589,57 @@
       </p:sp>
       <p:sp>
         <p:nvSpPr>
-          <p:cNvPr id="5" name="Shape 3"/>
-          <p:cNvSpPr/>
-          <p:nvPr/>
-        </p:nvSpPr>
-        <p:spPr>
-          <a:xfrm>
-            <a:off x="1543050" y="1295400"/>
-            <a:ext cx="4933950" cy="2190750"/>
+          <p:cNvPr id="6" name="Text 3"/>
+          <p:cNvSpPr/>
+          <p:nvPr/>
+        </p:nvSpPr>
+        <p:spPr>
+          <a:xfrm>
+            <a:off x="400050" y="819150"/>
+            <a:ext cx="6600825" cy="171450"/>
+          </a:xfrm>
+          <a:prstGeom prst="rect">
+            <a:avLst/>
+          </a:prstGeom>
+          <a:noFill/>
+          <a:ln/>
+        </p:spPr>
+        <p:txBody>
+          <a:bodyPr wrap="square" lIns="0" tIns="0" rIns="0" bIns="0" rtlCol="0" anchor="t"/>
+          <a:lstStyle/>
+          <a:p>
+            <a:pPr algn="l" indent="0" marL="0">
+              <a:buNone/>
+            </a:pPr>
+            <a:r>
+              <a:rPr lang="en-US" sz="1100" b="1" dirty="0">
+                <a:solidFill>
+                  <a:srgbClr val="6C6C8A"/>
+                </a:solidFill>
+                <a:latin typeface="Helvetica Neue" pitchFamily="34" charset="0"/>
+                <a:ea typeface="Helvetica Neue" pitchFamily="34" charset="-122"/>
+                <a:cs typeface="Helvetica Neue" pitchFamily="34" charset="-120"/>
+              </a:rPr>
+              <a:t>DESIGN CHOICES</a:t>
+            </a:r>
+            <a:endParaRPr lang="en-US" sz="1100" dirty="0"/>
+          </a:p>
+        </p:txBody>
+      </p:sp>
+      <p:sp>
+        <p:nvSpPr>
+          <p:cNvPr id="7" name="Shape 4"/>
+          <p:cNvSpPr/>
+          <p:nvPr/>
+        </p:nvSpPr>
+        <p:spPr>
+          <a:xfrm>
+            <a:off x="1543050" y="1143000"/>
+            <a:ext cx="2538413" cy="2266950"/>
           </a:xfrm>
           <a:prstGeom prst="roundRect">
             <a:avLst>
-              <a:gd name="adj" fmla="val 4174"/>
+              <a:gd name="adj" fmla="val 4034"/>
             </a:avLst>
           </a:prstGeom>
           <a:solidFill>
@@ -2624,18 +2655,18 @@
       </p:sp>
       <p:sp>
         <p:nvSpPr>
-          <p:cNvPr id="6" name="Shape 4"/>
-          <p:cNvSpPr/>
-          <p:nvPr/>
-        </p:nvSpPr>
-        <p:spPr>
-          <a:xfrm>
-            <a:off x="6572250" y="1295400"/>
-            <a:ext cx="4933950" cy="2190750"/>
+          <p:cNvPr id="8" name="Shape 5"/>
+          <p:cNvSpPr/>
+          <p:nvPr/>
+        </p:nvSpPr>
+        <p:spPr>
+          <a:xfrm>
+            <a:off x="4176712" y="1143000"/>
+            <a:ext cx="2538413" cy="2266950"/>
           </a:xfrm>
           <a:prstGeom prst="roundRect">
             <a:avLst>
-              <a:gd name="adj" fmla="val 4174"/>
+              <a:gd name="adj" fmla="val 4034"/>
             </a:avLst>
           </a:prstGeom>
           <a:solidFill>
@@ -2651,18 +2682,18 @@
       </p:sp>
       <p:sp>
         <p:nvSpPr>
-          <p:cNvPr id="7" name="Shape 5"/>
-          <p:cNvSpPr/>
-          <p:nvPr/>
-        </p:nvSpPr>
-        <p:spPr>
-          <a:xfrm>
-            <a:off x="1543050" y="3581400"/>
-            <a:ext cx="4933950" cy="2190750"/>
+          <p:cNvPr id="9" name="Shape 6"/>
+          <p:cNvSpPr/>
+          <p:nvPr/>
+        </p:nvSpPr>
+        <p:spPr>
+          <a:xfrm>
+            <a:off x="1543050" y="3505200"/>
+            <a:ext cx="2538413" cy="2266950"/>
           </a:xfrm>
           <a:prstGeom prst="roundRect">
             <a:avLst>
-              <a:gd name="adj" fmla="val 4174"/>
+              <a:gd name="adj" fmla="val 4034"/>
             </a:avLst>
           </a:prstGeom>
           <a:solidFill>
@@ -2678,18 +2709,18 @@
       </p:sp>
       <p:sp>
         <p:nvSpPr>
-          <p:cNvPr id="8" name="Shape 6"/>
-          <p:cNvSpPr/>
-          <p:nvPr/>
-        </p:nvSpPr>
-        <p:spPr>
-          <a:xfrm>
-            <a:off x="6572250" y="3581400"/>
-            <a:ext cx="4933950" cy="2190750"/>
+          <p:cNvPr id="10" name="Shape 7"/>
+          <p:cNvSpPr/>
+          <p:nvPr/>
+        </p:nvSpPr>
+        <p:spPr>
+          <a:xfrm>
+            <a:off x="4176712" y="3505200"/>
+            <a:ext cx="2538413" cy="2266950"/>
           </a:xfrm>
           <a:prstGeom prst="roundRect">
             <a:avLst>
-              <a:gd name="adj" fmla="val 4174"/>
+              <a:gd name="adj" fmla="val 4034"/>
             </a:avLst>
           </a:prstGeom>
           <a:solidFill>
@@ -2705,13 +2736,13 @@
       </p:sp>
       <p:sp>
         <p:nvSpPr>
-          <p:cNvPr id="9" name="Text 7"/>
-          <p:cNvSpPr/>
-          <p:nvPr/>
-        </p:nvSpPr>
-        <p:spPr>
-          <a:xfrm>
-            <a:off x="400050" y="1295400"/>
+          <p:cNvPr id="11" name="Text 8"/>
+          <p:cNvSpPr/>
+          <p:nvPr/>
+        </p:nvSpPr>
+        <p:spPr>
+          <a:xfrm>
+            <a:off x="400050" y="1143000"/>
             <a:ext cx="1047750" cy="266700"/>
           </a:xfrm>
           <a:prstGeom prst="rect">
@@ -2744,14 +2775,14 @@
       </p:sp>
       <p:sp>
         <p:nvSpPr>
-          <p:cNvPr id="10" name="Text 8"/>
+          <p:cNvPr id="12" name="Text 9"/>
           <p:cNvSpPr/>
           <p:nvPr/>
         </p:nvSpPr>
         <p:spPr>
           <a:xfrm>
             <a:off x="1543050" y="5924550"/>
-            <a:ext cx="9963150" cy="266700"/>
+            <a:ext cx="5172075" cy="266700"/>
           </a:xfrm>
           <a:prstGeom prst="rect">
             <a:avLst/>
@@ -2783,14 +2814,14 @@
       </p:sp>
       <p:sp>
         <p:nvSpPr>
-          <p:cNvPr id="11" name="Text 9"/>
-          <p:cNvSpPr/>
-          <p:nvPr/>
-        </p:nvSpPr>
-        <p:spPr>
-          <a:xfrm>
-            <a:off x="1695450" y="1428750"/>
-            <a:ext cx="4629150" cy="171450"/>
+          <p:cNvPr id="13" name="Text 10"/>
+          <p:cNvSpPr/>
+          <p:nvPr/>
+        </p:nvSpPr>
+        <p:spPr>
+          <a:xfrm>
+            <a:off x="1695450" y="1276350"/>
+            <a:ext cx="2233613" cy="171450"/>
           </a:xfrm>
           <a:prstGeom prst="rect">
             <a:avLst/>
@@ -2822,14 +2853,14 @@
       </p:sp>
       <p:sp>
         <p:nvSpPr>
-          <p:cNvPr id="12" name="Text 10"/>
-          <p:cNvSpPr/>
-          <p:nvPr/>
-        </p:nvSpPr>
-        <p:spPr>
-          <a:xfrm>
-            <a:off x="6724650" y="1428750"/>
-            <a:ext cx="4629150" cy="171450"/>
+          <p:cNvPr id="14" name="Text 11"/>
+          <p:cNvSpPr/>
+          <p:nvPr/>
+        </p:nvSpPr>
+        <p:spPr>
+          <a:xfrm>
+            <a:off x="4329113" y="1276350"/>
+            <a:ext cx="2233613" cy="171450"/>
           </a:xfrm>
           <a:prstGeom prst="rect">
             <a:avLst/>
@@ -2861,14 +2892,14 @@
       </p:sp>
       <p:sp>
         <p:nvSpPr>
-          <p:cNvPr id="13" name="Text 11"/>
-          <p:cNvSpPr/>
-          <p:nvPr/>
-        </p:nvSpPr>
-        <p:spPr>
-          <a:xfrm>
-            <a:off x="1695450" y="3714750"/>
-            <a:ext cx="4629150" cy="171450"/>
+          <p:cNvPr id="15" name="Text 12"/>
+          <p:cNvSpPr/>
+          <p:nvPr/>
+        </p:nvSpPr>
+        <p:spPr>
+          <a:xfrm>
+            <a:off x="1695450" y="3638550"/>
+            <a:ext cx="2233613" cy="171450"/>
           </a:xfrm>
           <a:prstGeom prst="rect">
             <a:avLst/>
@@ -2892,7 +2923,7 @@
                 <a:ea typeface="Helvetica Neue" pitchFamily="34" charset="-122"/>
                 <a:cs typeface="Helvetica Neue" pitchFamily="34" charset="-120"/>
               </a:rPr>
-              <a:t>DENSE BASELINE</a:t>
+              <a:t>DENSE</a:t>
             </a:r>
             <a:endParaRPr lang="en-US" sz="1100" dirty="0"/>
           </a:p>
@@ -2900,14 +2931,14 @@
       </p:sp>
       <p:sp>
         <p:nvSpPr>
-          <p:cNvPr id="14" name="Text 12"/>
-          <p:cNvSpPr/>
-          <p:nvPr/>
-        </p:nvSpPr>
-        <p:spPr>
-          <a:xfrm>
-            <a:off x="6724650" y="3714750"/>
-            <a:ext cx="4629150" cy="171450"/>
+          <p:cNvPr id="16" name="Text 13"/>
+          <p:cNvSpPr/>
+          <p:nvPr/>
+        </p:nvSpPr>
+        <p:spPr>
+          <a:xfrm>
+            <a:off x="4329113" y="3638550"/>
+            <a:ext cx="2233613" cy="171450"/>
           </a:xfrm>
           <a:prstGeom prst="rect">
             <a:avLst/>
@@ -2931,7 +2962,7 @@
                 <a:ea typeface="Helvetica Neue" pitchFamily="34" charset="-122"/>
                 <a:cs typeface="Helvetica Neue" pitchFamily="34" charset="-120"/>
               </a:rPr>
-              <a:t>SOFT MOE / EXPERT CHOICE</a:t>
+              <a:t>SOFT MOE</a:t>
             </a:r>
             <a:endParaRPr lang="en-US" sz="1100" dirty="0"/>
           </a:p>
@@ -2939,14 +2970,14 @@
       </p:sp>
       <p:sp>
         <p:nvSpPr>
-          <p:cNvPr id="15" name="Shape 13"/>
-          <p:cNvSpPr/>
-          <p:nvPr/>
-        </p:nvSpPr>
-        <p:spPr>
-          <a:xfrm>
-            <a:off x="1695450" y="1714500"/>
-            <a:ext cx="4629150" cy="381000"/>
+          <p:cNvPr id="17" name="Shape 14"/>
+          <p:cNvSpPr/>
+          <p:nvPr/>
+        </p:nvSpPr>
+        <p:spPr>
+          <a:xfrm>
+            <a:off x="1695450" y="1562100"/>
+            <a:ext cx="2233613" cy="381000"/>
           </a:xfrm>
           <a:prstGeom prst="roundRect">
             <a:avLst>
@@ -2966,14 +2997,14 @@
       </p:sp>
       <p:sp>
         <p:nvSpPr>
-          <p:cNvPr id="16" name="Text 14"/>
-          <p:cNvSpPr/>
-          <p:nvPr/>
-        </p:nvSpPr>
-        <p:spPr>
-          <a:xfrm>
-            <a:off x="1809750" y="1714500"/>
-            <a:ext cx="4400550" cy="381000"/>
+          <p:cNvPr id="18" name="Text 15"/>
+          <p:cNvSpPr/>
+          <p:nvPr/>
+        </p:nvSpPr>
+        <p:spPr>
+          <a:xfrm>
+            <a:off x="1809750" y="1562100"/>
+            <a:ext cx="2005013" cy="381000"/>
           </a:xfrm>
           <a:prstGeom prst="rect">
             <a:avLst/>
@@ -3005,14 +3036,14 @@
       </p:sp>
       <p:sp>
         <p:nvSpPr>
-          <p:cNvPr id="17" name="Shape 15"/>
-          <p:cNvSpPr/>
-          <p:nvPr/>
-        </p:nvSpPr>
-        <p:spPr>
-          <a:xfrm>
-            <a:off x="6724650" y="1714500"/>
-            <a:ext cx="4629150" cy="381000"/>
+          <p:cNvPr id="19" name="Shape 16"/>
+          <p:cNvSpPr/>
+          <p:nvPr/>
+        </p:nvSpPr>
+        <p:spPr>
+          <a:xfrm>
+            <a:off x="4329113" y="1562100"/>
+            <a:ext cx="2233613" cy="381000"/>
           </a:xfrm>
           <a:prstGeom prst="roundRect">
             <a:avLst>
@@ -3032,14 +3063,14 @@
       </p:sp>
       <p:sp>
         <p:nvSpPr>
-          <p:cNvPr id="18" name="Text 16"/>
-          <p:cNvSpPr/>
-          <p:nvPr/>
-        </p:nvSpPr>
-        <p:spPr>
-          <a:xfrm>
-            <a:off x="6838950" y="1714500"/>
-            <a:ext cx="4400550" cy="381000"/>
+          <p:cNvPr id="20" name="Text 17"/>
+          <p:cNvSpPr/>
+          <p:nvPr/>
+        </p:nvSpPr>
+        <p:spPr>
+          <a:xfrm>
+            <a:off x="4443413" y="1562100"/>
+            <a:ext cx="2005013" cy="381000"/>
           </a:xfrm>
           <a:prstGeom prst="rect">
             <a:avLst/>
@@ -3071,14 +3102,14 @@
       </p:sp>
       <p:sp>
         <p:nvSpPr>
-          <p:cNvPr id="19" name="Shape 17"/>
-          <p:cNvSpPr/>
-          <p:nvPr/>
-        </p:nvSpPr>
-        <p:spPr>
-          <a:xfrm>
-            <a:off x="1695450" y="4000500"/>
-            <a:ext cx="4629150" cy="381000"/>
+          <p:cNvPr id="21" name="Shape 18"/>
+          <p:cNvSpPr/>
+          <p:nvPr/>
+        </p:nvSpPr>
+        <p:spPr>
+          <a:xfrm>
+            <a:off x="1695450" y="3924300"/>
+            <a:ext cx="2233613" cy="381000"/>
           </a:xfrm>
           <a:prstGeom prst="roundRect">
             <a:avLst>
@@ -3098,14 +3129,14 @@
       </p:sp>
       <p:sp>
         <p:nvSpPr>
-          <p:cNvPr id="20" name="Text 18"/>
-          <p:cNvSpPr/>
-          <p:nvPr/>
-        </p:nvSpPr>
-        <p:spPr>
-          <a:xfrm>
-            <a:off x="1809750" y="4000500"/>
-            <a:ext cx="4400550" cy="381000"/>
+          <p:cNvPr id="22" name="Text 19"/>
+          <p:cNvSpPr/>
+          <p:nvPr/>
+        </p:nvSpPr>
+        <p:spPr>
+          <a:xfrm>
+            <a:off x="1809750" y="3924300"/>
+            <a:ext cx="2005013" cy="381000"/>
           </a:xfrm>
           <a:prstGeom prst="rect">
             <a:avLst/>
@@ -3137,14 +3168,14 @@
       </p:sp>
       <p:sp>
         <p:nvSpPr>
-          <p:cNvPr id="21" name="Shape 19"/>
-          <p:cNvSpPr/>
-          <p:nvPr/>
-        </p:nvSpPr>
-        <p:spPr>
-          <a:xfrm>
-            <a:off x="6724650" y="4000500"/>
-            <a:ext cx="4629150" cy="381000"/>
+          <p:cNvPr id="23" name="Shape 20"/>
+          <p:cNvSpPr/>
+          <p:nvPr/>
+        </p:nvSpPr>
+        <p:spPr>
+          <a:xfrm>
+            <a:off x="4329113" y="3924300"/>
+            <a:ext cx="2233613" cy="381000"/>
           </a:xfrm>
           <a:prstGeom prst="roundRect">
             <a:avLst>
@@ -3164,14 +3195,14 @@
       </p:sp>
       <p:sp>
         <p:nvSpPr>
-          <p:cNvPr id="22" name="Text 20"/>
-          <p:cNvSpPr/>
-          <p:nvPr/>
-        </p:nvSpPr>
-        <p:spPr>
-          <a:xfrm>
-            <a:off x="6838950" y="4000500"/>
-            <a:ext cx="4400550" cy="381000"/>
+          <p:cNvPr id="24" name="Text 21"/>
+          <p:cNvSpPr/>
+          <p:nvPr/>
+        </p:nvSpPr>
+        <p:spPr>
+          <a:xfrm>
+            <a:off x="4443413" y="3924300"/>
+            <a:ext cx="2005013" cy="381000"/>
           </a:xfrm>
           <a:prstGeom prst="rect">
             <a:avLst/>
@@ -3196,6 +3227,682 @@
                 <a:cs typeface="Helvetica Neue" pitchFamily="34" charset="-120"/>
               </a:rPr>
               <a:t>Expert Choice</a:t>
+            </a:r>
+            <a:endParaRPr lang="en-US" sz="1600" dirty="0"/>
+          </a:p>
+        </p:txBody>
+      </p:sp>
+      <p:sp>
+        <p:nvSpPr>
+          <p:cNvPr id="25" name="Text 22"/>
+          <p:cNvSpPr/>
+          <p:nvPr/>
+        </p:nvSpPr>
+        <p:spPr>
+          <a:xfrm>
+            <a:off x="7153275" y="819150"/>
+            <a:ext cx="4638675" cy="171450"/>
+          </a:xfrm>
+          <a:prstGeom prst="rect">
+            <a:avLst/>
+          </a:prstGeom>
+          <a:noFill/>
+          <a:ln/>
+        </p:spPr>
+        <p:txBody>
+          <a:bodyPr wrap="square" lIns="0" tIns="0" rIns="0" bIns="0" rtlCol="0" anchor="t"/>
+          <a:lstStyle/>
+          <a:p>
+            <a:pPr algn="l" indent="0" marL="0">
+              <a:buNone/>
+            </a:pPr>
+            <a:r>
+              <a:rPr lang="en-US" sz="1100" b="1" dirty="0">
+                <a:solidFill>
+                  <a:srgbClr val="6C6C8A"/>
+                </a:solidFill>
+                <a:latin typeface="Helvetica Neue" pitchFamily="34" charset="0"/>
+                <a:ea typeface="Helvetica Neue" pitchFamily="34" charset="-122"/>
+                <a:cs typeface="Helvetica Neue" pitchFamily="34" charset="-120"/>
+              </a:rPr>
+              <a:t>OPERATING POINTS</a:t>
+            </a:r>
+            <a:endParaRPr lang="en-US" sz="1100" dirty="0"/>
+          </a:p>
+        </p:txBody>
+      </p:sp>
+      <p:sp>
+        <p:nvSpPr>
+          <p:cNvPr id="26" name="Shape 23"/>
+          <p:cNvSpPr/>
+          <p:nvPr/>
+        </p:nvSpPr>
+        <p:spPr>
+          <a:xfrm>
+            <a:off x="7153275" y="1143000"/>
+            <a:ext cx="2200275" cy="2343150"/>
+          </a:xfrm>
+          <a:prstGeom prst="roundRect">
+            <a:avLst>
+              <a:gd name="adj" fmla="val 4156"/>
+            </a:avLst>
+          </a:prstGeom>
+          <a:solidFill>
+            <a:srgbClr val="2B2B4A"/>
+          </a:solidFill>
+          <a:ln w="12700">
+            <a:solidFill>
+              <a:srgbClr val="2B2B4A"/>
+            </a:solidFill>
+            <a:prstDash val="solid"/>
+          </a:ln>
+        </p:spPr>
+      </p:sp>
+      <p:sp>
+        <p:nvSpPr>
+          <p:cNvPr id="27" name="Shape 24"/>
+          <p:cNvSpPr/>
+          <p:nvPr/>
+        </p:nvSpPr>
+        <p:spPr>
+          <a:xfrm>
+            <a:off x="7153275" y="1143000"/>
+            <a:ext cx="2200275" cy="76200"/>
+          </a:xfrm>
+          <a:prstGeom prst="rect">
+            <a:avLst/>
+          </a:prstGeom>
+          <a:solidFill>
+            <a:srgbClr val="4E79A7"/>
+          </a:solidFill>
+          <a:ln w="12700">
+            <a:solidFill>
+              <a:srgbClr val="4E79A7"/>
+            </a:solidFill>
+            <a:prstDash val="solid"/>
+          </a:ln>
+        </p:spPr>
+      </p:sp>
+      <p:sp>
+        <p:nvSpPr>
+          <p:cNvPr id="28" name="Text 25"/>
+          <p:cNvSpPr/>
+          <p:nvPr/>
+        </p:nvSpPr>
+        <p:spPr>
+          <a:xfrm>
+            <a:off x="7343775" y="1390650"/>
+            <a:ext cx="1819275" cy="171450"/>
+          </a:xfrm>
+          <a:prstGeom prst="rect">
+            <a:avLst/>
+          </a:prstGeom>
+          <a:noFill/>
+          <a:ln/>
+        </p:spPr>
+        <p:txBody>
+          <a:bodyPr wrap="square" lIns="0" tIns="0" rIns="0" bIns="0" rtlCol="0" anchor="t"/>
+          <a:lstStyle/>
+          <a:p>
+            <a:pPr algn="l" indent="0" marL="0">
+              <a:buNone/>
+            </a:pPr>
+            <a:r>
+              <a:rPr lang="en-US" sz="1100" b="1" dirty="0">
+                <a:solidFill>
+                  <a:srgbClr val="6C6C8A"/>
+                </a:solidFill>
+                <a:latin typeface="Helvetica Neue" pitchFamily="34" charset="0"/>
+                <a:ea typeface="Helvetica Neue" pitchFamily="34" charset="-122"/>
+                <a:cs typeface="Helvetica Neue" pitchFamily="34" charset="-120"/>
+              </a:rPr>
+              <a:t>EXPERTS</a:t>
+            </a:r>
+            <a:endParaRPr lang="en-US" sz="1100" dirty="0"/>
+          </a:p>
+        </p:txBody>
+      </p:sp>
+      <p:sp>
+        <p:nvSpPr>
+          <p:cNvPr id="29" name="Text 26"/>
+          <p:cNvSpPr/>
+          <p:nvPr/>
+        </p:nvSpPr>
+        <p:spPr>
+          <a:xfrm>
+            <a:off x="7343775" y="1790700"/>
+            <a:ext cx="1819275" cy="1009650"/>
+          </a:xfrm>
+          <a:prstGeom prst="rect">
+            <a:avLst/>
+          </a:prstGeom>
+          <a:noFill/>
+          <a:ln/>
+        </p:spPr>
+        <p:txBody>
+          <a:bodyPr wrap="none" lIns="0" tIns="0" rIns="0" bIns="0" rtlCol="0" anchor="ctr"/>
+          <a:lstStyle/>
+          <a:p>
+            <a:pPr algn="l" indent="0" marL="0">
+              <a:buNone/>
+            </a:pPr>
+            <a:r>
+              <a:rPr lang="en-US" sz="4000" b="1" dirty="0">
+                <a:solidFill>
+                  <a:srgbClr val="4E79A7"/>
+                </a:solidFill>
+                <a:latin typeface="Helvetica Neue" pitchFamily="34" charset="0"/>
+                <a:ea typeface="Helvetica Neue" pitchFamily="34" charset="-122"/>
+                <a:cs typeface="Helvetica Neue" pitchFamily="34" charset="-120"/>
+              </a:rPr>
+              <a:t>8–64</a:t>
+            </a:r>
+            <a:endParaRPr lang="en-US" sz="4000" dirty="0"/>
+          </a:p>
+        </p:txBody>
+      </p:sp>
+      <p:sp>
+        <p:nvSpPr>
+          <p:cNvPr id="30" name="Text 27"/>
+          <p:cNvSpPr/>
+          <p:nvPr/>
+        </p:nvSpPr>
+        <p:spPr>
+          <a:xfrm>
+            <a:off x="7343775" y="2933700"/>
+            <a:ext cx="1819275" cy="381000"/>
+          </a:xfrm>
+          <a:prstGeom prst="rect">
+            <a:avLst/>
+          </a:prstGeom>
+          <a:noFill/>
+          <a:ln/>
+        </p:spPr>
+        <p:txBody>
+          <a:bodyPr wrap="square" lIns="0" tIns="0" rIns="0" bIns="0" rtlCol="0" anchor="t"/>
+          <a:lstStyle/>
+          <a:p>
+            <a:pPr algn="l" indent="0" marL="0">
+              <a:buNone/>
+            </a:pPr>
+            <a:r>
+              <a:rPr lang="en-US" sz="1300" dirty="0">
+                <a:solidFill>
+                  <a:srgbClr val="6C6C8A"/>
+                </a:solidFill>
+                <a:latin typeface="Helvetica Neue" pitchFamily="34" charset="0"/>
+                <a:ea typeface="Helvetica Neue" pitchFamily="34" charset="-122"/>
+                <a:cs typeface="Helvetica Neue" pitchFamily="34" charset="-120"/>
+              </a:rPr>
+              <a:t>Per MoE layer</a:t>
+            </a:r>
+            <a:endParaRPr lang="en-US" sz="1300" dirty="0"/>
+          </a:p>
+        </p:txBody>
+      </p:sp>
+      <p:sp>
+        <p:nvSpPr>
+          <p:cNvPr id="31" name="Shape 28"/>
+          <p:cNvSpPr/>
+          <p:nvPr/>
+        </p:nvSpPr>
+        <p:spPr>
+          <a:xfrm>
+            <a:off x="9582150" y="1143000"/>
+            <a:ext cx="2200275" cy="2343150"/>
+          </a:xfrm>
+          <a:prstGeom prst="roundRect">
+            <a:avLst>
+              <a:gd name="adj" fmla="val 4156"/>
+            </a:avLst>
+          </a:prstGeom>
+          <a:solidFill>
+            <a:srgbClr val="2B2B4A"/>
+          </a:solidFill>
+          <a:ln w="12700">
+            <a:solidFill>
+              <a:srgbClr val="2B2B4A"/>
+            </a:solidFill>
+            <a:prstDash val="solid"/>
+          </a:ln>
+        </p:spPr>
+      </p:sp>
+      <p:sp>
+        <p:nvSpPr>
+          <p:cNvPr id="32" name="Shape 29"/>
+          <p:cNvSpPr/>
+          <p:nvPr/>
+        </p:nvSpPr>
+        <p:spPr>
+          <a:xfrm>
+            <a:off x="9582150" y="1143000"/>
+            <a:ext cx="2200275" cy="76200"/>
+          </a:xfrm>
+          <a:prstGeom prst="rect">
+            <a:avLst/>
+          </a:prstGeom>
+          <a:solidFill>
+            <a:srgbClr val="F28E2B"/>
+          </a:solidFill>
+          <a:ln w="12700">
+            <a:solidFill>
+              <a:srgbClr val="F28E2B"/>
+            </a:solidFill>
+            <a:prstDash val="solid"/>
+          </a:ln>
+        </p:spPr>
+      </p:sp>
+      <p:sp>
+        <p:nvSpPr>
+          <p:cNvPr id="33" name="Text 30"/>
+          <p:cNvSpPr/>
+          <p:nvPr/>
+        </p:nvSpPr>
+        <p:spPr>
+          <a:xfrm>
+            <a:off x="9772650" y="1390650"/>
+            <a:ext cx="1819275" cy="171450"/>
+          </a:xfrm>
+          <a:prstGeom prst="rect">
+            <a:avLst/>
+          </a:prstGeom>
+          <a:noFill/>
+          <a:ln/>
+        </p:spPr>
+        <p:txBody>
+          <a:bodyPr wrap="square" lIns="0" tIns="0" rIns="0" bIns="0" rtlCol="0" anchor="t"/>
+          <a:lstStyle/>
+          <a:p>
+            <a:pPr algn="l" indent="0" marL="0">
+              <a:buNone/>
+            </a:pPr>
+            <a:r>
+              <a:rPr lang="en-US" sz="1100" b="1" dirty="0">
+                <a:solidFill>
+                  <a:srgbClr val="6C6C8A"/>
+                </a:solidFill>
+                <a:latin typeface="Helvetica Neue" pitchFamily="34" charset="0"/>
+                <a:ea typeface="Helvetica Neue" pitchFamily="34" charset="-122"/>
+                <a:cs typeface="Helvetica Neue" pitchFamily="34" charset="-120"/>
+              </a:rPr>
+              <a:t>TOP-K</a:t>
+            </a:r>
+            <a:endParaRPr lang="en-US" sz="1100" dirty="0"/>
+          </a:p>
+        </p:txBody>
+      </p:sp>
+      <p:sp>
+        <p:nvSpPr>
+          <p:cNvPr id="34" name="Text 31"/>
+          <p:cNvSpPr/>
+          <p:nvPr/>
+        </p:nvSpPr>
+        <p:spPr>
+          <a:xfrm>
+            <a:off x="9772650" y="1790700"/>
+            <a:ext cx="1819275" cy="1009650"/>
+          </a:xfrm>
+          <a:prstGeom prst="rect">
+            <a:avLst/>
+          </a:prstGeom>
+          <a:noFill/>
+          <a:ln/>
+        </p:spPr>
+        <p:txBody>
+          <a:bodyPr wrap="none" lIns="0" tIns="0" rIns="0" bIns="0" rtlCol="0" anchor="ctr"/>
+          <a:lstStyle/>
+          <a:p>
+            <a:pPr algn="l" indent="0" marL="0">
+              <a:buNone/>
+            </a:pPr>
+            <a:r>
+              <a:rPr lang="en-US" sz="4000" b="1" dirty="0">
+                <a:solidFill>
+                  <a:srgbClr val="F28E2B"/>
+                </a:solidFill>
+                <a:latin typeface="Helvetica Neue" pitchFamily="34" charset="0"/>
+                <a:ea typeface="Helvetica Neue" pitchFamily="34" charset="-122"/>
+                <a:cs typeface="Helvetica Neue" pitchFamily="34" charset="-120"/>
+              </a:rPr>
+              <a:t>1–2</a:t>
+            </a:r>
+            <a:endParaRPr lang="en-US" sz="4000" dirty="0"/>
+          </a:p>
+        </p:txBody>
+      </p:sp>
+      <p:sp>
+        <p:nvSpPr>
+          <p:cNvPr id="35" name="Text 32"/>
+          <p:cNvSpPr/>
+          <p:nvPr/>
+        </p:nvSpPr>
+        <p:spPr>
+          <a:xfrm>
+            <a:off x="9772650" y="2933700"/>
+            <a:ext cx="1819275" cy="381000"/>
+          </a:xfrm>
+          <a:prstGeom prst="rect">
+            <a:avLst/>
+          </a:prstGeom>
+          <a:noFill/>
+          <a:ln/>
+        </p:spPr>
+        <p:txBody>
+          <a:bodyPr wrap="square" lIns="0" tIns="0" rIns="0" bIns="0" rtlCol="0" anchor="t"/>
+          <a:lstStyle/>
+          <a:p>
+            <a:pPr algn="l" indent="0" marL="0">
+              <a:buNone/>
+            </a:pPr>
+            <a:r>
+              <a:rPr lang="en-US" sz="1300" dirty="0">
+                <a:solidFill>
+                  <a:srgbClr val="6C6C8A"/>
+                </a:solidFill>
+                <a:latin typeface="Helvetica Neue" pitchFamily="34" charset="0"/>
+                <a:ea typeface="Helvetica Neue" pitchFamily="34" charset="-122"/>
+                <a:cs typeface="Helvetica Neue" pitchFamily="34" charset="-120"/>
+              </a:rPr>
+              <a:t>Active per token</a:t>
+            </a:r>
+            <a:endParaRPr lang="en-US" sz="1300" dirty="0"/>
+          </a:p>
+        </p:txBody>
+      </p:sp>
+      <p:sp>
+        <p:nvSpPr>
+          <p:cNvPr id="36" name="Text 33"/>
+          <p:cNvSpPr/>
+          <p:nvPr/>
+        </p:nvSpPr>
+        <p:spPr>
+          <a:xfrm>
+            <a:off x="7153275" y="3543300"/>
+            <a:ext cx="4638675" cy="171450"/>
+          </a:xfrm>
+          <a:prstGeom prst="rect">
+            <a:avLst/>
+          </a:prstGeom>
+          <a:noFill/>
+          <a:ln/>
+        </p:spPr>
+        <p:txBody>
+          <a:bodyPr wrap="square" lIns="0" tIns="0" rIns="0" bIns="0" rtlCol="0" anchor="t"/>
+          <a:lstStyle/>
+          <a:p>
+            <a:pPr algn="l" indent="0" marL="0">
+              <a:buNone/>
+            </a:pPr>
+            <a:r>
+              <a:rPr lang="en-US" sz="1100" b="1" dirty="0">
+                <a:solidFill>
+                  <a:srgbClr val="6C6C8A"/>
+                </a:solidFill>
+                <a:latin typeface="Helvetica Neue" pitchFamily="34" charset="0"/>
+                <a:ea typeface="Helvetica Neue" pitchFamily="34" charset="-122"/>
+                <a:cs typeface="Helvetica Neue" pitchFamily="34" charset="-120"/>
+              </a:rPr>
+              <a:t>WATCHOUTS</a:t>
+            </a:r>
+            <a:endParaRPr lang="en-US" sz="1100" dirty="0"/>
+          </a:p>
+        </p:txBody>
+      </p:sp>
+      <p:sp>
+        <p:nvSpPr>
+          <p:cNvPr id="37" name="Shape 34"/>
+          <p:cNvSpPr/>
+          <p:nvPr/>
+        </p:nvSpPr>
+        <p:spPr>
+          <a:xfrm>
+            <a:off x="7153275" y="3752850"/>
+            <a:ext cx="4638675" cy="1238250"/>
+          </a:xfrm>
+          <a:prstGeom prst="roundRect">
+            <a:avLst>
+              <a:gd name="adj" fmla="val 7385"/>
+            </a:avLst>
+          </a:prstGeom>
+          <a:solidFill>
+            <a:srgbClr val="2B2B4A"/>
+          </a:solidFill>
+          <a:ln w="12700">
+            <a:solidFill>
+              <a:srgbClr val="2B2B4A"/>
+            </a:solidFill>
+            <a:prstDash val="solid"/>
+          </a:ln>
+        </p:spPr>
+      </p:sp>
+      <p:sp>
+        <p:nvSpPr>
+          <p:cNvPr id="38" name="Shape 35"/>
+          <p:cNvSpPr/>
+          <p:nvPr/>
+        </p:nvSpPr>
+        <p:spPr>
+          <a:xfrm>
+            <a:off x="7153275" y="3752850"/>
+            <a:ext cx="114300" cy="1238250"/>
+          </a:xfrm>
+          <a:prstGeom prst="rect">
+            <a:avLst/>
+          </a:prstGeom>
+          <a:solidFill>
+            <a:srgbClr val="4E79A7"/>
+          </a:solidFill>
+          <a:ln w="12700">
+            <a:solidFill>
+              <a:srgbClr val="4E79A7"/>
+            </a:solidFill>
+            <a:prstDash val="solid"/>
+          </a:ln>
+        </p:spPr>
+      </p:sp>
+      <p:sp>
+        <p:nvSpPr>
+          <p:cNvPr id="39" name="Text 36"/>
+          <p:cNvSpPr/>
+          <p:nvPr/>
+        </p:nvSpPr>
+        <p:spPr>
+          <a:xfrm>
+            <a:off x="7458075" y="3867150"/>
+            <a:ext cx="2087404" cy="266700"/>
+          </a:xfrm>
+          <a:prstGeom prst="rect">
+            <a:avLst/>
+          </a:prstGeom>
+          <a:noFill/>
+          <a:ln/>
+        </p:spPr>
+        <p:txBody>
+          <a:bodyPr wrap="square" lIns="0" tIns="0" rIns="0" bIns="0" rtlCol="0" anchor="t"/>
+          <a:lstStyle/>
+          <a:p>
+            <a:pPr algn="l" indent="0" marL="0">
+              <a:buNone/>
+            </a:pPr>
+            <a:r>
+              <a:rPr lang="en-US" sz="1800" b="1" dirty="0">
+                <a:solidFill>
+                  <a:srgbClr val="EAEAEA"/>
+                </a:solidFill>
+                <a:latin typeface="Helvetica Neue" pitchFamily="34" charset="0"/>
+                <a:ea typeface="Helvetica Neue" pitchFamily="34" charset="-122"/>
+                <a:cs typeface="Helvetica Neue" pitchFamily="34" charset="-120"/>
+              </a:rPr>
+              <a:t>Collapse</a:t>
+            </a:r>
+            <a:endParaRPr lang="en-US" sz="1800" dirty="0"/>
+          </a:p>
+        </p:txBody>
+      </p:sp>
+      <p:sp>
+        <p:nvSpPr>
+          <p:cNvPr id="40" name="Text 37"/>
+          <p:cNvSpPr/>
+          <p:nvPr/>
+        </p:nvSpPr>
+        <p:spPr>
+          <a:xfrm>
+            <a:off x="9101519" y="3876675"/>
+            <a:ext cx="2412111" cy="266700"/>
+          </a:xfrm>
+          <a:prstGeom prst="rect">
+            <a:avLst/>
+          </a:prstGeom>
+          <a:noFill/>
+          <a:ln/>
+        </p:spPr>
+        <p:txBody>
+          <a:bodyPr wrap="square" lIns="0" tIns="0" rIns="0" bIns="0" rtlCol="0" anchor="t"/>
+          <a:lstStyle/>
+          <a:p>
+            <a:pPr algn="r" indent="0" marL="0">
+              <a:buNone/>
+            </a:pPr>
+            <a:r>
+              <a:rPr lang="en-US" sz="1600" dirty="0">
+                <a:solidFill>
+                  <a:srgbClr val="6C6C8A"/>
+                </a:solidFill>
+                <a:latin typeface="Helvetica Neue" pitchFamily="34" charset="0"/>
+                <a:ea typeface="Helvetica Neue" pitchFamily="34" charset="-122"/>
+                <a:cs typeface="Helvetica Neue" pitchFamily="34" charset="-120"/>
+              </a:rPr>
+              <a:t>Router sticks to 1–2 experts</a:t>
+            </a:r>
+            <a:endParaRPr lang="en-US" sz="1600" dirty="0"/>
+          </a:p>
+        </p:txBody>
+      </p:sp>
+      <p:sp>
+        <p:nvSpPr>
+          <p:cNvPr id="41" name="Shape 38"/>
+          <p:cNvSpPr/>
+          <p:nvPr/>
+        </p:nvSpPr>
+        <p:spPr>
+          <a:xfrm>
+            <a:off x="7153275" y="5086350"/>
+            <a:ext cx="4638675" cy="1238250"/>
+          </a:xfrm>
+          <a:prstGeom prst="roundRect">
+            <a:avLst>
+              <a:gd name="adj" fmla="val 7385"/>
+            </a:avLst>
+          </a:prstGeom>
+          <a:solidFill>
+            <a:srgbClr val="2B2B4A"/>
+          </a:solidFill>
+          <a:ln w="12700">
+            <a:solidFill>
+              <a:srgbClr val="2B2B4A"/>
+            </a:solidFill>
+            <a:prstDash val="solid"/>
+          </a:ln>
+        </p:spPr>
+      </p:sp>
+      <p:sp>
+        <p:nvSpPr>
+          <p:cNvPr id="42" name="Shape 39"/>
+          <p:cNvSpPr/>
+          <p:nvPr/>
+        </p:nvSpPr>
+        <p:spPr>
+          <a:xfrm>
+            <a:off x="7153275" y="5086350"/>
+            <a:ext cx="114300" cy="1238250"/>
+          </a:xfrm>
+          <a:prstGeom prst="rect">
+            <a:avLst/>
+          </a:prstGeom>
+          <a:solidFill>
+            <a:srgbClr val="F28E2B"/>
+          </a:solidFill>
+          <a:ln w="12700">
+            <a:solidFill>
+              <a:srgbClr val="F28E2B"/>
+            </a:solidFill>
+            <a:prstDash val="solid"/>
+          </a:ln>
+        </p:spPr>
+      </p:sp>
+      <p:sp>
+        <p:nvSpPr>
+          <p:cNvPr id="43" name="Text 40"/>
+          <p:cNvSpPr/>
+          <p:nvPr/>
+        </p:nvSpPr>
+        <p:spPr>
+          <a:xfrm>
+            <a:off x="7458075" y="5200650"/>
+            <a:ext cx="2087404" cy="266700"/>
+          </a:xfrm>
+          <a:prstGeom prst="rect">
+            <a:avLst/>
+          </a:prstGeom>
+          <a:noFill/>
+          <a:ln/>
+        </p:spPr>
+        <p:txBody>
+          <a:bodyPr wrap="square" lIns="0" tIns="0" rIns="0" bIns="0" rtlCol="0" anchor="t"/>
+          <a:lstStyle/>
+          <a:p>
+            <a:pPr algn="l" indent="0" marL="0">
+              <a:buNone/>
+            </a:pPr>
+            <a:r>
+              <a:rPr lang="en-US" sz="1800" b="1" dirty="0">
+                <a:solidFill>
+                  <a:srgbClr val="EAEAEA"/>
+                </a:solidFill>
+                <a:latin typeface="Helvetica Neue" pitchFamily="34" charset="0"/>
+                <a:ea typeface="Helvetica Neue" pitchFamily="34" charset="-122"/>
+                <a:cs typeface="Helvetica Neue" pitchFamily="34" charset="-120"/>
+              </a:rPr>
+              <a:t>Imbalance</a:t>
+            </a:r>
+            <a:endParaRPr lang="en-US" sz="1800" dirty="0"/>
+          </a:p>
+        </p:txBody>
+      </p:sp>
+      <p:sp>
+        <p:nvSpPr>
+          <p:cNvPr id="44" name="Text 41"/>
+          <p:cNvSpPr/>
+          <p:nvPr/>
+        </p:nvSpPr>
+        <p:spPr>
+          <a:xfrm>
+            <a:off x="9101519" y="5210175"/>
+            <a:ext cx="2412111" cy="266700"/>
+          </a:xfrm>
+          <a:prstGeom prst="rect">
+            <a:avLst/>
+          </a:prstGeom>
+          <a:noFill/>
+          <a:ln/>
+        </p:spPr>
+        <p:txBody>
+          <a:bodyPr wrap="square" lIns="0" tIns="0" rIns="0" bIns="0" rtlCol="0" anchor="t"/>
+          <a:lstStyle/>
+          <a:p>
+            <a:pPr algn="r" indent="0" marL="0">
+              <a:buNone/>
+            </a:pPr>
+            <a:r>
+              <a:rPr lang="en-US" sz="1600" dirty="0">
+                <a:solidFill>
+                  <a:srgbClr val="6C6C8A"/>
+                </a:solidFill>
+                <a:latin typeface="Helvetica Neue" pitchFamily="34" charset="0"/>
+                <a:ea typeface="Helvetica Neue" pitchFamily="34" charset="-122"/>
+                <a:cs typeface="Helvetica Neue" pitchFamily="34" charset="-120"/>
+              </a:rPr>
+              <a:t>Capacity overflow / drops</a:t>
             </a:r>
             <a:endParaRPr lang="en-US" sz="1600" dirty="0"/>
           </a:p>
@@ -3233,16 +3940,46 @@
           <a:chExt cx="0" cy="0"/>
         </a:xfrm>
       </p:grpSpPr>
-      <p:sp>
-        <p:nvSpPr>
-          <p:cNvPr id="2" name="Text 0"/>
-          <p:cNvSpPr/>
-          <p:nvPr/>
-        </p:nvSpPr>
-        <p:spPr>
-          <a:xfrm>
-            <a:off x="400050" y="304800"/>
-            <a:ext cx="11049000" cy="533400"/>
+      <p:pic>
+        <p:nvPicPr>
+          <p:cNvPr id="2" name="Image 0" descr="/Users/dpadmana/projects/ppt-gen/themes/scientific/logo.svg">    </p:cNvPr>
+          <p:cNvPicPr>
+            <a:picLocks noChangeAspect="1"/>
+          </p:cNvPicPr>
+          <p:nvPr/>
+        </p:nvPicPr>
+        <p:blipFill>
+          <a:blip r:embed="rId1">
+            <a:extLst>
+              <a:ext uri="{96DAC541-7B7A-43D3-8B79-37D633B846F1}">
+                <asvg:svgBlip xmlns:asvg="http://schemas.microsoft.com/office/drawing/2016/SVG/main" r:embed="rId2"/>
+              </a:ext>
+            </a:extLst>
+          </a:blip>
+          <a:stretch>
+            <a:fillRect/>
+          </a:stretch>
+        </p:blipFill>
+        <p:spPr>
+          <a:xfrm>
+            <a:off x="11430000" y="266700"/>
+            <a:ext cx="419100" cy="419100"/>
+          </a:xfrm>
+          <a:prstGeom prst="rect">
+            <a:avLst/>
+          </a:prstGeom>
+        </p:spPr>
+      </p:pic>
+      <p:sp>
+        <p:nvSpPr>
+          <p:cNvPr id="3" name="Text 0"/>
+          <p:cNvSpPr/>
+          <p:nvPr/>
+        </p:nvSpPr>
+        <p:spPr>
+          <a:xfrm>
+            <a:off x="400050" y="247650"/>
+            <a:ext cx="10839450" cy="381000"/>
           </a:xfrm>
           <a:prstGeom prst="rect">
             <a:avLst/>
@@ -3258,7 +3995,7 @@
               <a:buNone/>
             </a:pPr>
             <a:r>
-              <a:rPr lang="en-US" sz="3200" b="1" dirty="0">
+              <a:rPr lang="en-US" sz="3000" b="1" dirty="0">
                 <a:solidFill>
                   <a:srgbClr val="EAEAEA"/>
                 </a:solidFill>
@@ -3266,22 +4003,22 @@
                 <a:ea typeface="Helvetica Neue" pitchFamily="34" charset="-122"/>
                 <a:cs typeface="Helvetica Neue" pitchFamily="34" charset="-120"/>
               </a:rPr>
-              <a:t>Typical operating points (illustrative)</a:t>
-            </a:r>
-            <a:endParaRPr lang="en-US" sz="3200" dirty="0"/>
-          </a:p>
-        </p:txBody>
-      </p:sp>
-      <p:sp>
-        <p:nvSpPr>
-          <p:cNvPr id="3" name="Text 1"/>
+              <a:t>Stack to get right (bottom → top)</a:t>
+            </a:r>
+            <a:endParaRPr lang="en-US" sz="3000" dirty="0"/>
+          </a:p>
+        </p:txBody>
+      </p:sp>
+      <p:sp>
+        <p:nvSpPr>
+          <p:cNvPr id="4" name="Text 1"/>
           <p:cNvSpPr/>
           <p:nvPr/>
         </p:nvSpPr>
         <p:spPr>
           <a:xfrm>
             <a:off x="400050" y="6457950"/>
-            <a:ext cx="8572500" cy="171450"/>
+            <a:ext cx="4953000" cy="171450"/>
           </a:xfrm>
           <a:prstGeom prst="rect">
             <a:avLst/>
@@ -3313,7 +4050,7 @@
       </p:sp>
       <p:sp>
         <p:nvSpPr>
-          <p:cNvPr id="4" name="Text 2"/>
+          <p:cNvPr id="5" name="Text 2"/>
           <p:cNvSpPr/>
           <p:nvPr/>
         </p:nvSpPr>
@@ -3352,44 +4089,19 @@
       </p:sp>
       <p:sp>
         <p:nvSpPr>
-          <p:cNvPr id="5" name="Shape 3"/>
-          <p:cNvSpPr/>
-          <p:nvPr/>
-        </p:nvSpPr>
-        <p:spPr>
-          <a:xfrm>
-            <a:off x="400050" y="2324100"/>
-            <a:ext cx="2676525" cy="2857500"/>
+          <p:cNvPr id="6" name="Shape 3"/>
+          <p:cNvSpPr/>
+          <p:nvPr/>
+        </p:nvSpPr>
+        <p:spPr>
+          <a:xfrm>
+            <a:off x="3176826" y="781050"/>
+            <a:ext cx="5838349" cy="1323975"/>
           </a:xfrm>
           <a:prstGeom prst="roundRect">
             <a:avLst>
-              <a:gd name="adj" fmla="val 3416"/>
+              <a:gd name="adj" fmla="val 6906"/>
             </a:avLst>
-          </a:prstGeom>
-          <a:solidFill>
-            <a:srgbClr val="2B2B4A"/>
-          </a:solidFill>
-          <a:ln w="12700">
-            <a:solidFill>
-              <a:srgbClr val="2B2B4A"/>
-            </a:solidFill>
-            <a:prstDash val="solid"/>
-          </a:ln>
-        </p:spPr>
-      </p:sp>
-      <p:sp>
-        <p:nvSpPr>
-          <p:cNvPr id="6" name="Shape 4"/>
-          <p:cNvSpPr/>
-          <p:nvPr/>
-        </p:nvSpPr>
-        <p:spPr>
-          <a:xfrm>
-            <a:off x="400050" y="2324100"/>
-            <a:ext cx="2676525" cy="76200"/>
-          </a:xfrm>
-          <a:prstGeom prst="rect">
-            <a:avLst/>
           </a:prstGeom>
           <a:solidFill>
             <a:srgbClr val="4E79A7"/>
@@ -3404,161 +4116,58 @@
       </p:sp>
       <p:sp>
         <p:nvSpPr>
-          <p:cNvPr id="7" name="Text 5"/>
-          <p:cNvSpPr/>
-          <p:nvPr/>
-        </p:nvSpPr>
-        <p:spPr>
-          <a:xfrm>
-            <a:off x="590550" y="2571750"/>
-            <a:ext cx="2295525" cy="171450"/>
-          </a:xfrm>
-          <a:prstGeom prst="rect">
-            <a:avLst/>
-          </a:prstGeom>
-          <a:noFill/>
-          <a:ln/>
-        </p:spPr>
-        <p:txBody>
-          <a:bodyPr wrap="square" lIns="0" tIns="0" rIns="0" bIns="0" rtlCol="0" anchor="t"/>
-          <a:lstStyle/>
-          <a:p>
-            <a:pPr algn="l" indent="0" marL="0">
-              <a:buNone/>
-            </a:pPr>
-            <a:r>
-              <a:rPr lang="en-US" sz="1100" b="1" dirty="0">
-                <a:solidFill>
-                  <a:srgbClr val="6C6C8A"/>
-                </a:solidFill>
-                <a:latin typeface="Helvetica Neue" pitchFamily="34" charset="0"/>
-                <a:ea typeface="Helvetica Neue" pitchFamily="34" charset="-122"/>
-                <a:cs typeface="Helvetica Neue" pitchFamily="34" charset="-120"/>
-              </a:rPr>
-              <a:t>EXPERTS</a:t>
-            </a:r>
-            <a:endParaRPr lang="en-US" sz="1100" dirty="0"/>
-          </a:p>
-        </p:txBody>
-      </p:sp>
-      <p:sp>
-        <p:nvSpPr>
-          <p:cNvPr id="8" name="Text 6"/>
-          <p:cNvSpPr/>
-          <p:nvPr/>
-        </p:nvSpPr>
-        <p:spPr>
-          <a:xfrm>
-            <a:off x="590550" y="2971800"/>
-            <a:ext cx="2295525" cy="1524000"/>
-          </a:xfrm>
-          <a:prstGeom prst="rect">
-            <a:avLst/>
-          </a:prstGeom>
-          <a:noFill/>
-          <a:ln/>
-        </p:spPr>
-        <p:txBody>
-          <a:bodyPr wrap="none" lIns="0" tIns="0" rIns="0" bIns="0" rtlCol="0" anchor="ctr"/>
-          <a:lstStyle/>
-          <a:p>
-            <a:pPr algn="l" indent="0" marL="0">
-              <a:buNone/>
-            </a:pPr>
-            <a:r>
-              <a:rPr lang="en-US" sz="4000" b="1" dirty="0">
-                <a:solidFill>
-                  <a:srgbClr val="4E79A7"/>
-                </a:solidFill>
-                <a:latin typeface="Helvetica Neue" pitchFamily="34" charset="0"/>
-                <a:ea typeface="Helvetica Neue" pitchFamily="34" charset="-122"/>
-                <a:cs typeface="Helvetica Neue" pitchFamily="34" charset="-120"/>
-              </a:rPr>
-              <a:t>8–64</a:t>
-            </a:r>
-            <a:endParaRPr lang="en-US" sz="4000" dirty="0"/>
-          </a:p>
-        </p:txBody>
-      </p:sp>
-      <p:sp>
-        <p:nvSpPr>
-          <p:cNvPr id="9" name="Text 7"/>
-          <p:cNvSpPr/>
-          <p:nvPr/>
-        </p:nvSpPr>
-        <p:spPr>
-          <a:xfrm>
-            <a:off x="590550" y="4629150"/>
-            <a:ext cx="2295525" cy="381000"/>
-          </a:xfrm>
-          <a:prstGeom prst="rect">
-            <a:avLst/>
-          </a:prstGeom>
-          <a:noFill/>
-          <a:ln/>
-        </p:spPr>
-        <p:txBody>
-          <a:bodyPr wrap="square" lIns="0" tIns="0" rIns="0" bIns="0" rtlCol="0" anchor="t"/>
-          <a:lstStyle/>
-          <a:p>
-            <a:pPr algn="l" indent="0" marL="0">
-              <a:buNone/>
-            </a:pPr>
-            <a:r>
-              <a:rPr lang="en-US" sz="1300" dirty="0">
-                <a:solidFill>
-                  <a:srgbClr val="6C6C8A"/>
-                </a:solidFill>
-                <a:latin typeface="Helvetica Neue" pitchFamily="34" charset="0"/>
-                <a:ea typeface="Helvetica Neue" pitchFamily="34" charset="-122"/>
-                <a:cs typeface="Helvetica Neue" pitchFamily="34" charset="-120"/>
-              </a:rPr>
-              <a:t>Per MoE layer</a:t>
-            </a:r>
-            <a:endParaRPr lang="en-US" sz="1300" dirty="0"/>
-          </a:p>
-        </p:txBody>
-      </p:sp>
-      <p:sp>
-        <p:nvSpPr>
-          <p:cNvPr id="10" name="Shape 8"/>
-          <p:cNvSpPr/>
-          <p:nvPr/>
-        </p:nvSpPr>
-        <p:spPr>
-          <a:xfrm>
-            <a:off x="3305175" y="2324100"/>
-            <a:ext cx="2676525" cy="2857500"/>
+          <p:cNvPr id="7" name="Text 4"/>
+          <p:cNvSpPr/>
+          <p:nvPr/>
+        </p:nvSpPr>
+        <p:spPr>
+          <a:xfrm>
+            <a:off x="3291126" y="1347788"/>
+            <a:ext cx="5609749" cy="209550"/>
+          </a:xfrm>
+          <a:prstGeom prst="rect">
+            <a:avLst/>
+          </a:prstGeom>
+          <a:noFill/>
+          <a:ln/>
+        </p:spPr>
+        <p:txBody>
+          <a:bodyPr wrap="square" lIns="0" tIns="0" rIns="0" bIns="0" rtlCol="0" anchor="t"/>
+          <a:lstStyle/>
+          <a:p>
+            <a:pPr algn="ctr" indent="0" marL="0">
+              <a:buNone/>
+            </a:pPr>
+            <a:r>
+              <a:rPr lang="en-US" sz="1500" b="1" dirty="0">
+                <a:solidFill>
+                  <a:srgbClr val="FFFFFF"/>
+                </a:solidFill>
+                <a:latin typeface="Helvetica Neue" pitchFamily="34" charset="0"/>
+                <a:ea typeface="Helvetica Neue" pitchFamily="34" charset="-122"/>
+                <a:cs typeface="Helvetica Neue" pitchFamily="34" charset="-120"/>
+              </a:rPr>
+              <a:t>Serving</a:t>
+            </a:r>
+            <a:endParaRPr lang="en-US" sz="1500" dirty="0"/>
+          </a:p>
+        </p:txBody>
+      </p:sp>
+      <p:sp>
+        <p:nvSpPr>
+          <p:cNvPr id="8" name="Shape 5"/>
+          <p:cNvSpPr/>
+          <p:nvPr/>
+        </p:nvSpPr>
+        <p:spPr>
+          <a:xfrm>
+            <a:off x="2251234" y="2181225"/>
+            <a:ext cx="7689533" cy="1323975"/>
           </a:xfrm>
           <a:prstGeom prst="roundRect">
             <a:avLst>
-              <a:gd name="adj" fmla="val 3416"/>
+              <a:gd name="adj" fmla="val 6906"/>
             </a:avLst>
-          </a:prstGeom>
-          <a:solidFill>
-            <a:srgbClr val="2B2B4A"/>
-          </a:solidFill>
-          <a:ln w="12700">
-            <a:solidFill>
-              <a:srgbClr val="2B2B4A"/>
-            </a:solidFill>
-            <a:prstDash val="solid"/>
-          </a:ln>
-        </p:spPr>
-      </p:sp>
-      <p:sp>
-        <p:nvSpPr>
-          <p:cNvPr id="11" name="Shape 9"/>
-          <p:cNvSpPr/>
-          <p:nvPr/>
-        </p:nvSpPr>
-        <p:spPr>
-          <a:xfrm>
-            <a:off x="3305175" y="2324100"/>
-            <a:ext cx="2676525" cy="76200"/>
-          </a:xfrm>
-          <a:prstGeom prst="rect">
-            <a:avLst/>
           </a:prstGeom>
           <a:solidFill>
             <a:srgbClr val="F28E2B"/>
@@ -3573,161 +4182,58 @@
       </p:sp>
       <p:sp>
         <p:nvSpPr>
-          <p:cNvPr id="12" name="Text 10"/>
-          <p:cNvSpPr/>
-          <p:nvPr/>
-        </p:nvSpPr>
-        <p:spPr>
-          <a:xfrm>
-            <a:off x="3495675" y="2571750"/>
-            <a:ext cx="2295525" cy="171450"/>
-          </a:xfrm>
-          <a:prstGeom prst="rect">
-            <a:avLst/>
-          </a:prstGeom>
-          <a:noFill/>
-          <a:ln/>
-        </p:spPr>
-        <p:txBody>
-          <a:bodyPr wrap="square" lIns="0" tIns="0" rIns="0" bIns="0" rtlCol="0" anchor="t"/>
-          <a:lstStyle/>
-          <a:p>
-            <a:pPr algn="l" indent="0" marL="0">
-              <a:buNone/>
-            </a:pPr>
-            <a:r>
-              <a:rPr lang="en-US" sz="1100" b="1" dirty="0">
-                <a:solidFill>
-                  <a:srgbClr val="6C6C8A"/>
-                </a:solidFill>
-                <a:latin typeface="Helvetica Neue" pitchFamily="34" charset="0"/>
-                <a:ea typeface="Helvetica Neue" pitchFamily="34" charset="-122"/>
-                <a:cs typeface="Helvetica Neue" pitchFamily="34" charset="-120"/>
-              </a:rPr>
-              <a:t>TOP-K</a:t>
-            </a:r>
-            <a:endParaRPr lang="en-US" sz="1100" dirty="0"/>
-          </a:p>
-        </p:txBody>
-      </p:sp>
-      <p:sp>
-        <p:nvSpPr>
-          <p:cNvPr id="13" name="Text 11"/>
-          <p:cNvSpPr/>
-          <p:nvPr/>
-        </p:nvSpPr>
-        <p:spPr>
-          <a:xfrm>
-            <a:off x="3495675" y="2971800"/>
-            <a:ext cx="2295525" cy="1524000"/>
-          </a:xfrm>
-          <a:prstGeom prst="rect">
-            <a:avLst/>
-          </a:prstGeom>
-          <a:noFill/>
-          <a:ln/>
-        </p:spPr>
-        <p:txBody>
-          <a:bodyPr wrap="none" lIns="0" tIns="0" rIns="0" bIns="0" rtlCol="0" anchor="ctr"/>
-          <a:lstStyle/>
-          <a:p>
-            <a:pPr algn="l" indent="0" marL="0">
-              <a:buNone/>
-            </a:pPr>
-            <a:r>
-              <a:rPr lang="en-US" sz="4000" b="1" dirty="0">
-                <a:solidFill>
-                  <a:srgbClr val="F28E2B"/>
-                </a:solidFill>
-                <a:latin typeface="Helvetica Neue" pitchFamily="34" charset="0"/>
-                <a:ea typeface="Helvetica Neue" pitchFamily="34" charset="-122"/>
-                <a:cs typeface="Helvetica Neue" pitchFamily="34" charset="-120"/>
-              </a:rPr>
-              <a:t>1–2</a:t>
-            </a:r>
-            <a:endParaRPr lang="en-US" sz="4000" dirty="0"/>
-          </a:p>
-        </p:txBody>
-      </p:sp>
-      <p:sp>
-        <p:nvSpPr>
-          <p:cNvPr id="14" name="Text 12"/>
-          <p:cNvSpPr/>
-          <p:nvPr/>
-        </p:nvSpPr>
-        <p:spPr>
-          <a:xfrm>
-            <a:off x="3495675" y="4629150"/>
-            <a:ext cx="2295525" cy="381000"/>
-          </a:xfrm>
-          <a:prstGeom prst="rect">
-            <a:avLst/>
-          </a:prstGeom>
-          <a:noFill/>
-          <a:ln/>
-        </p:spPr>
-        <p:txBody>
-          <a:bodyPr wrap="square" lIns="0" tIns="0" rIns="0" bIns="0" rtlCol="0" anchor="t"/>
-          <a:lstStyle/>
-          <a:p>
-            <a:pPr algn="l" indent="0" marL="0">
-              <a:buNone/>
-            </a:pPr>
-            <a:r>
-              <a:rPr lang="en-US" sz="1300" dirty="0">
-                <a:solidFill>
-                  <a:srgbClr val="6C6C8A"/>
-                </a:solidFill>
-                <a:latin typeface="Helvetica Neue" pitchFamily="34" charset="0"/>
-                <a:ea typeface="Helvetica Neue" pitchFamily="34" charset="-122"/>
-                <a:cs typeface="Helvetica Neue" pitchFamily="34" charset="-120"/>
-              </a:rPr>
-              <a:t>Active per token</a:t>
-            </a:r>
-            <a:endParaRPr lang="en-US" sz="1300" dirty="0"/>
-          </a:p>
-        </p:txBody>
-      </p:sp>
-      <p:sp>
-        <p:nvSpPr>
-          <p:cNvPr id="15" name="Shape 13"/>
-          <p:cNvSpPr/>
-          <p:nvPr/>
-        </p:nvSpPr>
-        <p:spPr>
-          <a:xfrm>
-            <a:off x="6210300" y="2324100"/>
-            <a:ext cx="2676525" cy="2857500"/>
+          <p:cNvPr id="9" name="Text 6"/>
+          <p:cNvSpPr/>
+          <p:nvPr/>
+        </p:nvSpPr>
+        <p:spPr>
+          <a:xfrm>
+            <a:off x="2365534" y="2747963"/>
+            <a:ext cx="7460933" cy="209550"/>
+          </a:xfrm>
+          <a:prstGeom prst="rect">
+            <a:avLst/>
+          </a:prstGeom>
+          <a:noFill/>
+          <a:ln/>
+        </p:spPr>
+        <p:txBody>
+          <a:bodyPr wrap="square" lIns="0" tIns="0" rIns="0" bIns="0" rtlCol="0" anchor="t"/>
+          <a:lstStyle/>
+          <a:p>
+            <a:pPr algn="ctr" indent="0" marL="0">
+              <a:buNone/>
+            </a:pPr>
+            <a:r>
+              <a:rPr lang="en-US" sz="1500" b="1" dirty="0">
+                <a:solidFill>
+                  <a:srgbClr val="FFFFFF"/>
+                </a:solidFill>
+                <a:latin typeface="Helvetica Neue" pitchFamily="34" charset="0"/>
+                <a:ea typeface="Helvetica Neue" pitchFamily="34" charset="-122"/>
+                <a:cs typeface="Helvetica Neue" pitchFamily="34" charset="-120"/>
+              </a:rPr>
+              <a:t>Training recipe</a:t>
+            </a:r>
+            <a:endParaRPr lang="en-US" sz="1500" dirty="0"/>
+          </a:p>
+        </p:txBody>
+      </p:sp>
+      <p:sp>
+        <p:nvSpPr>
+          <p:cNvPr id="10" name="Shape 7"/>
+          <p:cNvSpPr/>
+          <p:nvPr/>
+        </p:nvSpPr>
+        <p:spPr>
+          <a:xfrm>
+            <a:off x="1325642" y="3581400"/>
+            <a:ext cx="9540716" cy="1323975"/>
           </a:xfrm>
           <a:prstGeom prst="roundRect">
             <a:avLst>
-              <a:gd name="adj" fmla="val 3416"/>
+              <a:gd name="adj" fmla="val 6906"/>
             </a:avLst>
-          </a:prstGeom>
-          <a:solidFill>
-            <a:srgbClr val="2B2B4A"/>
-          </a:solidFill>
-          <a:ln w="12700">
-            <a:solidFill>
-              <a:srgbClr val="2B2B4A"/>
-            </a:solidFill>
-            <a:prstDash val="solid"/>
-          </a:ln>
-        </p:spPr>
-      </p:sp>
-      <p:sp>
-        <p:nvSpPr>
-          <p:cNvPr id="16" name="Shape 14"/>
-          <p:cNvSpPr/>
-          <p:nvPr/>
-        </p:nvSpPr>
-        <p:spPr>
-          <a:xfrm>
-            <a:off x="6210300" y="2324100"/>
-            <a:ext cx="2676525" cy="76200"/>
-          </a:xfrm>
-          <a:prstGeom prst="rect">
-            <a:avLst/>
           </a:prstGeom>
           <a:solidFill>
             <a:srgbClr val="E15759"/>
@@ -3742,161 +4248,58 @@
       </p:sp>
       <p:sp>
         <p:nvSpPr>
-          <p:cNvPr id="17" name="Text 15"/>
-          <p:cNvSpPr/>
-          <p:nvPr/>
-        </p:nvSpPr>
-        <p:spPr>
-          <a:xfrm>
-            <a:off x="6400800" y="2571750"/>
-            <a:ext cx="2295525" cy="171450"/>
-          </a:xfrm>
-          <a:prstGeom prst="rect">
-            <a:avLst/>
-          </a:prstGeom>
-          <a:noFill/>
-          <a:ln/>
-        </p:spPr>
-        <p:txBody>
-          <a:bodyPr wrap="square" lIns="0" tIns="0" rIns="0" bIns="0" rtlCol="0" anchor="t"/>
-          <a:lstStyle/>
-          <a:p>
-            <a:pPr algn="l" indent="0" marL="0">
-              <a:buNone/>
-            </a:pPr>
-            <a:r>
-              <a:rPr lang="en-US" sz="1100" b="1" dirty="0">
-                <a:solidFill>
-                  <a:srgbClr val="6C6C8A"/>
-                </a:solidFill>
-                <a:latin typeface="Helvetica Neue" pitchFamily="34" charset="0"/>
-                <a:ea typeface="Helvetica Neue" pitchFamily="34" charset="-122"/>
-                <a:cs typeface="Helvetica Neue" pitchFamily="34" charset="-120"/>
-              </a:rPr>
-              <a:t>PARAMS</a:t>
-            </a:r>
-            <a:endParaRPr lang="en-US" sz="1100" dirty="0"/>
-          </a:p>
-        </p:txBody>
-      </p:sp>
-      <p:sp>
-        <p:nvSpPr>
-          <p:cNvPr id="18" name="Text 16"/>
-          <p:cNvSpPr/>
-          <p:nvPr/>
-        </p:nvSpPr>
-        <p:spPr>
-          <a:xfrm>
-            <a:off x="6400800" y="2971800"/>
-            <a:ext cx="2295525" cy="1524000"/>
-          </a:xfrm>
-          <a:prstGeom prst="rect">
-            <a:avLst/>
-          </a:prstGeom>
-          <a:noFill/>
-          <a:ln/>
-        </p:spPr>
-        <p:txBody>
-          <a:bodyPr wrap="none" lIns="0" tIns="0" rIns="0" bIns="0" rtlCol="0" anchor="ctr"/>
-          <a:lstStyle/>
-          <a:p>
-            <a:pPr algn="l" indent="0" marL="0">
-              <a:buNone/>
-            </a:pPr>
-            <a:r>
-              <a:rPr lang="en-US" sz="4000" b="1" dirty="0">
-                <a:solidFill>
-                  <a:srgbClr val="E15759"/>
-                </a:solidFill>
-                <a:latin typeface="Helvetica Neue" pitchFamily="34" charset="0"/>
-                <a:ea typeface="Helvetica Neue" pitchFamily="34" charset="-122"/>
-                <a:cs typeface="Helvetica Neue" pitchFamily="34" charset="-120"/>
-              </a:rPr>
-              <a:t>4–10×</a:t>
-            </a:r>
-            <a:endParaRPr lang="en-US" sz="4000" dirty="0"/>
-          </a:p>
-        </p:txBody>
-      </p:sp>
-      <p:sp>
-        <p:nvSpPr>
-          <p:cNvPr id="19" name="Text 17"/>
-          <p:cNvSpPr/>
-          <p:nvPr/>
-        </p:nvSpPr>
-        <p:spPr>
-          <a:xfrm>
-            <a:off x="6400800" y="4629150"/>
-            <a:ext cx="2295525" cy="381000"/>
-          </a:xfrm>
-          <a:prstGeom prst="rect">
-            <a:avLst/>
-          </a:prstGeom>
-          <a:noFill/>
-          <a:ln/>
-        </p:spPr>
-        <p:txBody>
-          <a:bodyPr wrap="square" lIns="0" tIns="0" rIns="0" bIns="0" rtlCol="0" anchor="t"/>
-          <a:lstStyle/>
-          <a:p>
-            <a:pPr algn="l" indent="0" marL="0">
-              <a:buNone/>
-            </a:pPr>
-            <a:r>
-              <a:rPr lang="en-US" sz="1300" dirty="0">
-                <a:solidFill>
-                  <a:srgbClr val="6C6C8A"/>
-                </a:solidFill>
-                <a:latin typeface="Helvetica Neue" pitchFamily="34" charset="0"/>
-                <a:ea typeface="Helvetica Neue" pitchFamily="34" charset="-122"/>
-                <a:cs typeface="Helvetica Neue" pitchFamily="34" charset="-120"/>
-              </a:rPr>
-              <a:t>vs dense iso-FLOP</a:t>
-            </a:r>
-            <a:endParaRPr lang="en-US" sz="1300" dirty="0"/>
-          </a:p>
-        </p:txBody>
-      </p:sp>
-      <p:sp>
-        <p:nvSpPr>
-          <p:cNvPr id="20" name="Shape 18"/>
-          <p:cNvSpPr/>
-          <p:nvPr/>
-        </p:nvSpPr>
-        <p:spPr>
-          <a:xfrm>
-            <a:off x="9115425" y="2324100"/>
-            <a:ext cx="2676525" cy="2857500"/>
+          <p:cNvPr id="11" name="Text 8"/>
+          <p:cNvSpPr/>
+          <p:nvPr/>
+        </p:nvSpPr>
+        <p:spPr>
+          <a:xfrm>
+            <a:off x="1439942" y="4148137"/>
+            <a:ext cx="9312116" cy="209550"/>
+          </a:xfrm>
+          <a:prstGeom prst="rect">
+            <a:avLst/>
+          </a:prstGeom>
+          <a:noFill/>
+          <a:ln/>
+        </p:spPr>
+        <p:txBody>
+          <a:bodyPr wrap="square" lIns="0" tIns="0" rIns="0" bIns="0" rtlCol="0" anchor="t"/>
+          <a:lstStyle/>
+          <a:p>
+            <a:pPr algn="ctr" indent="0" marL="0">
+              <a:buNone/>
+            </a:pPr>
+            <a:r>
+              <a:rPr lang="en-US" sz="1500" b="1" dirty="0">
+                <a:solidFill>
+                  <a:srgbClr val="FFFFFF"/>
+                </a:solidFill>
+                <a:latin typeface="Helvetica Neue" pitchFamily="34" charset="0"/>
+                <a:ea typeface="Helvetica Neue" pitchFamily="34" charset="-122"/>
+                <a:cs typeface="Helvetica Neue" pitchFamily="34" charset="-120"/>
+              </a:rPr>
+              <a:t>Router design</a:t>
+            </a:r>
+            <a:endParaRPr lang="en-US" sz="1500" dirty="0"/>
+          </a:p>
+        </p:txBody>
+      </p:sp>
+      <p:sp>
+        <p:nvSpPr>
+          <p:cNvPr id="12" name="Shape 9"/>
+          <p:cNvSpPr/>
+          <p:nvPr/>
+        </p:nvSpPr>
+        <p:spPr>
+          <a:xfrm>
+            <a:off x="400050" y="4981575"/>
+            <a:ext cx="11391900" cy="1323975"/>
           </a:xfrm>
           <a:prstGeom prst="roundRect">
             <a:avLst>
-              <a:gd name="adj" fmla="val 3416"/>
+              <a:gd name="adj" fmla="val 6906"/>
             </a:avLst>
-          </a:prstGeom>
-          <a:solidFill>
-            <a:srgbClr val="2B2B4A"/>
-          </a:solidFill>
-          <a:ln w="12700">
-            <a:solidFill>
-              <a:srgbClr val="2B2B4A"/>
-            </a:solidFill>
-            <a:prstDash val="solid"/>
-          </a:ln>
-        </p:spPr>
-      </p:sp>
-      <p:sp>
-        <p:nvSpPr>
-          <p:cNvPr id="21" name="Shape 19"/>
-          <p:cNvSpPr/>
-          <p:nvPr/>
-        </p:nvSpPr>
-        <p:spPr>
-          <a:xfrm>
-            <a:off x="9115425" y="2324100"/>
-            <a:ext cx="2676525" cy="76200"/>
-          </a:xfrm>
-          <a:prstGeom prst="rect">
-            <a:avLst/>
           </a:prstGeom>
           <a:solidFill>
             <a:srgbClr val="76B7B2"/>
@@ -3911,118 +4314,40 @@
       </p:sp>
       <p:sp>
         <p:nvSpPr>
-          <p:cNvPr id="22" name="Text 20"/>
-          <p:cNvSpPr/>
-          <p:nvPr/>
-        </p:nvSpPr>
-        <p:spPr>
-          <a:xfrm>
-            <a:off x="9305925" y="2571750"/>
-            <a:ext cx="2295525" cy="171450"/>
-          </a:xfrm>
-          <a:prstGeom prst="rect">
-            <a:avLst/>
-          </a:prstGeom>
-          <a:noFill/>
-          <a:ln/>
-        </p:spPr>
-        <p:txBody>
-          <a:bodyPr wrap="square" lIns="0" tIns="0" rIns="0" bIns="0" rtlCol="0" anchor="t"/>
-          <a:lstStyle/>
-          <a:p>
-            <a:pPr algn="l" indent="0" marL="0">
-              <a:buNone/>
-            </a:pPr>
-            <a:r>
-              <a:rPr lang="en-US" sz="1100" b="1" dirty="0">
-                <a:solidFill>
-                  <a:srgbClr val="6C6C8A"/>
-                </a:solidFill>
-                <a:latin typeface="Helvetica Neue" pitchFamily="34" charset="0"/>
-                <a:ea typeface="Helvetica Neue" pitchFamily="34" charset="-122"/>
-                <a:cs typeface="Helvetica Neue" pitchFamily="34" charset="-120"/>
-              </a:rPr>
-              <a:t>AUX LOSS</a:t>
-            </a:r>
-            <a:endParaRPr lang="en-US" sz="1100" dirty="0"/>
-          </a:p>
-        </p:txBody>
-      </p:sp>
-      <p:sp>
-        <p:nvSpPr>
-          <p:cNvPr id="23" name="Text 21"/>
-          <p:cNvSpPr/>
-          <p:nvPr/>
-        </p:nvSpPr>
-        <p:spPr>
-          <a:xfrm>
-            <a:off x="9305925" y="2971800"/>
-            <a:ext cx="2295525" cy="1524000"/>
-          </a:xfrm>
-          <a:prstGeom prst="rect">
-            <a:avLst/>
-          </a:prstGeom>
-          <a:noFill/>
-          <a:ln/>
-        </p:spPr>
-        <p:txBody>
-          <a:bodyPr wrap="none" lIns="0" tIns="0" rIns="0" bIns="0" rtlCol="0" anchor="ctr"/>
-          <a:lstStyle/>
-          <a:p>
-            <a:pPr algn="l" indent="0" marL="0">
-              <a:buNone/>
-            </a:pPr>
-            <a:r>
-              <a:rPr lang="en-US" sz="4000" b="1" dirty="0">
-                <a:solidFill>
-                  <a:srgbClr val="76B7B2"/>
-                </a:solidFill>
-                <a:latin typeface="Helvetica Neue" pitchFamily="34" charset="0"/>
-                <a:ea typeface="Helvetica Neue" pitchFamily="34" charset="-122"/>
-                <a:cs typeface="Helvetica Neue" pitchFamily="34" charset="-120"/>
-              </a:rPr>
-              <a:t>λ≈0.01</a:t>
-            </a:r>
-            <a:endParaRPr lang="en-US" sz="4000" dirty="0"/>
-          </a:p>
-        </p:txBody>
-      </p:sp>
-      <p:sp>
-        <p:nvSpPr>
-          <p:cNvPr id="24" name="Text 22"/>
-          <p:cNvSpPr/>
-          <p:nvPr/>
-        </p:nvSpPr>
-        <p:spPr>
-          <a:xfrm>
-            <a:off x="9305925" y="4629150"/>
-            <a:ext cx="2295525" cy="381000"/>
-          </a:xfrm>
-          <a:prstGeom prst="rect">
-            <a:avLst/>
-          </a:prstGeom>
-          <a:noFill/>
-          <a:ln/>
-        </p:spPr>
-        <p:txBody>
-          <a:bodyPr wrap="square" lIns="0" tIns="0" rIns="0" bIns="0" rtlCol="0" anchor="t"/>
-          <a:lstStyle/>
-          <a:p>
-            <a:pPr algn="l" indent="0" marL="0">
-              <a:buNone/>
-            </a:pPr>
-            <a:r>
-              <a:rPr lang="en-US" sz="1300" dirty="0">
-                <a:solidFill>
-                  <a:srgbClr val="6C6C8A"/>
-                </a:solidFill>
-                <a:latin typeface="Helvetica Neue" pitchFamily="34" charset="0"/>
-                <a:ea typeface="Helvetica Neue" pitchFamily="34" charset="-122"/>
-                <a:cs typeface="Helvetica Neue" pitchFamily="34" charset="-120"/>
-              </a:rPr>
-              <a:t>Load balance weight</a:t>
-            </a:r>
-            <a:endParaRPr lang="en-US" sz="1300" dirty="0"/>
+          <p:cNvPr id="13" name="Text 10"/>
+          <p:cNvSpPr/>
+          <p:nvPr/>
+        </p:nvSpPr>
+        <p:spPr>
+          <a:xfrm>
+            <a:off x="514350" y="5548313"/>
+            <a:ext cx="11163300" cy="209550"/>
+          </a:xfrm>
+          <a:prstGeom prst="rect">
+            <a:avLst/>
+          </a:prstGeom>
+          <a:noFill/>
+          <a:ln/>
+        </p:spPr>
+        <p:txBody>
+          <a:bodyPr wrap="square" lIns="0" tIns="0" rIns="0" bIns="0" rtlCol="0" anchor="t"/>
+          <a:lstStyle/>
+          <a:p>
+            <a:pPr algn="ctr" indent="0" marL="0">
+              <a:buNone/>
+            </a:pPr>
+            <a:r>
+              <a:rPr lang="en-US" sz="1500" b="1" dirty="0">
+                <a:solidFill>
+                  <a:srgbClr val="FFFFFF"/>
+                </a:solidFill>
+                <a:latin typeface="Helvetica Neue" pitchFamily="34" charset="0"/>
+                <a:ea typeface="Helvetica Neue" pitchFamily="34" charset="-122"/>
+                <a:cs typeface="Helvetica Neue" pitchFamily="34" charset="-120"/>
+              </a:rPr>
+              <a:t>Expert FFN</a:t>
+            </a:r>
+            <a:endParaRPr lang="en-US" sz="1500" dirty="0"/>
           </a:p>
         </p:txBody>
       </p:sp>
@@ -4058,16 +4383,46 @@
           <a:chExt cx="0" cy="0"/>
         </a:xfrm>
       </p:grpSpPr>
-      <p:sp>
-        <p:nvSpPr>
-          <p:cNvPr id="2" name="Text 0"/>
-          <p:cNvSpPr/>
-          <p:nvPr/>
-        </p:nvSpPr>
-        <p:spPr>
-          <a:xfrm>
-            <a:off x="400050" y="304800"/>
-            <a:ext cx="11049000" cy="533400"/>
+      <p:pic>
+        <p:nvPicPr>
+          <p:cNvPr id="2" name="Image 0" descr="/Users/dpadmana/projects/ppt-gen/themes/scientific/logo.svg">    </p:cNvPr>
+          <p:cNvPicPr>
+            <a:picLocks noChangeAspect="1"/>
+          </p:cNvPicPr>
+          <p:nvPr/>
+        </p:nvPicPr>
+        <p:blipFill>
+          <a:blip r:embed="rId1">
+            <a:extLst>
+              <a:ext uri="{96DAC541-7B7A-43D3-8B79-37D633B846F1}">
+                <asvg:svgBlip xmlns:asvg="http://schemas.microsoft.com/office/drawing/2016/SVG/main" r:embed="rId2"/>
+              </a:ext>
+            </a:extLst>
+          </a:blip>
+          <a:stretch>
+            <a:fillRect/>
+          </a:stretch>
+        </p:blipFill>
+        <p:spPr>
+          <a:xfrm>
+            <a:off x="11430000" y="266700"/>
+            <a:ext cx="419100" cy="419100"/>
+          </a:xfrm>
+          <a:prstGeom prst="rect">
+            <a:avLst/>
+          </a:prstGeom>
+        </p:spPr>
+      </p:pic>
+      <p:sp>
+        <p:nvSpPr>
+          <p:cNvPr id="3" name="Text 0"/>
+          <p:cNvSpPr/>
+          <p:nvPr/>
+        </p:nvSpPr>
+        <p:spPr>
+          <a:xfrm>
+            <a:off x="400050" y="457200"/>
+            <a:ext cx="1905000" cy="171450"/>
           </a:xfrm>
           <a:prstGeom prst="rect">
             <a:avLst/>
@@ -4083,7 +4438,46 @@
               <a:buNone/>
             </a:pPr>
             <a:r>
-              <a:rPr lang="en-US" sz="3200" b="1" dirty="0">
+              <a:rPr lang="en-US" sz="1100" b="1" dirty="0">
+                <a:solidFill>
+                  <a:srgbClr val="E94560"/>
+                </a:solidFill>
+                <a:latin typeface="Helvetica Neue" pitchFamily="34" charset="0"/>
+                <a:ea typeface="Helvetica Neue" pitchFamily="34" charset="-122"/>
+                <a:cs typeface="Helvetica Neue" pitchFamily="34" charset="-120"/>
+              </a:rPr>
+              <a:t>TAKEAWAY</a:t>
+            </a:r>
+            <a:endParaRPr lang="en-US" sz="1100" dirty="0"/>
+          </a:p>
+        </p:txBody>
+      </p:sp>
+      <p:sp>
+        <p:nvSpPr>
+          <p:cNvPr id="4" name="Text 1"/>
+          <p:cNvSpPr/>
+          <p:nvPr/>
+        </p:nvSpPr>
+        <p:spPr>
+          <a:xfrm>
+            <a:off x="400050" y="1238250"/>
+            <a:ext cx="9525000" cy="1333500"/>
+          </a:xfrm>
+          <a:prstGeom prst="rect">
+            <a:avLst/>
+          </a:prstGeom>
+          <a:noFill/>
+          <a:ln/>
+        </p:spPr>
+        <p:txBody>
+          <a:bodyPr wrap="square" lIns="0" tIns="0" rIns="0" bIns="0" rtlCol="0" anchor="t"/>
+          <a:lstStyle/>
+          <a:p>
+            <a:pPr algn="l" indent="0" marL="0">
+              <a:buNone/>
+            </a:pPr>
+            <a:r>
+              <a:rPr lang="en-US" sz="4000" b="1" dirty="0">
                 <a:solidFill>
                   <a:srgbClr val="EAEAEA"/>
                 </a:solidFill>
@@ -4091,38 +4485,61 @@
                 <a:ea typeface="Helvetica Neue" pitchFamily="34" charset="-122"/>
                 <a:cs typeface="Helvetica Neue" pitchFamily="34" charset="-120"/>
               </a:rPr>
-              <a:t>Stack to get right (bottom → top)</a:t>
-            </a:r>
-            <a:endParaRPr lang="en-US" sz="3200" dirty="0"/>
-          </a:p>
-        </p:txBody>
-      </p:sp>
-      <p:sp>
-        <p:nvSpPr>
-          <p:cNvPr id="3" name="Text 1"/>
-          <p:cNvSpPr/>
-          <p:nvPr/>
-        </p:nvSpPr>
-        <p:spPr>
-          <a:xfrm>
-            <a:off x="400050" y="6457950"/>
-            <a:ext cx="8572500" cy="171450"/>
-          </a:xfrm>
-          <a:prstGeom prst="rect">
-            <a:avLst/>
-          </a:prstGeom>
-          <a:noFill/>
-          <a:ln/>
-        </p:spPr>
-        <p:txBody>
-          <a:bodyPr wrap="square" lIns="0" tIns="0" rIns="0" bIns="0" rtlCol="0" anchor="t"/>
-          <a:lstStyle/>
+              <a:t>MoE buys capacity—</a:t>
+            </a:r>
+            <a:endParaRPr lang="en-US" sz="4000" dirty="0"/>
+          </a:p>
           <a:p>
             <a:pPr algn="l" indent="0" marL="0">
               <a:buNone/>
             </a:pPr>
             <a:r>
-              <a:rPr lang="en-US" sz="1100" b="1" dirty="0">
+              <a:rPr lang="en-US" sz="4000" b="1" dirty="0">
+                <a:solidFill>
+                  <a:srgbClr val="EAEAEA"/>
+                </a:solidFill>
+                <a:latin typeface="Helvetica Neue" pitchFamily="34" charset="0"/>
+                <a:ea typeface="Helvetica Neue" pitchFamily="34" charset="-122"/>
+                <a:cs typeface="Helvetica Neue" pitchFamily="34" charset="-120"/>
+              </a:rPr>
+              <a:t>only if routing stays healthy.</a:t>
+            </a:r>
+            <a:endParaRPr lang="en-US" sz="4000" dirty="0"/>
+          </a:p>
+          <a:p>
+            <a:pPr algn="l" indent="0" marL="0">
+              <a:buNone/>
+            </a:pPr>
+            <a:endParaRPr lang="en-US" sz="4000" dirty="0"/>
+          </a:p>
+        </p:txBody>
+      </p:sp>
+      <p:sp>
+        <p:nvSpPr>
+          <p:cNvPr id="5" name="Text 2"/>
+          <p:cNvSpPr/>
+          <p:nvPr/>
+        </p:nvSpPr>
+        <p:spPr>
+          <a:xfrm>
+            <a:off x="400050" y="2952750"/>
+            <a:ext cx="8572500" cy="571500"/>
+          </a:xfrm>
+          <a:prstGeom prst="rect">
+            <a:avLst/>
+          </a:prstGeom>
+          <a:noFill/>
+          <a:ln/>
+        </p:spPr>
+        <p:txBody>
+          <a:bodyPr wrap="square" lIns="0" tIns="0" rIns="0" bIns="0" rtlCol="0" anchor="t"/>
+          <a:lstStyle/>
+          <a:p>
+            <a:pPr algn="l" indent="0" marL="0">
+              <a:buNone/>
+            </a:pPr>
+            <a:r>
+              <a:rPr lang="en-US" sz="2000" dirty="0">
                 <a:solidFill>
                   <a:srgbClr val="6C6C8A"/>
                 </a:solidFill>
@@ -4130,66 +4547,182 @@
                 <a:ea typeface="Helvetica Neue" pitchFamily="34" charset="-122"/>
                 <a:cs typeface="Helvetica Neue" pitchFamily="34" charset="-120"/>
               </a:rPr>
-              <a:t>ML SYSTEMS  ·  MIXTURE OF EXPERTS</a:t>
-            </a:r>
-            <a:endParaRPr lang="en-US" sz="1100" dirty="0"/>
-          </a:p>
-        </p:txBody>
-      </p:sp>
-      <p:sp>
-        <p:nvSpPr>
-          <p:cNvPr id="4" name="Text 2"/>
-          <p:cNvSpPr/>
-          <p:nvPr/>
-        </p:nvSpPr>
-        <p:spPr>
-          <a:xfrm>
-            <a:off x="11334750" y="6457950"/>
-            <a:ext cx="457200" cy="171450"/>
-          </a:xfrm>
-          <a:prstGeom prst="rect">
-            <a:avLst/>
-          </a:prstGeom>
-          <a:noFill/>
-          <a:ln/>
-        </p:spPr>
-        <p:txBody>
-          <a:bodyPr wrap="square" lIns="0" tIns="0" rIns="0" bIns="0" rtlCol="0" anchor="t"/>
-          <a:lstStyle/>
-          <a:p>
-            <a:pPr algn="r" indent="0" marL="0">
-              <a:buNone/>
-            </a:pPr>
-            <a:r>
-              <a:rPr lang="en-US" sz="1200" dirty="0">
-                <a:solidFill>
-                  <a:srgbClr val="6C6C8A"/>
-                </a:solidFill>
-                <a:latin typeface="Helvetica Neue" pitchFamily="34" charset="0"/>
-                <a:ea typeface="Helvetica Neue" pitchFamily="34" charset="-122"/>
-                <a:cs typeface="Helvetica Neue" pitchFamily="34" charset="-120"/>
-              </a:rPr>
-              <a:t>12</a:t>
-            </a:r>
-            <a:endParaRPr lang="en-US" sz="1200" dirty="0"/>
-          </a:p>
-        </p:txBody>
-      </p:sp>
-      <p:sp>
-        <p:nvSpPr>
-          <p:cNvPr id="5" name="Shape 3"/>
-          <p:cNvSpPr/>
-          <p:nvPr/>
-        </p:nvSpPr>
-        <p:spPr>
-          <a:xfrm>
-            <a:off x="3176826" y="1181100"/>
-            <a:ext cx="5838349" cy="1228725"/>
+              <a:t>Instrument expert usage, capacity drops and latency tails as first-class metrics.</a:t>
+            </a:r>
+            <a:endParaRPr lang="en-US" sz="2000" dirty="0"/>
+          </a:p>
+        </p:txBody>
+      </p:sp>
+      <p:sp>
+        <p:nvSpPr>
+          <p:cNvPr id="6" name="Shape 3"/>
+          <p:cNvSpPr/>
+          <p:nvPr/>
+        </p:nvSpPr>
+        <p:spPr>
+          <a:xfrm>
+            <a:off x="400050" y="4000500"/>
+            <a:ext cx="3448050" cy="1143000"/>
           </a:xfrm>
           <a:prstGeom prst="roundRect">
             <a:avLst>
-              <a:gd name="adj" fmla="val 7442"/>
+              <a:gd name="adj" fmla="val 8000"/>
             </a:avLst>
+          </a:prstGeom>
+          <a:solidFill>
+            <a:srgbClr val="2B2B4A"/>
+          </a:solidFill>
+          <a:ln w="12700">
+            <a:solidFill>
+              <a:srgbClr val="2B2B4A"/>
+            </a:solidFill>
+            <a:prstDash val="solid"/>
+          </a:ln>
+        </p:spPr>
+      </p:sp>
+      <p:sp>
+        <p:nvSpPr>
+          <p:cNvPr id="7" name="Shape 4"/>
+          <p:cNvSpPr/>
+          <p:nvPr/>
+        </p:nvSpPr>
+        <p:spPr>
+          <a:xfrm>
+            <a:off x="400050" y="4000500"/>
+            <a:ext cx="57150" cy="1143000"/>
+          </a:xfrm>
+          <a:prstGeom prst="rect">
+            <a:avLst/>
+          </a:prstGeom>
+          <a:solidFill>
+            <a:srgbClr val="76B7B2"/>
+          </a:solidFill>
+          <a:ln w="12700">
+            <a:solidFill>
+              <a:srgbClr val="76B7B2"/>
+            </a:solidFill>
+            <a:prstDash val="solid"/>
+          </a:ln>
+        </p:spPr>
+      </p:sp>
+      <p:sp>
+        <p:nvSpPr>
+          <p:cNvPr id="8" name="Text 5"/>
+          <p:cNvSpPr/>
+          <p:nvPr/>
+        </p:nvSpPr>
+        <p:spPr>
+          <a:xfrm>
+            <a:off x="571500" y="4152900"/>
+            <a:ext cx="3105150" cy="171450"/>
+          </a:xfrm>
+          <a:prstGeom prst="rect">
+            <a:avLst/>
+          </a:prstGeom>
+          <a:noFill/>
+          <a:ln/>
+        </p:spPr>
+        <p:txBody>
+          <a:bodyPr wrap="square" lIns="0" tIns="0" rIns="0" bIns="0" rtlCol="0" anchor="t"/>
+          <a:lstStyle/>
+          <a:p>
+            <a:pPr algn="l" indent="0" marL="0">
+              <a:buNone/>
+            </a:pPr>
+            <a:r>
+              <a:rPr lang="en-US" sz="1100" b="1" dirty="0">
+                <a:solidFill>
+                  <a:srgbClr val="76B7B2"/>
+                </a:solidFill>
+                <a:latin typeface="Helvetica Neue" pitchFamily="34" charset="0"/>
+                <a:ea typeface="Helvetica Neue" pitchFamily="34" charset="-122"/>
+                <a:cs typeface="Helvetica Neue" pitchFamily="34" charset="-120"/>
+              </a:rPr>
+              <a:t>1. START SPARSE CAREFULLY</a:t>
+            </a:r>
+            <a:endParaRPr lang="en-US" sz="1100" dirty="0"/>
+          </a:p>
+        </p:txBody>
+      </p:sp>
+      <p:sp>
+        <p:nvSpPr>
+          <p:cNvPr id="9" name="Text 6"/>
+          <p:cNvSpPr/>
+          <p:nvPr/>
+        </p:nvSpPr>
+        <p:spPr>
+          <a:xfrm>
+            <a:off x="571500" y="4419600"/>
+            <a:ext cx="3105150" cy="571500"/>
+          </a:xfrm>
+          <a:prstGeom prst="rect">
+            <a:avLst/>
+          </a:prstGeom>
+          <a:noFill/>
+          <a:ln/>
+        </p:spPr>
+        <p:txBody>
+          <a:bodyPr wrap="square" lIns="0" tIns="0" rIns="0" bIns="0" rtlCol="0" anchor="t"/>
+          <a:lstStyle/>
+          <a:p>
+            <a:pPr algn="l" indent="0" marL="0">
+              <a:buNone/>
+            </a:pPr>
+            <a:r>
+              <a:rPr lang="en-US" sz="1600" b="1" dirty="0">
+                <a:solidFill>
+                  <a:srgbClr val="EAEAEA"/>
+                </a:solidFill>
+                <a:latin typeface="Helvetica Neue" pitchFamily="34" charset="0"/>
+                <a:ea typeface="Helvetica Neue" pitchFamily="34" charset="-122"/>
+                <a:cs typeface="Helvetica Neue" pitchFamily="34" charset="-120"/>
+              </a:rPr>
+              <a:t>Few layers, strong aux loss</a:t>
+            </a:r>
+            <a:endParaRPr lang="en-US" sz="1600" dirty="0"/>
+          </a:p>
+        </p:txBody>
+      </p:sp>
+      <p:sp>
+        <p:nvSpPr>
+          <p:cNvPr id="10" name="Shape 7"/>
+          <p:cNvSpPr/>
+          <p:nvPr/>
+        </p:nvSpPr>
+        <p:spPr>
+          <a:xfrm>
+            <a:off x="4171950" y="4000500"/>
+            <a:ext cx="3448050" cy="1143000"/>
+          </a:xfrm>
+          <a:prstGeom prst="roundRect">
+            <a:avLst>
+              <a:gd name="adj" fmla="val 8000"/>
+            </a:avLst>
+          </a:prstGeom>
+          <a:solidFill>
+            <a:srgbClr val="2B2B4A"/>
+          </a:solidFill>
+          <a:ln w="12700">
+            <a:solidFill>
+              <a:srgbClr val="2B2B4A"/>
+            </a:solidFill>
+            <a:prstDash val="solid"/>
+          </a:ln>
+        </p:spPr>
+      </p:sp>
+      <p:sp>
+        <p:nvSpPr>
+          <p:cNvPr id="11" name="Shape 8"/>
+          <p:cNvSpPr/>
+          <p:nvPr/>
+        </p:nvSpPr>
+        <p:spPr>
+          <a:xfrm>
+            <a:off x="4171950" y="4000500"/>
+            <a:ext cx="57150" cy="1143000"/>
+          </a:xfrm>
+          <a:prstGeom prst="rect">
+            <a:avLst/>
           </a:prstGeom>
           <a:solidFill>
             <a:srgbClr val="4E79A7"/>
@@ -4204,283 +4737,14 @@
       </p:sp>
       <p:sp>
         <p:nvSpPr>
-          <p:cNvPr id="6" name="Text 4"/>
-          <p:cNvSpPr/>
-          <p:nvPr/>
-        </p:nvSpPr>
-        <p:spPr>
-          <a:xfrm>
-            <a:off x="3291126" y="1700213"/>
-            <a:ext cx="5609749" cy="209550"/>
-          </a:xfrm>
-          <a:prstGeom prst="rect">
-            <a:avLst/>
-          </a:prstGeom>
-          <a:noFill/>
-          <a:ln/>
-        </p:spPr>
-        <p:txBody>
-          <a:bodyPr wrap="square" lIns="0" tIns="0" rIns="0" bIns="0" rtlCol="0" anchor="t"/>
-          <a:lstStyle/>
-          <a:p>
-            <a:pPr algn="ctr" indent="0" marL="0">
-              <a:buNone/>
-            </a:pPr>
-            <a:r>
-              <a:rPr lang="en-US" sz="1500" b="1" dirty="0">
-                <a:solidFill>
-                  <a:srgbClr val="FFFFFF"/>
-                </a:solidFill>
-                <a:latin typeface="Helvetica Neue" pitchFamily="34" charset="0"/>
-                <a:ea typeface="Helvetica Neue" pitchFamily="34" charset="-122"/>
-                <a:cs typeface="Helvetica Neue" pitchFamily="34" charset="-120"/>
-              </a:rPr>
-              <a:t>Serving</a:t>
-            </a:r>
-            <a:endParaRPr lang="en-US" sz="1500" dirty="0"/>
-          </a:p>
-        </p:txBody>
-      </p:sp>
-      <p:sp>
-        <p:nvSpPr>
-          <p:cNvPr id="7" name="Shape 5"/>
-          <p:cNvSpPr/>
-          <p:nvPr/>
-        </p:nvSpPr>
-        <p:spPr>
-          <a:xfrm>
-            <a:off x="2251234" y="2486025"/>
-            <a:ext cx="7689533" cy="1228725"/>
-          </a:xfrm>
-          <a:prstGeom prst="roundRect">
-            <a:avLst>
-              <a:gd name="adj" fmla="val 7442"/>
-            </a:avLst>
-          </a:prstGeom>
-          <a:solidFill>
-            <a:srgbClr val="F28E2B"/>
-          </a:solidFill>
-          <a:ln w="12700">
-            <a:solidFill>
-              <a:srgbClr val="F28E2B"/>
-            </a:solidFill>
-            <a:prstDash val="solid"/>
-          </a:ln>
-        </p:spPr>
-      </p:sp>
-      <p:sp>
-        <p:nvSpPr>
-          <p:cNvPr id="8" name="Text 6"/>
-          <p:cNvSpPr/>
-          <p:nvPr/>
-        </p:nvSpPr>
-        <p:spPr>
-          <a:xfrm>
-            <a:off x="2365534" y="3005138"/>
-            <a:ext cx="7460933" cy="209550"/>
-          </a:xfrm>
-          <a:prstGeom prst="rect">
-            <a:avLst/>
-          </a:prstGeom>
-          <a:noFill/>
-          <a:ln/>
-        </p:spPr>
-        <p:txBody>
-          <a:bodyPr wrap="square" lIns="0" tIns="0" rIns="0" bIns="0" rtlCol="0" anchor="t"/>
-          <a:lstStyle/>
-          <a:p>
-            <a:pPr algn="ctr" indent="0" marL="0">
-              <a:buNone/>
-            </a:pPr>
-            <a:r>
-              <a:rPr lang="en-US" sz="1500" b="1" dirty="0">
-                <a:solidFill>
-                  <a:srgbClr val="FFFFFF"/>
-                </a:solidFill>
-                <a:latin typeface="Helvetica Neue" pitchFamily="34" charset="0"/>
-                <a:ea typeface="Helvetica Neue" pitchFamily="34" charset="-122"/>
-                <a:cs typeface="Helvetica Neue" pitchFamily="34" charset="-120"/>
-              </a:rPr>
-              <a:t>Training recipe</a:t>
-            </a:r>
-            <a:endParaRPr lang="en-US" sz="1500" dirty="0"/>
-          </a:p>
-        </p:txBody>
-      </p:sp>
-      <p:sp>
-        <p:nvSpPr>
-          <p:cNvPr id="9" name="Shape 7"/>
-          <p:cNvSpPr/>
-          <p:nvPr/>
-        </p:nvSpPr>
-        <p:spPr>
-          <a:xfrm>
-            <a:off x="1325642" y="3790950"/>
-            <a:ext cx="9540716" cy="1228725"/>
-          </a:xfrm>
-          <a:prstGeom prst="roundRect">
-            <a:avLst>
-              <a:gd name="adj" fmla="val 7442"/>
-            </a:avLst>
-          </a:prstGeom>
-          <a:solidFill>
-            <a:srgbClr val="E15759"/>
-          </a:solidFill>
-          <a:ln w="12700">
-            <a:solidFill>
-              <a:srgbClr val="E15759"/>
-            </a:solidFill>
-            <a:prstDash val="solid"/>
-          </a:ln>
-        </p:spPr>
-      </p:sp>
-      <p:sp>
-        <p:nvSpPr>
-          <p:cNvPr id="10" name="Text 8"/>
-          <p:cNvSpPr/>
-          <p:nvPr/>
-        </p:nvSpPr>
-        <p:spPr>
-          <a:xfrm>
-            <a:off x="1439942" y="4310063"/>
-            <a:ext cx="9312116" cy="209550"/>
-          </a:xfrm>
-          <a:prstGeom prst="rect">
-            <a:avLst/>
-          </a:prstGeom>
-          <a:noFill/>
-          <a:ln/>
-        </p:spPr>
-        <p:txBody>
-          <a:bodyPr wrap="square" lIns="0" tIns="0" rIns="0" bIns="0" rtlCol="0" anchor="t"/>
-          <a:lstStyle/>
-          <a:p>
-            <a:pPr algn="ctr" indent="0" marL="0">
-              <a:buNone/>
-            </a:pPr>
-            <a:r>
-              <a:rPr lang="en-US" sz="1500" b="1" dirty="0">
-                <a:solidFill>
-                  <a:srgbClr val="FFFFFF"/>
-                </a:solidFill>
-                <a:latin typeface="Helvetica Neue" pitchFamily="34" charset="0"/>
-                <a:ea typeface="Helvetica Neue" pitchFamily="34" charset="-122"/>
-                <a:cs typeface="Helvetica Neue" pitchFamily="34" charset="-120"/>
-              </a:rPr>
-              <a:t>Router design</a:t>
-            </a:r>
-            <a:endParaRPr lang="en-US" sz="1500" dirty="0"/>
-          </a:p>
-        </p:txBody>
-      </p:sp>
-      <p:sp>
-        <p:nvSpPr>
-          <p:cNvPr id="11" name="Shape 9"/>
-          <p:cNvSpPr/>
-          <p:nvPr/>
-        </p:nvSpPr>
-        <p:spPr>
-          <a:xfrm>
-            <a:off x="400050" y="5095875"/>
-            <a:ext cx="11391900" cy="1228725"/>
-          </a:xfrm>
-          <a:prstGeom prst="roundRect">
-            <a:avLst>
-              <a:gd name="adj" fmla="val 7442"/>
-            </a:avLst>
-          </a:prstGeom>
-          <a:solidFill>
-            <a:srgbClr val="76B7B2"/>
-          </a:solidFill>
-          <a:ln w="12700">
-            <a:solidFill>
-              <a:srgbClr val="76B7B2"/>
-            </a:solidFill>
-            <a:prstDash val="solid"/>
-          </a:ln>
-        </p:spPr>
-      </p:sp>
-      <p:sp>
-        <p:nvSpPr>
-          <p:cNvPr id="12" name="Text 10"/>
-          <p:cNvSpPr/>
-          <p:nvPr/>
-        </p:nvSpPr>
-        <p:spPr>
-          <a:xfrm>
-            <a:off x="514350" y="5614988"/>
-            <a:ext cx="11163300" cy="209550"/>
-          </a:xfrm>
-          <a:prstGeom prst="rect">
-            <a:avLst/>
-          </a:prstGeom>
-          <a:noFill/>
-          <a:ln/>
-        </p:spPr>
-        <p:txBody>
-          <a:bodyPr wrap="square" lIns="0" tIns="0" rIns="0" bIns="0" rtlCol="0" anchor="t"/>
-          <a:lstStyle/>
-          <a:p>
-            <a:pPr algn="ctr" indent="0" marL="0">
-              <a:buNone/>
-            </a:pPr>
-            <a:r>
-              <a:rPr lang="en-US" sz="1500" b="1" dirty="0">
-                <a:solidFill>
-                  <a:srgbClr val="FFFFFF"/>
-                </a:solidFill>
-                <a:latin typeface="Helvetica Neue" pitchFamily="34" charset="0"/>
-                <a:ea typeface="Helvetica Neue" pitchFamily="34" charset="-122"/>
-                <a:cs typeface="Helvetica Neue" pitchFamily="34" charset="-120"/>
-              </a:rPr>
-              <a:t>Expert FFN</a:t>
-            </a:r>
-            <a:endParaRPr lang="en-US" sz="1500" dirty="0"/>
-          </a:p>
-        </p:txBody>
-      </p:sp>
-    </p:spTree>
-  </p:cSld>
-  <p:clrMapOvr>
-    <a:masterClrMapping/>
-  </p:clrMapOvr>
-</p:sld>
-</file>
-
-<file path=ppt/slides/slide13.xml><?xml version="1.0" encoding="utf-8"?>
-<p:sld xmlns:a="http://schemas.openxmlformats.org/drawingml/2006/main" xmlns:r="http://schemas.openxmlformats.org/officeDocument/2006/relationships" xmlns:p="http://schemas.openxmlformats.org/presentationml/2006/main">
-  <p:cSld name="Slide 13">
-    <p:bg>
-      <p:bgPr>
-        <a:solidFill>
-          <a:srgbClr val="1A1A2E"/>
-        </a:solidFill>
-      </p:bgPr>
-    </p:bg>
-    <p:spTree>
-      <p:nvGrpSpPr>
-        <p:cNvPr id="1" name=""/>
-        <p:cNvGrpSpPr/>
-        <p:nvPr/>
-      </p:nvGrpSpPr>
-      <p:grpSpPr>
-        <a:xfrm>
-          <a:off x="0" y="0"/>
-          <a:ext cx="0" cy="0"/>
-          <a:chOff x="0" y="0"/>
-          <a:chExt cx="0" cy="0"/>
-        </a:xfrm>
-      </p:grpSpPr>
-      <p:sp>
-        <p:nvSpPr>
-          <p:cNvPr id="2" name="Text 0"/>
-          <p:cNvSpPr/>
-          <p:nvPr/>
-        </p:nvSpPr>
-        <p:spPr>
-          <a:xfrm>
-            <a:off x="400050" y="457200"/>
-            <a:ext cx="1905000" cy="171450"/>
+          <p:cNvPr id="12" name="Text 9"/>
+          <p:cNvSpPr/>
+          <p:nvPr/>
+        </p:nvSpPr>
+        <p:spPr>
+          <a:xfrm>
+            <a:off x="4343400" y="4152900"/>
+            <a:ext cx="3105150" cy="171450"/>
           </a:xfrm>
           <a:prstGeom prst="rect">
             <a:avLst/>
@@ -4498,13 +4762,13 @@
             <a:r>
               <a:rPr lang="en-US" sz="1100" b="1" dirty="0">
                 <a:solidFill>
-                  <a:srgbClr val="E94560"/>
-                </a:solidFill>
-                <a:latin typeface="Helvetica Neue" pitchFamily="34" charset="0"/>
-                <a:ea typeface="Helvetica Neue" pitchFamily="34" charset="-122"/>
-                <a:cs typeface="Helvetica Neue" pitchFamily="34" charset="-120"/>
-              </a:rPr>
-              <a:t>TAKEAWAY</a:t>
+                  <a:srgbClr val="4E79A7"/>
+                </a:solidFill>
+                <a:latin typeface="Helvetica Neue" pitchFamily="34" charset="0"/>
+                <a:ea typeface="Helvetica Neue" pitchFamily="34" charset="-122"/>
+                <a:cs typeface="Helvetica Neue" pitchFamily="34" charset="-120"/>
+              </a:rPr>
+              <a:t>2. WATCH BALANCE</a:t>
             </a:r>
             <a:endParaRPr lang="en-US" sz="1100" dirty="0"/>
           </a:p>
@@ -4512,14 +4776,14 @@
       </p:sp>
       <p:sp>
         <p:nvSpPr>
-          <p:cNvPr id="3" name="Text 1"/>
-          <p:cNvSpPr/>
-          <p:nvPr/>
-        </p:nvSpPr>
-        <p:spPr>
-          <a:xfrm>
-            <a:off x="400050" y="1238250"/>
-            <a:ext cx="9525000" cy="1333500"/>
+          <p:cNvPr id="13" name="Text 10"/>
+          <p:cNvSpPr/>
+          <p:nvPr/>
+        </p:nvSpPr>
+        <p:spPr>
+          <a:xfrm>
+            <a:off x="4343400" y="4419600"/>
+            <a:ext cx="3105150" cy="571500"/>
           </a:xfrm>
           <a:prstGeom prst="rect">
             <a:avLst/>
@@ -4535,7 +4799,7 @@
               <a:buNone/>
             </a:pPr>
             <a:r>
-              <a:rPr lang="en-US" sz="4000" b="1" dirty="0">
+              <a:rPr lang="en-US" sz="1600" b="1" dirty="0">
                 <a:solidFill>
                   <a:srgbClr val="EAEAEA"/>
                 </a:solidFill>
@@ -4543,62 +4807,21 @@
                 <a:ea typeface="Helvetica Neue" pitchFamily="34" charset="-122"/>
                 <a:cs typeface="Helvetica Neue" pitchFamily="34" charset="-120"/>
               </a:rPr>
-              <a:t>MoE buys capacity—
-only if routing stays healthy.
-</a:t>
-            </a:r>
-            <a:endParaRPr lang="en-US" sz="4000" dirty="0"/>
-          </a:p>
-        </p:txBody>
-      </p:sp>
-      <p:sp>
-        <p:nvSpPr>
-          <p:cNvPr id="4" name="Text 2"/>
-          <p:cNvSpPr/>
-          <p:nvPr/>
-        </p:nvSpPr>
-        <p:spPr>
-          <a:xfrm>
-            <a:off x="400050" y="2952750"/>
-            <a:ext cx="8572500" cy="571500"/>
-          </a:xfrm>
-          <a:prstGeom prst="rect">
-            <a:avLst/>
-          </a:prstGeom>
-          <a:noFill/>
-          <a:ln/>
-        </p:spPr>
-        <p:txBody>
-          <a:bodyPr wrap="square" lIns="0" tIns="0" rIns="0" bIns="0" rtlCol="0" anchor="t"/>
-          <a:lstStyle/>
-          <a:p>
-            <a:pPr algn="l" indent="0" marL="0">
-              <a:buNone/>
-            </a:pPr>
-            <a:r>
-              <a:rPr lang="en-US" sz="2000" dirty="0">
-                <a:solidFill>
-                  <a:srgbClr val="6C6C8A"/>
-                </a:solidFill>
-                <a:latin typeface="Helvetica Neue" pitchFamily="34" charset="0"/>
-                <a:ea typeface="Helvetica Neue" pitchFamily="34" charset="-122"/>
-                <a:cs typeface="Helvetica Neue" pitchFamily="34" charset="-120"/>
-              </a:rPr>
-              <a:t>Instrument expert usage, capacity drops and latency tails as first-class metrics.</a:t>
-            </a:r>
-            <a:endParaRPr lang="en-US" sz="2000" dirty="0"/>
-          </a:p>
-        </p:txBody>
-      </p:sp>
-      <p:sp>
-        <p:nvSpPr>
-          <p:cNvPr id="5" name="Shape 3"/>
-          <p:cNvSpPr/>
-          <p:nvPr/>
-        </p:nvSpPr>
-        <p:spPr>
-          <a:xfrm>
-            <a:off x="400050" y="4000500"/>
+              <a:t>Per-expert token share dashboards</a:t>
+            </a:r>
+            <a:endParaRPr lang="en-US" sz="1600" dirty="0"/>
+          </a:p>
+        </p:txBody>
+      </p:sp>
+      <p:sp>
+        <p:nvSpPr>
+          <p:cNvPr id="14" name="Shape 11"/>
+          <p:cNvSpPr/>
+          <p:nvPr/>
+        </p:nvSpPr>
+        <p:spPr>
+          <a:xfrm>
+            <a:off x="7943850" y="4000500"/>
             <a:ext cx="3448050" cy="1143000"/>
           </a:xfrm>
           <a:prstGeom prst="roundRect">
@@ -4619,267 +4842,7 @@
       </p:sp>
       <p:sp>
         <p:nvSpPr>
-          <p:cNvPr id="6" name="Shape 4"/>
-          <p:cNvSpPr/>
-          <p:nvPr/>
-        </p:nvSpPr>
-        <p:spPr>
-          <a:xfrm>
-            <a:off x="400050" y="4000500"/>
-            <a:ext cx="57150" cy="1143000"/>
-          </a:xfrm>
-          <a:prstGeom prst="rect">
-            <a:avLst/>
-          </a:prstGeom>
-          <a:solidFill>
-            <a:srgbClr val="76B7B2"/>
-          </a:solidFill>
-          <a:ln w="12700">
-            <a:solidFill>
-              <a:srgbClr val="76B7B2"/>
-            </a:solidFill>
-            <a:prstDash val="solid"/>
-          </a:ln>
-        </p:spPr>
-      </p:sp>
-      <p:sp>
-        <p:nvSpPr>
-          <p:cNvPr id="7" name="Text 5"/>
-          <p:cNvSpPr/>
-          <p:nvPr/>
-        </p:nvSpPr>
-        <p:spPr>
-          <a:xfrm>
-            <a:off x="571500" y="4152900"/>
-            <a:ext cx="3105150" cy="171450"/>
-          </a:xfrm>
-          <a:prstGeom prst="rect">
-            <a:avLst/>
-          </a:prstGeom>
-          <a:noFill/>
-          <a:ln/>
-        </p:spPr>
-        <p:txBody>
-          <a:bodyPr wrap="square" lIns="0" tIns="0" rIns="0" bIns="0" rtlCol="0" anchor="t"/>
-          <a:lstStyle/>
-          <a:p>
-            <a:pPr algn="l" indent="0" marL="0">
-              <a:buNone/>
-            </a:pPr>
-            <a:r>
-              <a:rPr lang="en-US" sz="1100" b="1" dirty="0">
-                <a:solidFill>
-                  <a:srgbClr val="76B7B2"/>
-                </a:solidFill>
-                <a:latin typeface="Helvetica Neue" pitchFamily="34" charset="0"/>
-                <a:ea typeface="Helvetica Neue" pitchFamily="34" charset="-122"/>
-                <a:cs typeface="Helvetica Neue" pitchFamily="34" charset="-120"/>
-              </a:rPr>
-              <a:t>1. START SPARSE CAREFULLY</a:t>
-            </a:r>
-            <a:endParaRPr lang="en-US" sz="1100" dirty="0"/>
-          </a:p>
-        </p:txBody>
-      </p:sp>
-      <p:sp>
-        <p:nvSpPr>
-          <p:cNvPr id="8" name="Text 6"/>
-          <p:cNvSpPr/>
-          <p:nvPr/>
-        </p:nvSpPr>
-        <p:spPr>
-          <a:xfrm>
-            <a:off x="571500" y="4419600"/>
-            <a:ext cx="3105150" cy="571500"/>
-          </a:xfrm>
-          <a:prstGeom prst="rect">
-            <a:avLst/>
-          </a:prstGeom>
-          <a:noFill/>
-          <a:ln/>
-        </p:spPr>
-        <p:txBody>
-          <a:bodyPr wrap="square" lIns="0" tIns="0" rIns="0" bIns="0" rtlCol="0" anchor="t"/>
-          <a:lstStyle/>
-          <a:p>
-            <a:pPr algn="l" indent="0" marL="0">
-              <a:buNone/>
-            </a:pPr>
-            <a:r>
-              <a:rPr lang="en-US" sz="1600" b="1" dirty="0">
-                <a:solidFill>
-                  <a:srgbClr val="EAEAEA"/>
-                </a:solidFill>
-                <a:latin typeface="Helvetica Neue" pitchFamily="34" charset="0"/>
-                <a:ea typeface="Helvetica Neue" pitchFamily="34" charset="-122"/>
-                <a:cs typeface="Helvetica Neue" pitchFamily="34" charset="-120"/>
-              </a:rPr>
-              <a:t>Few layers, strong aux loss</a:t>
-            </a:r>
-            <a:endParaRPr lang="en-US" sz="1600" dirty="0"/>
-          </a:p>
-        </p:txBody>
-      </p:sp>
-      <p:sp>
-        <p:nvSpPr>
-          <p:cNvPr id="9" name="Shape 7"/>
-          <p:cNvSpPr/>
-          <p:nvPr/>
-        </p:nvSpPr>
-        <p:spPr>
-          <a:xfrm>
-            <a:off x="4171950" y="4000500"/>
-            <a:ext cx="3448050" cy="1143000"/>
-          </a:xfrm>
-          <a:prstGeom prst="roundRect">
-            <a:avLst>
-              <a:gd name="adj" fmla="val 8000"/>
-            </a:avLst>
-          </a:prstGeom>
-          <a:solidFill>
-            <a:srgbClr val="2B2B4A"/>
-          </a:solidFill>
-          <a:ln w="12700">
-            <a:solidFill>
-              <a:srgbClr val="2B2B4A"/>
-            </a:solidFill>
-            <a:prstDash val="solid"/>
-          </a:ln>
-        </p:spPr>
-      </p:sp>
-      <p:sp>
-        <p:nvSpPr>
-          <p:cNvPr id="10" name="Shape 8"/>
-          <p:cNvSpPr/>
-          <p:nvPr/>
-        </p:nvSpPr>
-        <p:spPr>
-          <a:xfrm>
-            <a:off x="4171950" y="4000500"/>
-            <a:ext cx="57150" cy="1143000"/>
-          </a:xfrm>
-          <a:prstGeom prst="rect">
-            <a:avLst/>
-          </a:prstGeom>
-          <a:solidFill>
-            <a:srgbClr val="4E79A7"/>
-          </a:solidFill>
-          <a:ln w="12700">
-            <a:solidFill>
-              <a:srgbClr val="4E79A7"/>
-            </a:solidFill>
-            <a:prstDash val="solid"/>
-          </a:ln>
-        </p:spPr>
-      </p:sp>
-      <p:sp>
-        <p:nvSpPr>
-          <p:cNvPr id="11" name="Text 9"/>
-          <p:cNvSpPr/>
-          <p:nvPr/>
-        </p:nvSpPr>
-        <p:spPr>
-          <a:xfrm>
-            <a:off x="4343400" y="4152900"/>
-            <a:ext cx="3105150" cy="171450"/>
-          </a:xfrm>
-          <a:prstGeom prst="rect">
-            <a:avLst/>
-          </a:prstGeom>
-          <a:noFill/>
-          <a:ln/>
-        </p:spPr>
-        <p:txBody>
-          <a:bodyPr wrap="square" lIns="0" tIns="0" rIns="0" bIns="0" rtlCol="0" anchor="t"/>
-          <a:lstStyle/>
-          <a:p>
-            <a:pPr algn="l" indent="0" marL="0">
-              <a:buNone/>
-            </a:pPr>
-            <a:r>
-              <a:rPr lang="en-US" sz="1100" b="1" dirty="0">
-                <a:solidFill>
-                  <a:srgbClr val="4E79A7"/>
-                </a:solidFill>
-                <a:latin typeface="Helvetica Neue" pitchFamily="34" charset="0"/>
-                <a:ea typeface="Helvetica Neue" pitchFamily="34" charset="-122"/>
-                <a:cs typeface="Helvetica Neue" pitchFamily="34" charset="-120"/>
-              </a:rPr>
-              <a:t>2. WATCH BALANCE</a:t>
-            </a:r>
-            <a:endParaRPr lang="en-US" sz="1100" dirty="0"/>
-          </a:p>
-        </p:txBody>
-      </p:sp>
-      <p:sp>
-        <p:nvSpPr>
-          <p:cNvPr id="12" name="Text 10"/>
-          <p:cNvSpPr/>
-          <p:nvPr/>
-        </p:nvSpPr>
-        <p:spPr>
-          <a:xfrm>
-            <a:off x="4343400" y="4419600"/>
-            <a:ext cx="3105150" cy="571500"/>
-          </a:xfrm>
-          <a:prstGeom prst="rect">
-            <a:avLst/>
-          </a:prstGeom>
-          <a:noFill/>
-          <a:ln/>
-        </p:spPr>
-        <p:txBody>
-          <a:bodyPr wrap="square" lIns="0" tIns="0" rIns="0" bIns="0" rtlCol="0" anchor="t"/>
-          <a:lstStyle/>
-          <a:p>
-            <a:pPr algn="l" indent="0" marL="0">
-              <a:buNone/>
-            </a:pPr>
-            <a:r>
-              <a:rPr lang="en-US" sz="1600" b="1" dirty="0">
-                <a:solidFill>
-                  <a:srgbClr val="EAEAEA"/>
-                </a:solidFill>
-                <a:latin typeface="Helvetica Neue" pitchFamily="34" charset="0"/>
-                <a:ea typeface="Helvetica Neue" pitchFamily="34" charset="-122"/>
-                <a:cs typeface="Helvetica Neue" pitchFamily="34" charset="-120"/>
-              </a:rPr>
-              <a:t>Per-expert token share dashboards</a:t>
-            </a:r>
-            <a:endParaRPr lang="en-US" sz="1600" dirty="0"/>
-          </a:p>
-        </p:txBody>
-      </p:sp>
-      <p:sp>
-        <p:nvSpPr>
-          <p:cNvPr id="13" name="Shape 11"/>
-          <p:cNvSpPr/>
-          <p:nvPr/>
-        </p:nvSpPr>
-        <p:spPr>
-          <a:xfrm>
-            <a:off x="7943850" y="4000500"/>
-            <a:ext cx="3448050" cy="1143000"/>
-          </a:xfrm>
-          <a:prstGeom prst="roundRect">
-            <a:avLst>
-              <a:gd name="adj" fmla="val 8000"/>
-            </a:avLst>
-          </a:prstGeom>
-          <a:solidFill>
-            <a:srgbClr val="2B2B4A"/>
-          </a:solidFill>
-          <a:ln w="12700">
-            <a:solidFill>
-              <a:srgbClr val="2B2B4A"/>
-            </a:solidFill>
-            <a:prstDash val="solid"/>
-          </a:ln>
-        </p:spPr>
-      </p:sp>
-      <p:sp>
-        <p:nvSpPr>
-          <p:cNvPr id="14" name="Shape 12"/>
+          <p:cNvPr id="15" name="Shape 12"/>
           <p:cNvSpPr/>
           <p:nvPr/>
         </p:nvSpPr>
@@ -4904,7 +4867,7 @@
       </p:sp>
       <p:sp>
         <p:nvSpPr>
-          <p:cNvPr id="15" name="Text 13"/>
+          <p:cNvPr id="16" name="Text 13"/>
           <p:cNvSpPr/>
           <p:nvPr/>
         </p:nvSpPr>
@@ -4943,7 +4906,7 @@
       </p:sp>
       <p:sp>
         <p:nvSpPr>
-          <p:cNvPr id="16" name="Text 14"/>
+          <p:cNvPr id="17" name="Text 14"/>
           <p:cNvSpPr/>
           <p:nvPr/>
         </p:nvSpPr>
@@ -4982,7 +4945,7 @@
       </p:sp>
       <p:sp>
         <p:nvSpPr>
-          <p:cNvPr id="17" name="Text 15"/>
+          <p:cNvPr id="18" name="Text 15"/>
           <p:cNvSpPr/>
           <p:nvPr/>
         </p:nvSpPr>
@@ -5021,14 +4984,14 @@
       </p:sp>
       <p:sp>
         <p:nvSpPr>
-          <p:cNvPr id="18" name="Text 16"/>
+          <p:cNvPr id="19" name="Text 16"/>
           <p:cNvSpPr/>
           <p:nvPr/>
         </p:nvSpPr>
         <p:spPr>
           <a:xfrm>
             <a:off x="400050" y="6457950"/>
-            <a:ext cx="8572500" cy="171450"/>
+            <a:ext cx="4953000" cy="171450"/>
           </a:xfrm>
           <a:prstGeom prst="rect">
             <a:avLst/>
@@ -5060,7 +5023,7 @@
       </p:sp>
       <p:sp>
         <p:nvSpPr>
-          <p:cNvPr id="19" name="Text 17"/>
+          <p:cNvPr id="20" name="Text 17"/>
           <p:cNvSpPr/>
           <p:nvPr/>
         </p:nvSpPr>
@@ -5091,7 +5054,7 @@
                 <a:ea typeface="Helvetica Neue" pitchFamily="34" charset="-122"/>
                 <a:cs typeface="Helvetica Neue" pitchFamily="34" charset="-120"/>
               </a:rPr>
-              <a:t>00</a:t>
+              <a:t>12</a:t>
             </a:r>
             <a:endParaRPr lang="en-US" sz="1200" dirty="0"/>
           </a:p>
@@ -5129,9 +5092,39 @@
           <a:chExt cx="0" cy="0"/>
         </a:xfrm>
       </p:grpSpPr>
-      <p:sp>
-        <p:nvSpPr>
-          <p:cNvPr id="2" name="Text 0"/>
+      <p:pic>
+        <p:nvPicPr>
+          <p:cNvPr id="2" name="Image 0" descr="/Users/dpadmana/projects/ppt-gen/themes/scientific/logo.svg">    </p:cNvPr>
+          <p:cNvPicPr>
+            <a:picLocks noChangeAspect="1"/>
+          </p:cNvPicPr>
+          <p:nvPr/>
+        </p:nvPicPr>
+        <p:blipFill>
+          <a:blip r:embed="rId1">
+            <a:extLst>
+              <a:ext uri="{96DAC541-7B7A-43D3-8B79-37D633B846F1}">
+                <asvg:svgBlip xmlns:asvg="http://schemas.microsoft.com/office/drawing/2016/SVG/main" r:embed="rId2"/>
+              </a:ext>
+            </a:extLst>
+          </a:blip>
+          <a:stretch>
+            <a:fillRect/>
+          </a:stretch>
+        </p:blipFill>
+        <p:spPr>
+          <a:xfrm>
+            <a:off x="11430000" y="266700"/>
+            <a:ext cx="419100" cy="419100"/>
+          </a:xfrm>
+          <a:prstGeom prst="rect">
+            <a:avLst/>
+          </a:prstGeom>
+        </p:spPr>
+      </p:pic>
+      <p:sp>
+        <p:nvSpPr>
+          <p:cNvPr id="3" name="Text 0"/>
           <p:cNvSpPr/>
           <p:nvPr/>
         </p:nvSpPr>
@@ -5170,7 +5163,7 @@
       </p:sp>
       <p:sp>
         <p:nvSpPr>
-          <p:cNvPr id="3" name="Text 1"/>
+          <p:cNvPr id="4" name="Text 1"/>
           <p:cNvSpPr/>
           <p:nvPr/>
         </p:nvSpPr>
@@ -5209,7 +5202,7 @@
       </p:sp>
       <p:sp>
         <p:nvSpPr>
-          <p:cNvPr id="4" name="Text 2"/>
+          <p:cNvPr id="5" name="Text 2"/>
           <p:cNvSpPr/>
           <p:nvPr/>
         </p:nvSpPr>
@@ -5248,14 +5241,14 @@
       </p:sp>
       <p:sp>
         <p:nvSpPr>
-          <p:cNvPr id="5" name="Text 3"/>
+          <p:cNvPr id="6" name="Text 3"/>
           <p:cNvSpPr/>
           <p:nvPr/>
         </p:nvSpPr>
         <p:spPr>
           <a:xfrm>
             <a:off x="400050" y="6457950"/>
-            <a:ext cx="8572500" cy="171450"/>
+            <a:ext cx="4953000" cy="171450"/>
           </a:xfrm>
           <a:prstGeom prst="rect">
             <a:avLst/>
@@ -5287,7 +5280,7 @@
       </p:sp>
       <p:sp>
         <p:nvSpPr>
-          <p:cNvPr id="6" name="Text 4"/>
+          <p:cNvPr id="7" name="Text 4"/>
           <p:cNvSpPr/>
           <p:nvPr/>
         </p:nvSpPr>
@@ -5318,7 +5311,7 @@
                 <a:ea typeface="Helvetica Neue" pitchFamily="34" charset="-122"/>
                 <a:cs typeface="Helvetica Neue" pitchFamily="34" charset="-120"/>
               </a:rPr>
-              <a:t>00</a:t>
+              <a:t>02</a:t>
             </a:r>
             <a:endParaRPr lang="en-US" sz="1200" dirty="0"/>
           </a:p>
@@ -5356,16 +5349,46 @@
           <a:chExt cx="0" cy="0"/>
         </a:xfrm>
       </p:grpSpPr>
-      <p:sp>
-        <p:nvSpPr>
-          <p:cNvPr id="2" name="Text 0"/>
-          <p:cNvSpPr/>
-          <p:nvPr/>
-        </p:nvSpPr>
-        <p:spPr>
-          <a:xfrm>
-            <a:off x="400050" y="304800"/>
-            <a:ext cx="11049000" cy="533400"/>
+      <p:pic>
+        <p:nvPicPr>
+          <p:cNvPr id="2" name="Image 0" descr="/Users/dpadmana/projects/ppt-gen/themes/scientific/logo.svg">    </p:cNvPr>
+          <p:cNvPicPr>
+            <a:picLocks noChangeAspect="1"/>
+          </p:cNvPicPr>
+          <p:nvPr/>
+        </p:nvPicPr>
+        <p:blipFill>
+          <a:blip r:embed="rId1">
+            <a:extLst>
+              <a:ext uri="{96DAC541-7B7A-43D3-8B79-37D633B846F1}">
+                <asvg:svgBlip xmlns:asvg="http://schemas.microsoft.com/office/drawing/2016/SVG/main" r:embed="rId2"/>
+              </a:ext>
+            </a:extLst>
+          </a:blip>
+          <a:stretch>
+            <a:fillRect/>
+          </a:stretch>
+        </p:blipFill>
+        <p:spPr>
+          <a:xfrm>
+            <a:off x="11430000" y="266700"/>
+            <a:ext cx="419100" cy="419100"/>
+          </a:xfrm>
+          <a:prstGeom prst="rect">
+            <a:avLst/>
+          </a:prstGeom>
+        </p:spPr>
+      </p:pic>
+      <p:sp>
+        <p:nvSpPr>
+          <p:cNvPr id="3" name="Text 0"/>
+          <p:cNvSpPr/>
+          <p:nvPr/>
+        </p:nvSpPr>
+        <p:spPr>
+          <a:xfrm>
+            <a:off x="400050" y="247650"/>
+            <a:ext cx="10839450" cy="381000"/>
           </a:xfrm>
           <a:prstGeom prst="rect">
             <a:avLst/>
@@ -5381,7 +5404,7 @@
               <a:buNone/>
             </a:pPr>
             <a:r>
-              <a:rPr lang="en-US" sz="3200" b="1" dirty="0">
+              <a:rPr lang="en-US" sz="3000" b="1" dirty="0">
                 <a:solidFill>
                   <a:srgbClr val="EAEAEA"/>
                 </a:solidFill>
@@ -5391,20 +5414,20 @@
               </a:rPr>
               <a:t>Dense vs sparse activation</a:t>
             </a:r>
-            <a:endParaRPr lang="en-US" sz="3200" dirty="0"/>
-          </a:p>
-        </p:txBody>
-      </p:sp>
-      <p:sp>
-        <p:nvSpPr>
-          <p:cNvPr id="3" name="Text 1"/>
-          <p:cNvSpPr/>
-          <p:nvPr/>
-        </p:nvSpPr>
-        <p:spPr>
-          <a:xfrm>
-            <a:off x="400050" y="857250"/>
-            <a:ext cx="10477500" cy="381000"/>
+            <a:endParaRPr lang="en-US" sz="3000" dirty="0"/>
+          </a:p>
+        </p:txBody>
+      </p:sp>
+      <p:sp>
+        <p:nvSpPr>
+          <p:cNvPr id="4" name="Text 1"/>
+          <p:cNvSpPr/>
+          <p:nvPr/>
+        </p:nvSpPr>
+        <p:spPr>
+          <a:xfrm>
+            <a:off x="400050" y="800100"/>
+            <a:ext cx="10648950" cy="266700"/>
           </a:xfrm>
           <a:prstGeom prst="rect">
             <a:avLst/>
@@ -5436,14 +5459,14 @@
       </p:sp>
       <p:sp>
         <p:nvSpPr>
-          <p:cNvPr id="4" name="Text 2"/>
+          <p:cNvPr id="5" name="Text 2"/>
           <p:cNvSpPr/>
           <p:nvPr/>
         </p:nvSpPr>
         <p:spPr>
           <a:xfrm>
             <a:off x="400050" y="6457950"/>
-            <a:ext cx="8572500" cy="171450"/>
+            <a:ext cx="4953000" cy="171450"/>
           </a:xfrm>
           <a:prstGeom prst="rect">
             <a:avLst/>
@@ -5475,7 +5498,7 @@
       </p:sp>
       <p:sp>
         <p:nvSpPr>
-          <p:cNvPr id="5" name="Text 3"/>
+          <p:cNvPr id="6" name="Text 3"/>
           <p:cNvSpPr/>
           <p:nvPr/>
         </p:nvSpPr>
@@ -5514,18 +5537,18 @@
       </p:sp>
       <p:sp>
         <p:nvSpPr>
-          <p:cNvPr id="6" name="Shape 4"/>
-          <p:cNvSpPr/>
-          <p:nvPr/>
-        </p:nvSpPr>
-        <p:spPr>
-          <a:xfrm>
-            <a:off x="400050" y="1447800"/>
-            <a:ext cx="5695950" cy="4876800"/>
+          <p:cNvPr id="7" name="Shape 4"/>
+          <p:cNvSpPr/>
+          <p:nvPr/>
+        </p:nvSpPr>
+        <p:spPr>
+          <a:xfrm>
+            <a:off x="400050" y="1219200"/>
+            <a:ext cx="5695950" cy="5105400"/>
           </a:xfrm>
           <a:prstGeom prst="roundRect">
             <a:avLst>
-              <a:gd name="adj" fmla="val 1875"/>
+              <a:gd name="adj" fmla="val 1791"/>
             </a:avLst>
           </a:prstGeom>
           <a:solidFill>
@@ -5541,13 +5564,13 @@
       </p:sp>
       <p:sp>
         <p:nvSpPr>
-          <p:cNvPr id="7" name="Shape 5"/>
-          <p:cNvSpPr/>
-          <p:nvPr/>
-        </p:nvSpPr>
-        <p:spPr>
-          <a:xfrm>
-            <a:off x="400050" y="1447800"/>
+          <p:cNvPr id="8" name="Shape 5"/>
+          <p:cNvSpPr/>
+          <p:nvPr/>
+        </p:nvSpPr>
+        <p:spPr>
+          <a:xfrm>
+            <a:off x="400050" y="1219200"/>
             <a:ext cx="5695950" cy="76200"/>
           </a:xfrm>
           <a:prstGeom prst="rect">
@@ -5566,13 +5589,13 @@
       </p:sp>
       <p:sp>
         <p:nvSpPr>
-          <p:cNvPr id="8" name="Text 6"/>
-          <p:cNvSpPr/>
-          <p:nvPr/>
-        </p:nvSpPr>
-        <p:spPr>
-          <a:xfrm>
-            <a:off x="609600" y="1676400"/>
+          <p:cNvPr id="9" name="Text 6"/>
+          <p:cNvSpPr/>
+          <p:nvPr/>
+        </p:nvSpPr>
+        <p:spPr>
+          <a:xfrm>
+            <a:off x="609600" y="1447800"/>
             <a:ext cx="5276850" cy="171450"/>
           </a:xfrm>
           <a:prstGeom prst="rect">
@@ -5605,13 +5628,13 @@
       </p:sp>
       <p:sp>
         <p:nvSpPr>
-          <p:cNvPr id="9" name="Text 7"/>
-          <p:cNvSpPr/>
-          <p:nvPr/>
-        </p:nvSpPr>
-        <p:spPr>
-          <a:xfrm>
-            <a:off x="609600" y="1971675"/>
+          <p:cNvPr id="10" name="Text 7"/>
+          <p:cNvSpPr/>
+          <p:nvPr/>
+        </p:nvSpPr>
+        <p:spPr>
+          <a:xfrm>
+            <a:off x="609600" y="1743075"/>
             <a:ext cx="5276850" cy="476250"/>
           </a:xfrm>
           <a:prstGeom prst="rect">
@@ -5644,13 +5667,13 @@
       </p:sp>
       <p:sp>
         <p:nvSpPr>
-          <p:cNvPr id="10" name="Shape 8"/>
-          <p:cNvSpPr/>
-          <p:nvPr/>
-        </p:nvSpPr>
-        <p:spPr>
-          <a:xfrm>
-            <a:off x="609600" y="2733675"/>
+          <p:cNvPr id="11" name="Shape 8"/>
+          <p:cNvSpPr/>
+          <p:nvPr/>
+        </p:nvSpPr>
+        <p:spPr>
+          <a:xfrm>
+            <a:off x="609600" y="2505075"/>
             <a:ext cx="66675" cy="66675"/>
           </a:xfrm>
           <a:prstGeom prst="roundRect">
@@ -5671,13 +5694,13 @@
       </p:sp>
       <p:sp>
         <p:nvSpPr>
-          <p:cNvPr id="11" name="Text 9"/>
-          <p:cNvSpPr/>
-          <p:nvPr/>
-        </p:nvSpPr>
-        <p:spPr>
-          <a:xfrm>
-            <a:off x="800100" y="2647950"/>
+          <p:cNvPr id="12" name="Text 9"/>
+          <p:cNvSpPr/>
+          <p:nvPr/>
+        </p:nvSpPr>
+        <p:spPr>
+          <a:xfrm>
+            <a:off x="800100" y="2419350"/>
             <a:ext cx="5086350" cy="342900"/>
           </a:xfrm>
           <a:prstGeom prst="rect">
@@ -5710,13 +5733,13 @@
       </p:sp>
       <p:sp>
         <p:nvSpPr>
-          <p:cNvPr id="12" name="Shape 10"/>
-          <p:cNvSpPr/>
-          <p:nvPr/>
-        </p:nvSpPr>
-        <p:spPr>
-          <a:xfrm>
-            <a:off x="609600" y="3267075"/>
+          <p:cNvPr id="13" name="Shape 10"/>
+          <p:cNvSpPr/>
+          <p:nvPr/>
+        </p:nvSpPr>
+        <p:spPr>
+          <a:xfrm>
+            <a:off x="609600" y="3038475"/>
             <a:ext cx="66675" cy="66675"/>
           </a:xfrm>
           <a:prstGeom prst="roundRect">
@@ -5737,13 +5760,13 @@
       </p:sp>
       <p:sp>
         <p:nvSpPr>
-          <p:cNvPr id="13" name="Text 11"/>
-          <p:cNvSpPr/>
-          <p:nvPr/>
-        </p:nvSpPr>
-        <p:spPr>
-          <a:xfrm>
-            <a:off x="800100" y="3181350"/>
+          <p:cNvPr id="14" name="Text 11"/>
+          <p:cNvSpPr/>
+          <p:nvPr/>
+        </p:nvSpPr>
+        <p:spPr>
+          <a:xfrm>
+            <a:off x="800100" y="2952750"/>
             <a:ext cx="5086350" cy="342900"/>
           </a:xfrm>
           <a:prstGeom prst="rect">
@@ -5776,13 +5799,13 @@
       </p:sp>
       <p:sp>
         <p:nvSpPr>
-          <p:cNvPr id="14" name="Shape 12"/>
-          <p:cNvSpPr/>
-          <p:nvPr/>
-        </p:nvSpPr>
-        <p:spPr>
-          <a:xfrm>
-            <a:off x="609600" y="3800475"/>
+          <p:cNvPr id="15" name="Shape 12"/>
+          <p:cNvSpPr/>
+          <p:nvPr/>
+        </p:nvSpPr>
+        <p:spPr>
+          <a:xfrm>
+            <a:off x="609600" y="3571875"/>
             <a:ext cx="66675" cy="66675"/>
           </a:xfrm>
           <a:prstGeom prst="roundRect">
@@ -5803,13 +5826,13 @@
       </p:sp>
       <p:sp>
         <p:nvSpPr>
-          <p:cNvPr id="15" name="Text 13"/>
-          <p:cNvSpPr/>
-          <p:nvPr/>
-        </p:nvSpPr>
-        <p:spPr>
-          <a:xfrm>
-            <a:off x="800100" y="3714750"/>
+          <p:cNvPr id="16" name="Text 13"/>
+          <p:cNvSpPr/>
+          <p:nvPr/>
+        </p:nvSpPr>
+        <p:spPr>
+          <a:xfrm>
+            <a:off x="800100" y="3486150"/>
             <a:ext cx="5086350" cy="342900"/>
           </a:xfrm>
           <a:prstGeom prst="rect">
@@ -5842,18 +5865,18 @@
       </p:sp>
       <p:sp>
         <p:nvSpPr>
-          <p:cNvPr id="16" name="Shape 14"/>
-          <p:cNvSpPr/>
-          <p:nvPr/>
-        </p:nvSpPr>
-        <p:spPr>
-          <a:xfrm>
-            <a:off x="6324600" y="1447800"/>
-            <a:ext cx="5467350" cy="4876800"/>
+          <p:cNvPr id="17" name="Shape 14"/>
+          <p:cNvSpPr/>
+          <p:nvPr/>
+        </p:nvSpPr>
+        <p:spPr>
+          <a:xfrm>
+            <a:off x="6324600" y="1219200"/>
+            <a:ext cx="5467350" cy="5105400"/>
           </a:xfrm>
           <a:prstGeom prst="roundRect">
             <a:avLst>
-              <a:gd name="adj" fmla="val 1875"/>
+              <a:gd name="adj" fmla="val 1791"/>
             </a:avLst>
           </a:prstGeom>
           <a:solidFill>
@@ -5869,13 +5892,13 @@
       </p:sp>
       <p:sp>
         <p:nvSpPr>
-          <p:cNvPr id="17" name="Shape 15"/>
-          <p:cNvSpPr/>
-          <p:nvPr/>
-        </p:nvSpPr>
-        <p:spPr>
-          <a:xfrm>
-            <a:off x="6324600" y="1447800"/>
+          <p:cNvPr id="18" name="Shape 15"/>
+          <p:cNvSpPr/>
+          <p:nvPr/>
+        </p:nvSpPr>
+        <p:spPr>
+          <a:xfrm>
+            <a:off x="6324600" y="1219200"/>
             <a:ext cx="5467350" cy="76200"/>
           </a:xfrm>
           <a:prstGeom prst="rect">
@@ -5894,13 +5917,13 @@
       </p:sp>
       <p:sp>
         <p:nvSpPr>
-          <p:cNvPr id="18" name="Text 16"/>
-          <p:cNvSpPr/>
-          <p:nvPr/>
-        </p:nvSpPr>
-        <p:spPr>
-          <a:xfrm>
-            <a:off x="6534150" y="1676400"/>
+          <p:cNvPr id="19" name="Text 16"/>
+          <p:cNvSpPr/>
+          <p:nvPr/>
+        </p:nvSpPr>
+        <p:spPr>
+          <a:xfrm>
+            <a:off x="6534150" y="1447800"/>
             <a:ext cx="5048250" cy="171450"/>
           </a:xfrm>
           <a:prstGeom prst="rect">
@@ -5933,13 +5956,13 @@
       </p:sp>
       <p:sp>
         <p:nvSpPr>
-          <p:cNvPr id="19" name="Text 17"/>
-          <p:cNvSpPr/>
-          <p:nvPr/>
-        </p:nvSpPr>
-        <p:spPr>
-          <a:xfrm>
-            <a:off x="6534150" y="1971675"/>
+          <p:cNvPr id="20" name="Text 17"/>
+          <p:cNvSpPr/>
+          <p:nvPr/>
+        </p:nvSpPr>
+        <p:spPr>
+          <a:xfrm>
+            <a:off x="6534150" y="1743075"/>
             <a:ext cx="5048250" cy="476250"/>
           </a:xfrm>
           <a:prstGeom prst="rect">
@@ -5972,13 +5995,13 @@
       </p:sp>
       <p:sp>
         <p:nvSpPr>
-          <p:cNvPr id="20" name="Shape 18"/>
-          <p:cNvSpPr/>
-          <p:nvPr/>
-        </p:nvSpPr>
-        <p:spPr>
-          <a:xfrm>
-            <a:off x="6534150" y="2733675"/>
+          <p:cNvPr id="21" name="Shape 18"/>
+          <p:cNvSpPr/>
+          <p:nvPr/>
+        </p:nvSpPr>
+        <p:spPr>
+          <a:xfrm>
+            <a:off x="6534150" y="2505075"/>
             <a:ext cx="66675" cy="66675"/>
           </a:xfrm>
           <a:prstGeom prst="roundRect">
@@ -5999,13 +6022,13 @@
       </p:sp>
       <p:sp>
         <p:nvSpPr>
-          <p:cNvPr id="21" name="Text 19"/>
-          <p:cNvSpPr/>
-          <p:nvPr/>
-        </p:nvSpPr>
-        <p:spPr>
-          <a:xfrm>
-            <a:off x="6724650" y="2647950"/>
+          <p:cNvPr id="22" name="Text 19"/>
+          <p:cNvSpPr/>
+          <p:nvPr/>
+        </p:nvSpPr>
+        <p:spPr>
+          <a:xfrm>
+            <a:off x="6724650" y="2419350"/>
             <a:ext cx="4857750" cy="342900"/>
           </a:xfrm>
           <a:prstGeom prst="rect">
@@ -6038,13 +6061,13 @@
       </p:sp>
       <p:sp>
         <p:nvSpPr>
-          <p:cNvPr id="22" name="Shape 20"/>
-          <p:cNvSpPr/>
-          <p:nvPr/>
-        </p:nvSpPr>
-        <p:spPr>
-          <a:xfrm>
-            <a:off x="6534150" y="3267075"/>
+          <p:cNvPr id="23" name="Shape 20"/>
+          <p:cNvSpPr/>
+          <p:nvPr/>
+        </p:nvSpPr>
+        <p:spPr>
+          <a:xfrm>
+            <a:off x="6534150" y="3038475"/>
             <a:ext cx="66675" cy="66675"/>
           </a:xfrm>
           <a:prstGeom prst="roundRect">
@@ -6065,13 +6088,13 @@
       </p:sp>
       <p:sp>
         <p:nvSpPr>
-          <p:cNvPr id="23" name="Text 21"/>
-          <p:cNvSpPr/>
-          <p:nvPr/>
-        </p:nvSpPr>
-        <p:spPr>
-          <a:xfrm>
-            <a:off x="6724650" y="3181350"/>
+          <p:cNvPr id="24" name="Text 21"/>
+          <p:cNvSpPr/>
+          <p:nvPr/>
+        </p:nvSpPr>
+        <p:spPr>
+          <a:xfrm>
+            <a:off x="6724650" y="2952750"/>
             <a:ext cx="4857750" cy="342900"/>
           </a:xfrm>
           <a:prstGeom prst="rect">
@@ -6104,13 +6127,13 @@
       </p:sp>
       <p:sp>
         <p:nvSpPr>
-          <p:cNvPr id="24" name="Shape 22"/>
-          <p:cNvSpPr/>
-          <p:nvPr/>
-        </p:nvSpPr>
-        <p:spPr>
-          <a:xfrm>
-            <a:off x="6534150" y="3800475"/>
+          <p:cNvPr id="25" name="Shape 22"/>
+          <p:cNvSpPr/>
+          <p:nvPr/>
+        </p:nvSpPr>
+        <p:spPr>
+          <a:xfrm>
+            <a:off x="6534150" y="3571875"/>
             <a:ext cx="66675" cy="66675"/>
           </a:xfrm>
           <a:prstGeom prst="roundRect">
@@ -6131,13 +6154,13 @@
       </p:sp>
       <p:sp>
         <p:nvSpPr>
-          <p:cNvPr id="25" name="Text 23"/>
-          <p:cNvSpPr/>
-          <p:nvPr/>
-        </p:nvSpPr>
-        <p:spPr>
-          <a:xfrm>
-            <a:off x="6724650" y="3714750"/>
+          <p:cNvPr id="26" name="Text 23"/>
+          <p:cNvSpPr/>
+          <p:nvPr/>
+        </p:nvSpPr>
+        <p:spPr>
+          <a:xfrm>
+            <a:off x="6724650" y="3486150"/>
             <a:ext cx="4857750" cy="342900"/>
           </a:xfrm>
           <a:prstGeom prst="rect">
@@ -6200,16 +6223,46 @@
           <a:chExt cx="0" cy="0"/>
         </a:xfrm>
       </p:grpSpPr>
-      <p:sp>
-        <p:nvSpPr>
-          <p:cNvPr id="2" name="Text 0"/>
-          <p:cNvSpPr/>
-          <p:nvPr/>
-        </p:nvSpPr>
-        <p:spPr>
-          <a:xfrm>
-            <a:off x="400050" y="304800"/>
-            <a:ext cx="11049000" cy="533400"/>
+      <p:pic>
+        <p:nvPicPr>
+          <p:cNvPr id="2" name="Image 0" descr="/Users/dpadmana/projects/ppt-gen/themes/scientific/logo.svg">    </p:cNvPr>
+          <p:cNvPicPr>
+            <a:picLocks noChangeAspect="1"/>
+          </p:cNvPicPr>
+          <p:nvPr/>
+        </p:nvPicPr>
+        <p:blipFill>
+          <a:blip r:embed="rId1">
+            <a:extLst>
+              <a:ext uri="{96DAC541-7B7A-43D3-8B79-37D633B846F1}">
+                <asvg:svgBlip xmlns:asvg="http://schemas.microsoft.com/office/drawing/2016/SVG/main" r:embed="rId2"/>
+              </a:ext>
+            </a:extLst>
+          </a:blip>
+          <a:stretch>
+            <a:fillRect/>
+          </a:stretch>
+        </p:blipFill>
+        <p:spPr>
+          <a:xfrm>
+            <a:off x="11430000" y="266700"/>
+            <a:ext cx="419100" cy="419100"/>
+          </a:xfrm>
+          <a:prstGeom prst="rect">
+            <a:avLst/>
+          </a:prstGeom>
+        </p:spPr>
+      </p:pic>
+      <p:sp>
+        <p:nvSpPr>
+          <p:cNvPr id="3" name="Text 0"/>
+          <p:cNvSpPr/>
+          <p:nvPr/>
+        </p:nvSpPr>
+        <p:spPr>
+          <a:xfrm>
+            <a:off x="400050" y="247650"/>
+            <a:ext cx="10839450" cy="381000"/>
           </a:xfrm>
           <a:prstGeom prst="rect">
             <a:avLst/>
@@ -6225,7 +6278,7 @@
               <a:buNone/>
             </a:pPr>
             <a:r>
-              <a:rPr lang="en-US" sz="3200" b="1" dirty="0">
+              <a:rPr lang="en-US" sz="3000" b="1" dirty="0">
                 <a:solidFill>
                   <a:srgbClr val="EAEAEA"/>
                 </a:solidFill>
@@ -6235,20 +6288,20 @@
               </a:rPr>
               <a:t>Canonical MoE block</a:t>
             </a:r>
-            <a:endParaRPr lang="en-US" sz="3200" dirty="0"/>
-          </a:p>
-        </p:txBody>
-      </p:sp>
-      <p:sp>
-        <p:nvSpPr>
-          <p:cNvPr id="3" name="Text 1"/>
+            <a:endParaRPr lang="en-US" sz="3000" dirty="0"/>
+          </a:p>
+        </p:txBody>
+      </p:sp>
+      <p:sp>
+        <p:nvSpPr>
+          <p:cNvPr id="4" name="Text 1"/>
           <p:cNvSpPr/>
           <p:nvPr/>
         </p:nvSpPr>
         <p:spPr>
           <a:xfrm>
             <a:off x="400050" y="6457950"/>
-            <a:ext cx="8572500" cy="171450"/>
+            <a:ext cx="4953000" cy="171450"/>
           </a:xfrm>
           <a:prstGeom prst="rect">
             <a:avLst/>
@@ -6280,7 +6333,7 @@
       </p:sp>
       <p:sp>
         <p:nvSpPr>
-          <p:cNvPr id="4" name="Text 2"/>
+          <p:cNvPr id="5" name="Text 2"/>
           <p:cNvSpPr/>
           <p:nvPr/>
         </p:nvSpPr>
@@ -6319,13 +6372,13 @@
       </p:sp>
       <p:sp>
         <p:nvSpPr>
-          <p:cNvPr id="5" name="Shape 3"/>
-          <p:cNvSpPr/>
-          <p:nvPr/>
-        </p:nvSpPr>
-        <p:spPr>
-          <a:xfrm>
-            <a:off x="4045458" y="1257300"/>
+          <p:cNvPr id="6" name="Shape 3"/>
+          <p:cNvSpPr/>
+          <p:nvPr/>
+        </p:nvSpPr>
+        <p:spPr>
+          <a:xfrm>
+            <a:off x="4045458" y="857250"/>
             <a:ext cx="4101084" cy="838200"/>
           </a:xfrm>
           <a:prstGeom prst="roundRect">
@@ -6346,13 +6399,13 @@
       </p:sp>
       <p:sp>
         <p:nvSpPr>
-          <p:cNvPr id="6" name="Shape 4"/>
-          <p:cNvSpPr/>
-          <p:nvPr/>
-        </p:nvSpPr>
-        <p:spPr>
-          <a:xfrm>
-            <a:off x="4045458" y="1257300"/>
+          <p:cNvPr id="7" name="Shape 4"/>
+          <p:cNvSpPr/>
+          <p:nvPr/>
+        </p:nvSpPr>
+        <p:spPr>
+          <a:xfrm>
+            <a:off x="4045458" y="857250"/>
             <a:ext cx="57150" cy="838200"/>
           </a:xfrm>
           <a:prstGeom prst="rect">
@@ -6371,13 +6424,13 @@
       </p:sp>
       <p:sp>
         <p:nvSpPr>
-          <p:cNvPr id="7" name="Text 5"/>
-          <p:cNvSpPr/>
-          <p:nvPr/>
-        </p:nvSpPr>
-        <p:spPr>
-          <a:xfrm>
-            <a:off x="4216908" y="1409700"/>
+          <p:cNvPr id="8" name="Text 5"/>
+          <p:cNvSpPr/>
+          <p:nvPr/>
+        </p:nvSpPr>
+        <p:spPr>
+          <a:xfrm>
+            <a:off x="4216908" y="1009650"/>
             <a:ext cx="3758184" cy="171450"/>
           </a:xfrm>
           <a:prstGeom prst="rect">
@@ -6410,13 +6463,13 @@
       </p:sp>
       <p:sp>
         <p:nvSpPr>
-          <p:cNvPr id="8" name="Shape 6"/>
-          <p:cNvSpPr/>
-          <p:nvPr/>
-        </p:nvSpPr>
-        <p:spPr>
-          <a:xfrm>
-            <a:off x="6081713" y="2095500"/>
+          <p:cNvPr id="9" name="Shape 6"/>
+          <p:cNvSpPr/>
+          <p:nvPr/>
+        </p:nvSpPr>
+        <p:spPr>
+          <a:xfrm>
+            <a:off x="6081713" y="1695450"/>
             <a:ext cx="28575" cy="342900"/>
           </a:xfrm>
           <a:prstGeom prst="rect">
@@ -6435,13 +6488,13 @@
       </p:sp>
       <p:sp>
         <p:nvSpPr>
-          <p:cNvPr id="9" name="Shape 7"/>
-          <p:cNvSpPr/>
-          <p:nvPr/>
-        </p:nvSpPr>
-        <p:spPr>
-          <a:xfrm>
-            <a:off x="2233613" y="2424113"/>
+          <p:cNvPr id="10" name="Shape 7"/>
+          <p:cNvSpPr/>
+          <p:nvPr/>
+        </p:nvSpPr>
+        <p:spPr>
+          <a:xfrm>
+            <a:off x="2233613" y="2024062"/>
             <a:ext cx="7715250" cy="28575"/>
           </a:xfrm>
           <a:prstGeom prst="rect">
@@ -6460,13 +6513,13 @@
       </p:sp>
       <p:sp>
         <p:nvSpPr>
-          <p:cNvPr id="10" name="Shape 8"/>
-          <p:cNvSpPr/>
-          <p:nvPr/>
-        </p:nvSpPr>
-        <p:spPr>
-          <a:xfrm>
-            <a:off x="2219325" y="2438400"/>
+          <p:cNvPr id="11" name="Shape 8"/>
+          <p:cNvSpPr/>
+          <p:nvPr/>
+        </p:nvSpPr>
+        <p:spPr>
+          <a:xfrm>
+            <a:off x="2219325" y="2038350"/>
             <a:ext cx="28575" cy="342900"/>
           </a:xfrm>
           <a:prstGeom prst="rect">
@@ -6485,13 +6538,13 @@
       </p:sp>
       <p:sp>
         <p:nvSpPr>
-          <p:cNvPr id="11" name="Shape 9"/>
-          <p:cNvSpPr/>
-          <p:nvPr/>
-        </p:nvSpPr>
-        <p:spPr>
-          <a:xfrm>
-            <a:off x="6076950" y="2438400"/>
+          <p:cNvPr id="12" name="Shape 9"/>
+          <p:cNvSpPr/>
+          <p:nvPr/>
+        </p:nvSpPr>
+        <p:spPr>
+          <a:xfrm>
+            <a:off x="6076950" y="2038350"/>
             <a:ext cx="28575" cy="342900"/>
           </a:xfrm>
           <a:prstGeom prst="rect">
@@ -6510,13 +6563,13 @@
       </p:sp>
       <p:sp>
         <p:nvSpPr>
-          <p:cNvPr id="12" name="Shape 10"/>
-          <p:cNvSpPr/>
-          <p:nvPr/>
-        </p:nvSpPr>
-        <p:spPr>
-          <a:xfrm>
-            <a:off x="9934575" y="2438400"/>
+          <p:cNvPr id="13" name="Shape 10"/>
+          <p:cNvSpPr/>
+          <p:nvPr/>
+        </p:nvSpPr>
+        <p:spPr>
+          <a:xfrm>
+            <a:off x="9934575" y="2038350"/>
             <a:ext cx="28575" cy="342900"/>
           </a:xfrm>
           <a:prstGeom prst="rect">
@@ -6535,13 +6588,13 @@
       </p:sp>
       <p:sp>
         <p:nvSpPr>
-          <p:cNvPr id="13" name="Shape 11"/>
-          <p:cNvSpPr/>
-          <p:nvPr/>
-        </p:nvSpPr>
-        <p:spPr>
-          <a:xfrm>
-            <a:off x="400050" y="2781300"/>
+          <p:cNvPr id="14" name="Shape 11"/>
+          <p:cNvSpPr/>
+          <p:nvPr/>
+        </p:nvSpPr>
+        <p:spPr>
+          <a:xfrm>
+            <a:off x="400050" y="2381250"/>
             <a:ext cx="3667125" cy="1047750"/>
           </a:xfrm>
           <a:prstGeom prst="roundRect">
@@ -6562,13 +6615,13 @@
       </p:sp>
       <p:sp>
         <p:nvSpPr>
-          <p:cNvPr id="14" name="Shape 12"/>
-          <p:cNvSpPr/>
-          <p:nvPr/>
-        </p:nvSpPr>
-        <p:spPr>
-          <a:xfrm>
-            <a:off x="400050" y="2781300"/>
+          <p:cNvPr id="15" name="Shape 12"/>
+          <p:cNvSpPr/>
+          <p:nvPr/>
+        </p:nvSpPr>
+        <p:spPr>
+          <a:xfrm>
+            <a:off x="400050" y="2381250"/>
             <a:ext cx="57150" cy="1047750"/>
           </a:xfrm>
           <a:prstGeom prst="rect">
@@ -6587,13 +6640,13 @@
       </p:sp>
       <p:sp>
         <p:nvSpPr>
-          <p:cNvPr id="15" name="Text 13"/>
-          <p:cNvSpPr/>
-          <p:nvPr/>
-        </p:nvSpPr>
-        <p:spPr>
-          <a:xfrm>
-            <a:off x="571500" y="2933700"/>
+          <p:cNvPr id="16" name="Text 13"/>
+          <p:cNvSpPr/>
+          <p:nvPr/>
+        </p:nvSpPr>
+        <p:spPr>
+          <a:xfrm>
+            <a:off x="571500" y="2533650"/>
             <a:ext cx="3324225" cy="171450"/>
           </a:xfrm>
           <a:prstGeom prst="rect">
@@ -6626,13 +6679,13 @@
       </p:sp>
       <p:sp>
         <p:nvSpPr>
-          <p:cNvPr id="16" name="Shape 14"/>
-          <p:cNvSpPr/>
-          <p:nvPr/>
-        </p:nvSpPr>
-        <p:spPr>
-          <a:xfrm>
-            <a:off x="4257675" y="2781300"/>
+          <p:cNvPr id="17" name="Shape 14"/>
+          <p:cNvSpPr/>
+          <p:nvPr/>
+        </p:nvSpPr>
+        <p:spPr>
+          <a:xfrm>
+            <a:off x="4257675" y="2381250"/>
             <a:ext cx="3667125" cy="1047750"/>
           </a:xfrm>
           <a:prstGeom prst="roundRect">
@@ -6653,13 +6706,13 @@
       </p:sp>
       <p:sp>
         <p:nvSpPr>
-          <p:cNvPr id="17" name="Shape 15"/>
-          <p:cNvSpPr/>
-          <p:nvPr/>
-        </p:nvSpPr>
-        <p:spPr>
-          <a:xfrm>
-            <a:off x="4257675" y="2781300"/>
+          <p:cNvPr id="18" name="Shape 15"/>
+          <p:cNvSpPr/>
+          <p:nvPr/>
+        </p:nvSpPr>
+        <p:spPr>
+          <a:xfrm>
+            <a:off x="4257675" y="2381250"/>
             <a:ext cx="57150" cy="1047750"/>
           </a:xfrm>
           <a:prstGeom prst="rect">
@@ -6678,13 +6731,13 @@
       </p:sp>
       <p:sp>
         <p:nvSpPr>
-          <p:cNvPr id="18" name="Text 16"/>
-          <p:cNvSpPr/>
-          <p:nvPr/>
-        </p:nvSpPr>
-        <p:spPr>
-          <a:xfrm>
-            <a:off x="4429125" y="2933700"/>
+          <p:cNvPr id="19" name="Text 16"/>
+          <p:cNvSpPr/>
+          <p:nvPr/>
+        </p:nvSpPr>
+        <p:spPr>
+          <a:xfrm>
+            <a:off x="4429125" y="2533650"/>
             <a:ext cx="3324225" cy="171450"/>
           </a:xfrm>
           <a:prstGeom prst="rect">
@@ -6717,13 +6770,13 @@
       </p:sp>
       <p:sp>
         <p:nvSpPr>
-          <p:cNvPr id="19" name="Shape 17"/>
-          <p:cNvSpPr/>
-          <p:nvPr/>
-        </p:nvSpPr>
-        <p:spPr>
-          <a:xfrm>
-            <a:off x="8115300" y="2781300"/>
+          <p:cNvPr id="20" name="Shape 17"/>
+          <p:cNvSpPr/>
+          <p:nvPr/>
+        </p:nvSpPr>
+        <p:spPr>
+          <a:xfrm>
+            <a:off x="8115300" y="2381250"/>
             <a:ext cx="3667125" cy="1047750"/>
           </a:xfrm>
           <a:prstGeom prst="roundRect">
@@ -6744,13 +6797,13 @@
       </p:sp>
       <p:sp>
         <p:nvSpPr>
-          <p:cNvPr id="20" name="Shape 18"/>
-          <p:cNvSpPr/>
-          <p:nvPr/>
-        </p:nvSpPr>
-        <p:spPr>
-          <a:xfrm>
-            <a:off x="8115300" y="2781300"/>
+          <p:cNvPr id="21" name="Shape 18"/>
+          <p:cNvSpPr/>
+          <p:nvPr/>
+        </p:nvSpPr>
+        <p:spPr>
+          <a:xfrm>
+            <a:off x="8115300" y="2381250"/>
             <a:ext cx="57150" cy="1047750"/>
           </a:xfrm>
           <a:prstGeom prst="rect">
@@ -6769,13 +6822,13 @@
       </p:sp>
       <p:sp>
         <p:nvSpPr>
-          <p:cNvPr id="21" name="Text 19"/>
-          <p:cNvSpPr/>
-          <p:nvPr/>
-        </p:nvSpPr>
-        <p:spPr>
-          <a:xfrm>
-            <a:off x="8286750" y="2933700"/>
+          <p:cNvPr id="22" name="Text 19"/>
+          <p:cNvSpPr/>
+          <p:nvPr/>
+        </p:nvSpPr>
+        <p:spPr>
+          <a:xfrm>
+            <a:off x="8286750" y="2533650"/>
             <a:ext cx="3324225" cy="171450"/>
           </a:xfrm>
           <a:prstGeom prst="rect">
@@ -6838,16 +6891,46 @@
           <a:chExt cx="0" cy="0"/>
         </a:xfrm>
       </p:grpSpPr>
-      <p:sp>
-        <p:nvSpPr>
-          <p:cNvPr id="2" name="Text 0"/>
-          <p:cNvSpPr/>
-          <p:nvPr/>
-        </p:nvSpPr>
-        <p:spPr>
-          <a:xfrm>
-            <a:off x="400050" y="304800"/>
-            <a:ext cx="11049000" cy="533400"/>
+      <p:pic>
+        <p:nvPicPr>
+          <p:cNvPr id="2" name="Image 0" descr="/Users/dpadmana/projects/ppt-gen/themes/scientific/logo.svg">    </p:cNvPr>
+          <p:cNvPicPr>
+            <a:picLocks noChangeAspect="1"/>
+          </p:cNvPicPr>
+          <p:nvPr/>
+        </p:nvPicPr>
+        <p:blipFill>
+          <a:blip r:embed="rId1">
+            <a:extLst>
+              <a:ext uri="{96DAC541-7B7A-43D3-8B79-37D633B846F1}">
+                <asvg:svgBlip xmlns:asvg="http://schemas.microsoft.com/office/drawing/2016/SVG/main" r:embed="rId2"/>
+              </a:ext>
+            </a:extLst>
+          </a:blip>
+          <a:stretch>
+            <a:fillRect/>
+          </a:stretch>
+        </p:blipFill>
+        <p:spPr>
+          <a:xfrm>
+            <a:off x="11430000" y="266700"/>
+            <a:ext cx="419100" cy="419100"/>
+          </a:xfrm>
+          <a:prstGeom prst="rect">
+            <a:avLst/>
+          </a:prstGeom>
+        </p:spPr>
+      </p:pic>
+      <p:sp>
+        <p:nvSpPr>
+          <p:cNvPr id="3" name="Text 0"/>
+          <p:cNvSpPr/>
+          <p:nvPr/>
+        </p:nvSpPr>
+        <p:spPr>
+          <a:xfrm>
+            <a:off x="400050" y="247650"/>
+            <a:ext cx="10839450" cy="381000"/>
           </a:xfrm>
           <a:prstGeom prst="rect">
             <a:avLst/>
@@ -6863,7 +6946,7 @@
               <a:buNone/>
             </a:pPr>
             <a:r>
-              <a:rPr lang="en-US" sz="3200" b="1" dirty="0">
+              <a:rPr lang="en-US" sz="3000" b="1" dirty="0">
                 <a:solidFill>
                   <a:srgbClr val="EAEAEA"/>
                 </a:solidFill>
@@ -6873,20 +6956,20 @@
               </a:rPr>
               <a:t>Expert load is uneven in practice</a:t>
             </a:r>
-            <a:endParaRPr lang="en-US" sz="3200" dirty="0"/>
-          </a:p>
-        </p:txBody>
-      </p:sp>
-      <p:sp>
-        <p:nvSpPr>
-          <p:cNvPr id="3" name="Text 1"/>
+            <a:endParaRPr lang="en-US" sz="3000" dirty="0"/>
+          </a:p>
+        </p:txBody>
+      </p:sp>
+      <p:sp>
+        <p:nvSpPr>
+          <p:cNvPr id="4" name="Text 1"/>
           <p:cNvSpPr/>
           <p:nvPr/>
         </p:nvSpPr>
         <p:spPr>
           <a:xfrm>
             <a:off x="400050" y="6457950"/>
-            <a:ext cx="8572500" cy="171450"/>
+            <a:ext cx="4953000" cy="171450"/>
           </a:xfrm>
           <a:prstGeom prst="rect">
             <a:avLst/>
@@ -6918,7 +7001,7 @@
       </p:sp>
       <p:sp>
         <p:nvSpPr>
-          <p:cNvPr id="4" name="Text 2"/>
+          <p:cNvPr id="5" name="Text 2"/>
           <p:cNvSpPr/>
           <p:nvPr/>
         </p:nvSpPr>
@@ -6957,7 +7040,7 @@
       </p:sp>
       <p:sp>
         <p:nvSpPr>
-          <p:cNvPr id="5" name="Shape 3"/>
+          <p:cNvPr id="6" name="Shape 3"/>
           <p:cNvSpPr/>
           <p:nvPr/>
         </p:nvSpPr>
@@ -6984,14 +7067,14 @@
       </p:sp>
       <p:pic>
         <p:nvPicPr>
-          <p:cNvPr id="6" name="Image 0" descr="/Users/dpadmana/projects/ppt-gen/assets/plots/moe_routing-911a39122b.png">    </p:cNvPr>
+          <p:cNvPr id="7" name="Image 1" descr="/Users/dpadmana/projects/ppt-gen/assets/plots/moe_routing-30cb31e2de.png">    </p:cNvPr>
           <p:cNvPicPr>
             <a:picLocks noChangeAspect="1"/>
           </p:cNvPicPr>
           <p:nvPr/>
         </p:nvPicPr>
         <p:blipFill>
-          <a:blip r:embed="rId1"/>
+          <a:blip r:embed="rId3"/>
           <a:stretch>
             <a:fillRect/>
           </a:stretch>
@@ -7008,7 +7091,7 @@
       </p:pic>
       <p:sp>
         <p:nvSpPr>
-          <p:cNvPr id="7" name="Text 4"/>
+          <p:cNvPr id="8" name="Text 4"/>
           <p:cNvSpPr/>
           <p:nvPr/>
         </p:nvSpPr>
@@ -7077,16 +7160,46 @@
           <a:chExt cx="0" cy="0"/>
         </a:xfrm>
       </p:grpSpPr>
-      <p:sp>
-        <p:nvSpPr>
-          <p:cNvPr id="2" name="Text 0"/>
-          <p:cNvSpPr/>
-          <p:nvPr/>
-        </p:nvSpPr>
-        <p:spPr>
-          <a:xfrm>
-            <a:off x="400050" y="304800"/>
-            <a:ext cx="11049000" cy="533400"/>
+      <p:pic>
+        <p:nvPicPr>
+          <p:cNvPr id="2" name="Image 0" descr="/Users/dpadmana/projects/ppt-gen/themes/scientific/logo.svg">    </p:cNvPr>
+          <p:cNvPicPr>
+            <a:picLocks noChangeAspect="1"/>
+          </p:cNvPicPr>
+          <p:nvPr/>
+        </p:nvPicPr>
+        <p:blipFill>
+          <a:blip r:embed="rId1">
+            <a:extLst>
+              <a:ext uri="{96DAC541-7B7A-43D3-8B79-37D633B846F1}">
+                <asvg:svgBlip xmlns:asvg="http://schemas.microsoft.com/office/drawing/2016/SVG/main" r:embed="rId2"/>
+              </a:ext>
+            </a:extLst>
+          </a:blip>
+          <a:stretch>
+            <a:fillRect/>
+          </a:stretch>
+        </p:blipFill>
+        <p:spPr>
+          <a:xfrm>
+            <a:off x="11430000" y="266700"/>
+            <a:ext cx="419100" cy="419100"/>
+          </a:xfrm>
+          <a:prstGeom prst="rect">
+            <a:avLst/>
+          </a:prstGeom>
+        </p:spPr>
+      </p:pic>
+      <p:sp>
+        <p:nvSpPr>
+          <p:cNvPr id="3" name="Text 0"/>
+          <p:cNvSpPr/>
+          <p:nvPr/>
+        </p:nvSpPr>
+        <p:spPr>
+          <a:xfrm>
+            <a:off x="400050" y="247650"/>
+            <a:ext cx="10839450" cy="381000"/>
           </a:xfrm>
           <a:prstGeom prst="rect">
             <a:avLst/>
@@ -7102,7 +7215,7 @@
               <a:buNone/>
             </a:pPr>
             <a:r>
-              <a:rPr lang="en-US" sz="3200" b="1" dirty="0">
+              <a:rPr lang="en-US" sz="3000" b="1" dirty="0">
                 <a:solidFill>
                   <a:srgbClr val="EAEAEA"/>
                 </a:solidFill>
@@ -7112,20 +7225,20 @@
               </a:rPr>
               <a:t>Gating and load-balance objective</a:t>
             </a:r>
-            <a:endParaRPr lang="en-US" sz="3200" dirty="0"/>
-          </a:p>
-        </p:txBody>
-      </p:sp>
-      <p:sp>
-        <p:nvSpPr>
-          <p:cNvPr id="3" name="Text 1"/>
+            <a:endParaRPr lang="en-US" sz="3000" dirty="0"/>
+          </a:p>
+        </p:txBody>
+      </p:sp>
+      <p:sp>
+        <p:nvSpPr>
+          <p:cNvPr id="4" name="Text 1"/>
           <p:cNvSpPr/>
           <p:nvPr/>
         </p:nvSpPr>
         <p:spPr>
           <a:xfrm>
             <a:off x="400050" y="6457950"/>
-            <a:ext cx="8572500" cy="171450"/>
+            <a:ext cx="4953000" cy="171450"/>
           </a:xfrm>
           <a:prstGeom prst="rect">
             <a:avLst/>
@@ -7157,7 +7270,7 @@
       </p:sp>
       <p:sp>
         <p:nvSpPr>
-          <p:cNvPr id="4" name="Text 2"/>
+          <p:cNvPr id="5" name="Text 2"/>
           <p:cNvSpPr/>
           <p:nvPr/>
         </p:nvSpPr>
@@ -7196,18 +7309,18 @@
       </p:sp>
       <p:sp>
         <p:nvSpPr>
-          <p:cNvPr id="5" name="Shape 3"/>
-          <p:cNvSpPr/>
-          <p:nvPr/>
-        </p:nvSpPr>
-        <p:spPr>
-          <a:xfrm>
-            <a:off x="400050" y="1895475"/>
-            <a:ext cx="11391900" cy="3714750"/>
+          <p:cNvPr id="6" name="Shape 3"/>
+          <p:cNvSpPr/>
+          <p:nvPr/>
+        </p:nvSpPr>
+        <p:spPr>
+          <a:xfrm>
+            <a:off x="400050" y="2295525"/>
+            <a:ext cx="11391900" cy="2505075"/>
           </a:xfrm>
           <a:prstGeom prst="roundRect">
             <a:avLst>
-              <a:gd name="adj" fmla="val 2462"/>
+              <a:gd name="adj" fmla="val 3650"/>
             </a:avLst>
           </a:prstGeom>
           <a:solidFill>
@@ -7223,22 +7336,22 @@
       </p:sp>
       <p:pic>
         <p:nvPicPr>
-          <p:cNvPr id="6" name="Image 0" descr="/Users/dpadmana/projects/ppt-gen/assets/math/math-0ff6a9d11942898e.png">    </p:cNvPr>
+          <p:cNvPr id="7" name="Image 1" descr="/Users/dpadmana/projects/ppt-gen/assets/math/math-0ff6a9d11942898e.png">    </p:cNvPr>
           <p:cNvPicPr>
             <a:picLocks noChangeAspect="1"/>
           </p:cNvPicPr>
           <p:nvPr/>
         </p:nvPicPr>
         <p:blipFill>
-          <a:blip r:embed="rId1"/>
+          <a:blip r:embed="rId3"/>
           <a:stretch>
             <a:fillRect/>
           </a:stretch>
         </p:blipFill>
         <p:spPr>
           <a:xfrm>
-            <a:off x="857250" y="2200275"/>
-            <a:ext cx="10477500" cy="2419350"/>
+            <a:off x="3476625" y="2600325"/>
+            <a:ext cx="5238750" cy="1209675"/>
           </a:xfrm>
           <a:prstGeom prst="rect">
             <a:avLst/>
@@ -7247,13 +7360,13 @@
       </p:pic>
       <p:sp>
         <p:nvSpPr>
-          <p:cNvPr id="7" name="Text 4"/>
-          <p:cNvSpPr/>
-          <p:nvPr/>
-        </p:nvSpPr>
-        <p:spPr>
-          <a:xfrm>
-            <a:off x="857250" y="4924425"/>
+          <p:cNvPr id="8" name="Text 4"/>
+          <p:cNvSpPr/>
+          <p:nvPr/>
+        </p:nvSpPr>
+        <p:spPr>
+          <a:xfrm>
+            <a:off x="857250" y="4114800"/>
             <a:ext cx="10477500" cy="533400"/>
           </a:xfrm>
           <a:prstGeom prst="rect">
@@ -7316,16 +7429,46 @@
           <a:chExt cx="0" cy="0"/>
         </a:xfrm>
       </p:grpSpPr>
-      <p:sp>
-        <p:nvSpPr>
-          <p:cNvPr id="2" name="Text 0"/>
-          <p:cNvSpPr/>
-          <p:nvPr/>
-        </p:nvSpPr>
-        <p:spPr>
-          <a:xfrm>
-            <a:off x="400050" y="304800"/>
-            <a:ext cx="11049000" cy="533400"/>
+      <p:pic>
+        <p:nvPicPr>
+          <p:cNvPr id="2" name="Image 0" descr="/Users/dpadmana/projects/ppt-gen/themes/scientific/logo.svg">    </p:cNvPr>
+          <p:cNvPicPr>
+            <a:picLocks noChangeAspect="1"/>
+          </p:cNvPicPr>
+          <p:nvPr/>
+        </p:nvPicPr>
+        <p:blipFill>
+          <a:blip r:embed="rId1">
+            <a:extLst>
+              <a:ext uri="{96DAC541-7B7A-43D3-8B79-37D633B846F1}">
+                <asvg:svgBlip xmlns:asvg="http://schemas.microsoft.com/office/drawing/2016/SVG/main" r:embed="rId2"/>
+              </a:ext>
+            </a:extLst>
+          </a:blip>
+          <a:stretch>
+            <a:fillRect/>
+          </a:stretch>
+        </p:blipFill>
+        <p:spPr>
+          <a:xfrm>
+            <a:off x="11430000" y="266700"/>
+            <a:ext cx="419100" cy="419100"/>
+          </a:xfrm>
+          <a:prstGeom prst="rect">
+            <a:avLst/>
+          </a:prstGeom>
+        </p:spPr>
+      </p:pic>
+      <p:sp>
+        <p:nvSpPr>
+          <p:cNvPr id="3" name="Text 0"/>
+          <p:cNvSpPr/>
+          <p:nvPr/>
+        </p:nvSpPr>
+        <p:spPr>
+          <a:xfrm>
+            <a:off x="400050" y="247650"/>
+            <a:ext cx="10839450" cy="381000"/>
           </a:xfrm>
           <a:prstGeom prst="rect">
             <a:avLst/>
@@ -7341,7 +7484,7 @@
               <a:buNone/>
             </a:pPr>
             <a:r>
-              <a:rPr lang="en-US" sz="3200" b="1" dirty="0">
+              <a:rPr lang="en-US" sz="3000" b="1" dirty="0">
                 <a:solidFill>
                   <a:srgbClr val="EAEAEA"/>
                 </a:solidFill>
@@ -7351,20 +7494,20 @@
               </a:rPr>
               <a:t>Router → experts → train constraints</a:t>
             </a:r>
-            <a:endParaRPr lang="en-US" sz="3200" dirty="0"/>
-          </a:p>
-        </p:txBody>
-      </p:sp>
-      <p:sp>
-        <p:nvSpPr>
-          <p:cNvPr id="3" name="Text 1"/>
+            <a:endParaRPr lang="en-US" sz="3000" dirty="0"/>
+          </a:p>
+        </p:txBody>
+      </p:sp>
+      <p:sp>
+        <p:nvSpPr>
+          <p:cNvPr id="4" name="Text 1"/>
           <p:cNvSpPr/>
           <p:nvPr/>
         </p:nvSpPr>
         <p:spPr>
           <a:xfrm>
             <a:off x="400050" y="6457950"/>
-            <a:ext cx="8572500" cy="171450"/>
+            <a:ext cx="4953000" cy="171450"/>
           </a:xfrm>
           <a:prstGeom prst="rect">
             <a:avLst/>
@@ -7396,7 +7539,7 @@
       </p:sp>
       <p:sp>
         <p:nvSpPr>
-          <p:cNvPr id="4" name="Text 2"/>
+          <p:cNvPr id="5" name="Text 2"/>
           <p:cNvSpPr/>
           <p:nvPr/>
         </p:nvSpPr>
@@ -7435,7 +7578,7 @@
       </p:sp>
       <p:sp>
         <p:nvSpPr>
-          <p:cNvPr id="5" name="Shape 3"/>
+          <p:cNvPr id="6" name="Shape 3"/>
           <p:cNvSpPr/>
           <p:nvPr/>
         </p:nvSpPr>
@@ -7462,14 +7605,14 @@
       </p:sp>
       <p:pic>
         <p:nvPicPr>
-          <p:cNvPr id="6" name="Image 0" descr="/Users/dpadmana/projects/ppt-gen/assets/diagrams/moe.png">    </p:cNvPr>
+          <p:cNvPr id="7" name="Image 1" descr="/Users/dpadmana/projects/ppt-gen/assets/diagrams/moe.png">    </p:cNvPr>
           <p:cNvPicPr>
             <a:picLocks noChangeAspect="1"/>
           </p:cNvPicPr>
           <p:nvPr/>
         </p:nvPicPr>
         <p:blipFill>
-          <a:blip r:embed="rId1"/>
+          <a:blip r:embed="rId3"/>
           <a:stretch>
             <a:fillRect/>
           </a:stretch>
@@ -7516,16 +7659,46 @@
           <a:chExt cx="0" cy="0"/>
         </a:xfrm>
       </p:grpSpPr>
-      <p:sp>
-        <p:nvSpPr>
-          <p:cNvPr id="2" name="Text 0"/>
-          <p:cNvSpPr/>
-          <p:nvPr/>
-        </p:nvSpPr>
-        <p:spPr>
-          <a:xfrm>
-            <a:off x="400050" y="304800"/>
-            <a:ext cx="11049000" cy="533400"/>
+      <p:pic>
+        <p:nvPicPr>
+          <p:cNvPr id="2" name="Image 0" descr="/Users/dpadmana/projects/ppt-gen/themes/scientific/logo.svg">    </p:cNvPr>
+          <p:cNvPicPr>
+            <a:picLocks noChangeAspect="1"/>
+          </p:cNvPicPr>
+          <p:nvPr/>
+        </p:nvPicPr>
+        <p:blipFill>
+          <a:blip r:embed="rId1">
+            <a:extLst>
+              <a:ext uri="{96DAC541-7B7A-43D3-8B79-37D633B846F1}">
+                <asvg:svgBlip xmlns:asvg="http://schemas.microsoft.com/office/drawing/2016/SVG/main" r:embed="rId2"/>
+              </a:ext>
+            </a:extLst>
+          </a:blip>
+          <a:stretch>
+            <a:fillRect/>
+          </a:stretch>
+        </p:blipFill>
+        <p:spPr>
+          <a:xfrm>
+            <a:off x="11430000" y="266700"/>
+            <a:ext cx="419100" cy="419100"/>
+          </a:xfrm>
+          <a:prstGeom prst="rect">
+            <a:avLst/>
+          </a:prstGeom>
+        </p:spPr>
+      </p:pic>
+      <p:sp>
+        <p:nvSpPr>
+          <p:cNvPr id="3" name="Text 0"/>
+          <p:cNvSpPr/>
+          <p:nvPr/>
+        </p:nvSpPr>
+        <p:spPr>
+          <a:xfrm>
+            <a:off x="400050" y="247650"/>
+            <a:ext cx="10839450" cy="381000"/>
           </a:xfrm>
           <a:prstGeom prst="rect">
             <a:avLst/>
@@ -7541,7 +7714,7 @@
               <a:buNone/>
             </a:pPr>
             <a:r>
-              <a:rPr lang="en-US" sz="3200" b="1" dirty="0">
+              <a:rPr lang="en-US" sz="3000" b="1" dirty="0">
                 <a:solidFill>
                   <a:srgbClr val="EAEAEA"/>
                 </a:solidFill>
@@ -7551,20 +7724,20 @@
               </a:rPr>
               <a:t>Forward pass (simplified)</a:t>
             </a:r>
-            <a:endParaRPr lang="en-US" sz="3200" dirty="0"/>
-          </a:p>
-        </p:txBody>
-      </p:sp>
-      <p:sp>
-        <p:nvSpPr>
-          <p:cNvPr id="3" name="Text 1"/>
+            <a:endParaRPr lang="en-US" sz="3000" dirty="0"/>
+          </a:p>
+        </p:txBody>
+      </p:sp>
+      <p:sp>
+        <p:nvSpPr>
+          <p:cNvPr id="4" name="Text 1"/>
           <p:cNvSpPr/>
           <p:nvPr/>
         </p:nvSpPr>
         <p:spPr>
           <a:xfrm>
             <a:off x="400050" y="6457950"/>
-            <a:ext cx="8572500" cy="171450"/>
+            <a:ext cx="4953000" cy="171450"/>
           </a:xfrm>
           <a:prstGeom prst="rect">
             <a:avLst/>
@@ -7596,7 +7769,7 @@
       </p:sp>
       <p:sp>
         <p:nvSpPr>
-          <p:cNvPr id="4" name="Text 2"/>
+          <p:cNvPr id="5" name="Text 2"/>
           <p:cNvSpPr/>
           <p:nvPr/>
         </p:nvSpPr>
@@ -7635,14 +7808,14 @@
       </p:sp>
       <p:sp>
         <p:nvSpPr>
-          <p:cNvPr id="5" name="Shape 3"/>
-          <p:cNvSpPr/>
-          <p:nvPr/>
-        </p:nvSpPr>
-        <p:spPr>
-          <a:xfrm>
-            <a:off x="400050" y="1181100"/>
-            <a:ext cx="2714625" cy="5143500"/>
+          <p:cNvPr id="6" name="Shape 3"/>
+          <p:cNvSpPr/>
+          <p:nvPr/>
+        </p:nvSpPr>
+        <p:spPr>
+          <a:xfrm>
+            <a:off x="400050" y="781050"/>
+            <a:ext cx="2714625" cy="5543550"/>
           </a:xfrm>
           <a:prstGeom prst="roundRect">
             <a:avLst>
@@ -7662,14 +7835,14 @@
       </p:sp>
       <p:sp>
         <p:nvSpPr>
-          <p:cNvPr id="6" name="Shape 4"/>
-          <p:cNvSpPr/>
-          <p:nvPr/>
-        </p:nvSpPr>
-        <p:spPr>
-          <a:xfrm>
-            <a:off x="400050" y="1181100"/>
-            <a:ext cx="57150" cy="5143500"/>
+          <p:cNvPr id="7" name="Shape 4"/>
+          <p:cNvSpPr/>
+          <p:nvPr/>
+        </p:nvSpPr>
+        <p:spPr>
+          <a:xfrm>
+            <a:off x="400050" y="781050"/>
+            <a:ext cx="57150" cy="5543550"/>
           </a:xfrm>
           <a:prstGeom prst="rect">
             <a:avLst/>
@@ -7687,13 +7860,13 @@
       </p:sp>
       <p:sp>
         <p:nvSpPr>
-          <p:cNvPr id="7" name="Text 5"/>
-          <p:cNvSpPr/>
-          <p:nvPr/>
-        </p:nvSpPr>
-        <p:spPr>
-          <a:xfrm>
-            <a:off x="571500" y="1333500"/>
+          <p:cNvPr id="8" name="Text 5"/>
+          <p:cNvSpPr/>
+          <p:nvPr/>
+        </p:nvSpPr>
+        <p:spPr>
+          <a:xfrm>
+            <a:off x="571500" y="933450"/>
             <a:ext cx="2371725" cy="171450"/>
           </a:xfrm>
           <a:prstGeom prst="rect">
@@ -7726,14 +7899,14 @@
       </p:sp>
       <p:sp>
         <p:nvSpPr>
-          <p:cNvPr id="8" name="Text 6"/>
-          <p:cNvSpPr/>
-          <p:nvPr/>
-        </p:nvSpPr>
-        <p:spPr>
-          <a:xfrm>
-            <a:off x="571500" y="1600200"/>
-            <a:ext cx="2371725" cy="4572000"/>
+          <p:cNvPr id="9" name="Text 6"/>
+          <p:cNvSpPr/>
+          <p:nvPr/>
+        </p:nvSpPr>
+        <p:spPr>
+          <a:xfrm>
+            <a:off x="571500" y="1200150"/>
+            <a:ext cx="2371725" cy="4972050"/>
           </a:xfrm>
           <a:prstGeom prst="rect">
             <a:avLst/>
@@ -7765,13 +7938,13 @@
       </p:sp>
       <p:sp>
         <p:nvSpPr>
-          <p:cNvPr id="9" name="Shape 7"/>
-          <p:cNvSpPr/>
-          <p:nvPr/>
-        </p:nvSpPr>
-        <p:spPr>
-          <a:xfrm>
-            <a:off x="3114675" y="3743325"/>
+          <p:cNvPr id="10" name="Shape 7"/>
+          <p:cNvSpPr/>
+          <p:nvPr/>
+        </p:nvSpPr>
+        <p:spPr>
+          <a:xfrm>
+            <a:off x="3114675" y="3543300"/>
             <a:ext cx="171450" cy="19050"/>
           </a:xfrm>
           <a:prstGeom prst="rect">
@@ -7790,14 +7963,14 @@
       </p:sp>
       <p:sp>
         <p:nvSpPr>
-          <p:cNvPr id="10" name="Shape 8"/>
-          <p:cNvSpPr/>
-          <p:nvPr/>
-        </p:nvSpPr>
-        <p:spPr>
-          <a:xfrm>
-            <a:off x="3286125" y="1181100"/>
-            <a:ext cx="2714625" cy="5143500"/>
+          <p:cNvPr id="11" name="Shape 8"/>
+          <p:cNvSpPr/>
+          <p:nvPr/>
+        </p:nvSpPr>
+        <p:spPr>
+          <a:xfrm>
+            <a:off x="3286125" y="781050"/>
+            <a:ext cx="2714625" cy="5543550"/>
           </a:xfrm>
           <a:prstGeom prst="roundRect">
             <a:avLst>
@@ -7817,14 +7990,14 @@
       </p:sp>
       <p:sp>
         <p:nvSpPr>
-          <p:cNvPr id="11" name="Shape 9"/>
-          <p:cNvSpPr/>
-          <p:nvPr/>
-        </p:nvSpPr>
-        <p:spPr>
-          <a:xfrm>
-            <a:off x="3286125" y="1181100"/>
-            <a:ext cx="57150" cy="5143500"/>
+          <p:cNvPr id="12" name="Shape 9"/>
+          <p:cNvSpPr/>
+          <p:nvPr/>
+        </p:nvSpPr>
+        <p:spPr>
+          <a:xfrm>
+            <a:off x="3286125" y="781050"/>
+            <a:ext cx="57150" cy="5543550"/>
           </a:xfrm>
           <a:prstGeom prst="rect">
             <a:avLst/>
@@ -7842,13 +8015,13 @@
       </p:sp>
       <p:sp>
         <p:nvSpPr>
-          <p:cNvPr id="12" name="Text 10"/>
-          <p:cNvSpPr/>
-          <p:nvPr/>
-        </p:nvSpPr>
-        <p:spPr>
-          <a:xfrm>
-            <a:off x="3457575" y="1333500"/>
+          <p:cNvPr id="13" name="Text 10"/>
+          <p:cNvSpPr/>
+          <p:nvPr/>
+        </p:nvSpPr>
+        <p:spPr>
+          <a:xfrm>
+            <a:off x="3457575" y="933450"/>
             <a:ext cx="2371725" cy="171450"/>
           </a:xfrm>
           <a:prstGeom prst="rect">
@@ -7881,14 +8054,14 @@
       </p:sp>
       <p:sp>
         <p:nvSpPr>
-          <p:cNvPr id="13" name="Text 11"/>
-          <p:cNvSpPr/>
-          <p:nvPr/>
-        </p:nvSpPr>
-        <p:spPr>
-          <a:xfrm>
-            <a:off x="3457575" y="1600200"/>
-            <a:ext cx="2371725" cy="4572000"/>
+          <p:cNvPr id="14" name="Text 11"/>
+          <p:cNvSpPr/>
+          <p:nvPr/>
+        </p:nvSpPr>
+        <p:spPr>
+          <a:xfrm>
+            <a:off x="3457575" y="1200150"/>
+            <a:ext cx="2371725" cy="4972050"/>
           </a:xfrm>
           <a:prstGeom prst="rect">
             <a:avLst/>
@@ -7920,13 +8093,13 @@
       </p:sp>
       <p:sp>
         <p:nvSpPr>
-          <p:cNvPr id="14" name="Shape 12"/>
-          <p:cNvSpPr/>
-          <p:nvPr/>
-        </p:nvSpPr>
-        <p:spPr>
-          <a:xfrm>
-            <a:off x="6000750" y="3743325"/>
+          <p:cNvPr id="15" name="Shape 12"/>
+          <p:cNvSpPr/>
+          <p:nvPr/>
+        </p:nvSpPr>
+        <p:spPr>
+          <a:xfrm>
+            <a:off x="6000750" y="3543300"/>
             <a:ext cx="171450" cy="19050"/>
           </a:xfrm>
           <a:prstGeom prst="rect">
@@ -7945,14 +8118,14 @@
       </p:sp>
       <p:sp>
         <p:nvSpPr>
-          <p:cNvPr id="15" name="Shape 13"/>
-          <p:cNvSpPr/>
-          <p:nvPr/>
-        </p:nvSpPr>
-        <p:spPr>
-          <a:xfrm>
-            <a:off x="6172200" y="1181100"/>
-            <a:ext cx="2714625" cy="5143500"/>
+          <p:cNvPr id="16" name="Shape 13"/>
+          <p:cNvSpPr/>
+          <p:nvPr/>
+        </p:nvSpPr>
+        <p:spPr>
+          <a:xfrm>
+            <a:off x="6172200" y="781050"/>
+            <a:ext cx="2714625" cy="5543550"/>
           </a:xfrm>
           <a:prstGeom prst="roundRect">
             <a:avLst>
@@ -7972,14 +8145,14 @@
       </p:sp>
       <p:sp>
         <p:nvSpPr>
-          <p:cNvPr id="16" name="Shape 14"/>
-          <p:cNvSpPr/>
-          <p:nvPr/>
-        </p:nvSpPr>
-        <p:spPr>
-          <a:xfrm>
-            <a:off x="6172200" y="1181100"/>
-            <a:ext cx="57150" cy="5143500"/>
+          <p:cNvPr id="17" name="Shape 14"/>
+          <p:cNvSpPr/>
+          <p:nvPr/>
+        </p:nvSpPr>
+        <p:spPr>
+          <a:xfrm>
+            <a:off x="6172200" y="781050"/>
+            <a:ext cx="57150" cy="5543550"/>
           </a:xfrm>
           <a:prstGeom prst="rect">
             <a:avLst/>
@@ -7997,13 +8170,13 @@
       </p:sp>
       <p:sp>
         <p:nvSpPr>
-          <p:cNvPr id="17" name="Text 15"/>
-          <p:cNvSpPr/>
-          <p:nvPr/>
-        </p:nvSpPr>
-        <p:spPr>
-          <a:xfrm>
-            <a:off x="6343650" y="1333500"/>
+          <p:cNvPr id="18" name="Text 15"/>
+          <p:cNvSpPr/>
+          <p:nvPr/>
+        </p:nvSpPr>
+        <p:spPr>
+          <a:xfrm>
+            <a:off x="6343650" y="933450"/>
             <a:ext cx="2371725" cy="171450"/>
           </a:xfrm>
           <a:prstGeom prst="rect">
@@ -8036,14 +8209,14 @@
       </p:sp>
       <p:sp>
         <p:nvSpPr>
-          <p:cNvPr id="18" name="Text 16"/>
-          <p:cNvSpPr/>
-          <p:nvPr/>
-        </p:nvSpPr>
-        <p:spPr>
-          <a:xfrm>
-            <a:off x="6343650" y="1600200"/>
-            <a:ext cx="2371725" cy="4572000"/>
+          <p:cNvPr id="19" name="Text 16"/>
+          <p:cNvSpPr/>
+          <p:nvPr/>
+        </p:nvSpPr>
+        <p:spPr>
+          <a:xfrm>
+            <a:off x="6343650" y="1200150"/>
+            <a:ext cx="2371725" cy="4972050"/>
           </a:xfrm>
           <a:prstGeom prst="rect">
             <a:avLst/>
@@ -8075,13 +8248,13 @@
       </p:sp>
       <p:sp>
         <p:nvSpPr>
-          <p:cNvPr id="19" name="Shape 17"/>
-          <p:cNvSpPr/>
-          <p:nvPr/>
-        </p:nvSpPr>
-        <p:spPr>
-          <a:xfrm>
-            <a:off x="8886825" y="3743325"/>
+          <p:cNvPr id="20" name="Shape 17"/>
+          <p:cNvSpPr/>
+          <p:nvPr/>
+        </p:nvSpPr>
+        <p:spPr>
+          <a:xfrm>
+            <a:off x="8886825" y="3543300"/>
             <a:ext cx="171450" cy="19050"/>
           </a:xfrm>
           <a:prstGeom prst="rect">
@@ -8100,14 +8273,14 @@
       </p:sp>
       <p:sp>
         <p:nvSpPr>
-          <p:cNvPr id="20" name="Shape 18"/>
-          <p:cNvSpPr/>
-          <p:nvPr/>
-        </p:nvSpPr>
-        <p:spPr>
-          <a:xfrm>
-            <a:off x="9058275" y="1181100"/>
-            <a:ext cx="2714625" cy="5143500"/>
+          <p:cNvPr id="21" name="Shape 18"/>
+          <p:cNvSpPr/>
+          <p:nvPr/>
+        </p:nvSpPr>
+        <p:spPr>
+          <a:xfrm>
+            <a:off x="9058275" y="781050"/>
+            <a:ext cx="2714625" cy="5543550"/>
           </a:xfrm>
           <a:prstGeom prst="roundRect">
             <a:avLst>
@@ -8127,14 +8300,14 @@
       </p:sp>
       <p:sp>
         <p:nvSpPr>
-          <p:cNvPr id="21" name="Shape 19"/>
-          <p:cNvSpPr/>
-          <p:nvPr/>
-        </p:nvSpPr>
-        <p:spPr>
-          <a:xfrm>
-            <a:off x="9058275" y="1181100"/>
-            <a:ext cx="57150" cy="5143500"/>
+          <p:cNvPr id="22" name="Shape 19"/>
+          <p:cNvSpPr/>
+          <p:nvPr/>
+        </p:nvSpPr>
+        <p:spPr>
+          <a:xfrm>
+            <a:off x="9058275" y="781050"/>
+            <a:ext cx="57150" cy="5543550"/>
           </a:xfrm>
           <a:prstGeom prst="rect">
             <a:avLst/>
@@ -8152,13 +8325,13 @@
       </p:sp>
       <p:sp>
         <p:nvSpPr>
-          <p:cNvPr id="22" name="Text 20"/>
-          <p:cNvSpPr/>
-          <p:nvPr/>
-        </p:nvSpPr>
-        <p:spPr>
-          <a:xfrm>
-            <a:off x="9229725" y="1333500"/>
+          <p:cNvPr id="23" name="Text 20"/>
+          <p:cNvSpPr/>
+          <p:nvPr/>
+        </p:nvSpPr>
+        <p:spPr>
+          <a:xfrm>
+            <a:off x="9229725" y="933450"/>
             <a:ext cx="2371725" cy="171450"/>
           </a:xfrm>
           <a:prstGeom prst="rect">
@@ -8191,14 +8364,14 @@
       </p:sp>
       <p:sp>
         <p:nvSpPr>
-          <p:cNvPr id="23" name="Text 21"/>
-          <p:cNvSpPr/>
-          <p:nvPr/>
-        </p:nvSpPr>
-        <p:spPr>
-          <a:xfrm>
-            <a:off x="9229725" y="1600200"/>
-            <a:ext cx="2371725" cy="4572000"/>
+          <p:cNvPr id="24" name="Text 21"/>
+          <p:cNvSpPr/>
+          <p:nvPr/>
+        </p:nvSpPr>
+        <p:spPr>
+          <a:xfrm>
+            <a:off x="9229725" y="1200150"/>
+            <a:ext cx="2371725" cy="4972050"/>
           </a:xfrm>
           <a:prstGeom prst="rect">
             <a:avLst/>
@@ -8260,16 +8433,46 @@
           <a:chExt cx="0" cy="0"/>
         </a:xfrm>
       </p:grpSpPr>
-      <p:sp>
-        <p:nvSpPr>
-          <p:cNvPr id="2" name="Text 0"/>
-          <p:cNvSpPr/>
-          <p:nvPr/>
-        </p:nvSpPr>
-        <p:spPr>
-          <a:xfrm>
-            <a:off x="400050" y="304800"/>
-            <a:ext cx="11049000" cy="533400"/>
+      <p:pic>
+        <p:nvPicPr>
+          <p:cNvPr id="2" name="Image 0" descr="/Users/dpadmana/projects/ppt-gen/themes/scientific/logo.svg">    </p:cNvPr>
+          <p:cNvPicPr>
+            <a:picLocks noChangeAspect="1"/>
+          </p:cNvPicPr>
+          <p:nvPr/>
+        </p:nvPicPr>
+        <p:blipFill>
+          <a:blip r:embed="rId1">
+            <a:extLst>
+              <a:ext uri="{96DAC541-7B7A-43D3-8B79-37D633B846F1}">
+                <asvg:svgBlip xmlns:asvg="http://schemas.microsoft.com/office/drawing/2016/SVG/main" r:embed="rId2"/>
+              </a:ext>
+            </a:extLst>
+          </a:blip>
+          <a:stretch>
+            <a:fillRect/>
+          </a:stretch>
+        </p:blipFill>
+        <p:spPr>
+          <a:xfrm>
+            <a:off x="11430000" y="266700"/>
+            <a:ext cx="419100" cy="419100"/>
+          </a:xfrm>
+          <a:prstGeom prst="rect">
+            <a:avLst/>
+          </a:prstGeom>
+        </p:spPr>
+      </p:pic>
+      <p:sp>
+        <p:nvSpPr>
+          <p:cNvPr id="3" name="Text 0"/>
+          <p:cNvSpPr/>
+          <p:nvPr/>
+        </p:nvSpPr>
+        <p:spPr>
+          <a:xfrm>
+            <a:off x="400050" y="247650"/>
+            <a:ext cx="10839450" cy="381000"/>
           </a:xfrm>
           <a:prstGeom prst="rect">
             <a:avLst/>
@@ -8285,7 +8488,7 @@
               <a:buNone/>
             </a:pPr>
             <a:r>
-              <a:rPr lang="en-US" sz="3200" b="1" dirty="0">
+              <a:rPr lang="en-US" sz="3000" b="1" dirty="0">
                 <a:solidFill>
                   <a:srgbClr val="EAEAEA"/>
                 </a:solidFill>
@@ -8295,20 +8498,20 @@
               </a:rPr>
               <a:t>Failure modes to monitor</a:t>
             </a:r>
-            <a:endParaRPr lang="en-US" sz="3200" dirty="0"/>
-          </a:p>
-        </p:txBody>
-      </p:sp>
-      <p:sp>
-        <p:nvSpPr>
-          <p:cNvPr id="3" name="Text 1"/>
+            <a:endParaRPr lang="en-US" sz="3000" dirty="0"/>
+          </a:p>
+        </p:txBody>
+      </p:sp>
+      <p:sp>
+        <p:nvSpPr>
+          <p:cNvPr id="4" name="Text 1"/>
           <p:cNvSpPr/>
           <p:nvPr/>
         </p:nvSpPr>
         <p:spPr>
           <a:xfrm>
             <a:off x="400050" y="6457950"/>
-            <a:ext cx="8572500" cy="171450"/>
+            <a:ext cx="4953000" cy="171450"/>
           </a:xfrm>
           <a:prstGeom prst="rect">
             <a:avLst/>
@@ -8340,7 +8543,7 @@
       </p:sp>
       <p:sp>
         <p:nvSpPr>
-          <p:cNvPr id="4" name="Text 2"/>
+          <p:cNvPr id="5" name="Text 2"/>
           <p:cNvSpPr/>
           <p:nvPr/>
         </p:nvSpPr>
@@ -8379,18 +8582,18 @@
       </p:sp>
       <p:sp>
         <p:nvSpPr>
-          <p:cNvPr id="5" name="Shape 3"/>
-          <p:cNvSpPr/>
-          <p:nvPr/>
-        </p:nvSpPr>
-        <p:spPr>
-          <a:xfrm>
-            <a:off x="400050" y="1181100"/>
-            <a:ext cx="11391900" cy="1209675"/>
+          <p:cNvPr id="6" name="Shape 3"/>
+          <p:cNvSpPr/>
+          <p:nvPr/>
+        </p:nvSpPr>
+        <p:spPr>
+          <a:xfrm>
+            <a:off x="400050" y="781050"/>
+            <a:ext cx="11391900" cy="1314450"/>
           </a:xfrm>
           <a:prstGeom prst="roundRect">
             <a:avLst>
-              <a:gd name="adj" fmla="val 7559"/>
+              <a:gd name="adj" fmla="val 6957"/>
             </a:avLst>
           </a:prstGeom>
           <a:solidFill>
@@ -8406,14 +8609,14 @@
       </p:sp>
       <p:sp>
         <p:nvSpPr>
-          <p:cNvPr id="6" name="Shape 4"/>
-          <p:cNvSpPr/>
-          <p:nvPr/>
-        </p:nvSpPr>
-        <p:spPr>
-          <a:xfrm>
-            <a:off x="400050" y="1181100"/>
-            <a:ext cx="114300" cy="1209675"/>
+          <p:cNvPr id="7" name="Shape 4"/>
+          <p:cNvSpPr/>
+          <p:nvPr/>
+        </p:nvSpPr>
+        <p:spPr>
+          <a:xfrm>
+            <a:off x="400050" y="781050"/>
+            <a:ext cx="114300" cy="1314450"/>
           </a:xfrm>
           <a:prstGeom prst="rect">
             <a:avLst/>
@@ -8431,13 +8634,13 @@
       </p:sp>
       <p:sp>
         <p:nvSpPr>
-          <p:cNvPr id="7" name="Text 5"/>
-          <p:cNvSpPr/>
-          <p:nvPr/>
-        </p:nvSpPr>
-        <p:spPr>
-          <a:xfrm>
-            <a:off x="704850" y="1295400"/>
+          <p:cNvPr id="8" name="Text 5"/>
+          <p:cNvSpPr/>
+          <p:nvPr/>
+        </p:nvSpPr>
+        <p:spPr>
+          <a:xfrm>
+            <a:off x="704850" y="895350"/>
             <a:ext cx="5126355" cy="266700"/>
           </a:xfrm>
           <a:prstGeom prst="rect">
@@ -8470,13 +8673,13 @@
       </p:sp>
       <p:sp>
         <p:nvSpPr>
-          <p:cNvPr id="8" name="Text 6"/>
-          <p:cNvSpPr/>
-          <p:nvPr/>
-        </p:nvSpPr>
-        <p:spPr>
-          <a:xfrm>
-            <a:off x="5184648" y="1304925"/>
+          <p:cNvPr id="9" name="Text 6"/>
+          <p:cNvSpPr/>
+          <p:nvPr/>
+        </p:nvSpPr>
+        <p:spPr>
+          <a:xfrm>
+            <a:off x="5184648" y="904875"/>
             <a:ext cx="5923788" cy="266700"/>
           </a:xfrm>
           <a:prstGeom prst="rect">
@@ -8509,18 +8712,18 @@
       </p:sp>
       <p:sp>
         <p:nvSpPr>
-          <p:cNvPr id="9" name="Shape 7"/>
-          <p:cNvSpPr/>
-          <p:nvPr/>
-        </p:nvSpPr>
-        <p:spPr>
-          <a:xfrm>
-            <a:off x="400050" y="2486025"/>
-            <a:ext cx="11391900" cy="1209675"/>
+          <p:cNvPr id="10" name="Shape 7"/>
+          <p:cNvSpPr/>
+          <p:nvPr/>
+        </p:nvSpPr>
+        <p:spPr>
+          <a:xfrm>
+            <a:off x="400050" y="2190750"/>
+            <a:ext cx="11391900" cy="1314450"/>
           </a:xfrm>
           <a:prstGeom prst="roundRect">
             <a:avLst>
-              <a:gd name="adj" fmla="val 7559"/>
+              <a:gd name="adj" fmla="val 6957"/>
             </a:avLst>
           </a:prstGeom>
           <a:solidFill>
@@ -8536,14 +8739,14 @@
       </p:sp>
       <p:sp>
         <p:nvSpPr>
-          <p:cNvPr id="10" name="Shape 8"/>
-          <p:cNvSpPr/>
-          <p:nvPr/>
-        </p:nvSpPr>
-        <p:spPr>
-          <a:xfrm>
-            <a:off x="400050" y="2486025"/>
-            <a:ext cx="114300" cy="1209675"/>
+          <p:cNvPr id="11" name="Shape 8"/>
+          <p:cNvSpPr/>
+          <p:nvPr/>
+        </p:nvSpPr>
+        <p:spPr>
+          <a:xfrm>
+            <a:off x="400050" y="2190750"/>
+            <a:ext cx="114300" cy="1314450"/>
           </a:xfrm>
           <a:prstGeom prst="rect">
             <a:avLst/>
@@ -8561,13 +8764,13 @@
       </p:sp>
       <p:sp>
         <p:nvSpPr>
-          <p:cNvPr id="11" name="Text 9"/>
-          <p:cNvSpPr/>
-          <p:nvPr/>
-        </p:nvSpPr>
-        <p:spPr>
-          <a:xfrm>
-            <a:off x="704850" y="2600325"/>
+          <p:cNvPr id="12" name="Text 9"/>
+          <p:cNvSpPr/>
+          <p:nvPr/>
+        </p:nvSpPr>
+        <p:spPr>
+          <a:xfrm>
+            <a:off x="704850" y="2305050"/>
             <a:ext cx="5126355" cy="266700"/>
           </a:xfrm>
           <a:prstGeom prst="rect">
@@ -8600,13 +8803,13 @@
       </p:sp>
       <p:sp>
         <p:nvSpPr>
-          <p:cNvPr id="12" name="Text 10"/>
-          <p:cNvSpPr/>
-          <p:nvPr/>
-        </p:nvSpPr>
-        <p:spPr>
-          <a:xfrm>
-            <a:off x="5184648" y="2609850"/>
+          <p:cNvPr id="13" name="Text 10"/>
+          <p:cNvSpPr/>
+          <p:nvPr/>
+        </p:nvSpPr>
+        <p:spPr>
+          <a:xfrm>
+            <a:off x="5184648" y="2314575"/>
             <a:ext cx="5923788" cy="266700"/>
           </a:xfrm>
           <a:prstGeom prst="rect">
@@ -8639,18 +8842,18 @@
       </p:sp>
       <p:sp>
         <p:nvSpPr>
-          <p:cNvPr id="13" name="Shape 11"/>
-          <p:cNvSpPr/>
-          <p:nvPr/>
-        </p:nvSpPr>
-        <p:spPr>
-          <a:xfrm>
-            <a:off x="400050" y="3790950"/>
-            <a:ext cx="11391900" cy="1209675"/>
+          <p:cNvPr id="14" name="Shape 11"/>
+          <p:cNvSpPr/>
+          <p:nvPr/>
+        </p:nvSpPr>
+        <p:spPr>
+          <a:xfrm>
+            <a:off x="400050" y="3600450"/>
+            <a:ext cx="11391900" cy="1314450"/>
           </a:xfrm>
           <a:prstGeom prst="roundRect">
             <a:avLst>
-              <a:gd name="adj" fmla="val 7559"/>
+              <a:gd name="adj" fmla="val 6957"/>
             </a:avLst>
           </a:prstGeom>
           <a:solidFill>
@@ -8666,14 +8869,14 @@
       </p:sp>
       <p:sp>
         <p:nvSpPr>
-          <p:cNvPr id="14" name="Shape 12"/>
-          <p:cNvSpPr/>
-          <p:nvPr/>
-        </p:nvSpPr>
-        <p:spPr>
-          <a:xfrm>
-            <a:off x="400050" y="3790950"/>
-            <a:ext cx="114300" cy="1209675"/>
+          <p:cNvPr id="15" name="Shape 12"/>
+          <p:cNvSpPr/>
+          <p:nvPr/>
+        </p:nvSpPr>
+        <p:spPr>
+          <a:xfrm>
+            <a:off x="400050" y="3600450"/>
+            <a:ext cx="114300" cy="1314450"/>
           </a:xfrm>
           <a:prstGeom prst="rect">
             <a:avLst/>
@@ -8691,13 +8894,13 @@
       </p:sp>
       <p:sp>
         <p:nvSpPr>
-          <p:cNvPr id="15" name="Text 13"/>
-          <p:cNvSpPr/>
-          <p:nvPr/>
-        </p:nvSpPr>
-        <p:spPr>
-          <a:xfrm>
-            <a:off x="704850" y="3905250"/>
+          <p:cNvPr id="16" name="Text 13"/>
+          <p:cNvSpPr/>
+          <p:nvPr/>
+        </p:nvSpPr>
+        <p:spPr>
+          <a:xfrm>
+            <a:off x="704850" y="3714750"/>
             <a:ext cx="5126355" cy="266700"/>
           </a:xfrm>
           <a:prstGeom prst="rect">
@@ -8730,13 +8933,13 @@
       </p:sp>
       <p:sp>
         <p:nvSpPr>
-          <p:cNvPr id="16" name="Text 14"/>
-          <p:cNvSpPr/>
-          <p:nvPr/>
-        </p:nvSpPr>
-        <p:spPr>
-          <a:xfrm>
-            <a:off x="5184648" y="3914775"/>
+          <p:cNvPr id="17" name="Text 14"/>
+          <p:cNvSpPr/>
+          <p:nvPr/>
+        </p:nvSpPr>
+        <p:spPr>
+          <a:xfrm>
+            <a:off x="5184648" y="3724275"/>
             <a:ext cx="5923788" cy="266700"/>
           </a:xfrm>
           <a:prstGeom prst="rect">
@@ -8769,18 +8972,18 @@
       </p:sp>
       <p:sp>
         <p:nvSpPr>
-          <p:cNvPr id="17" name="Shape 15"/>
-          <p:cNvSpPr/>
-          <p:nvPr/>
-        </p:nvSpPr>
-        <p:spPr>
-          <a:xfrm>
-            <a:off x="400050" y="5095875"/>
-            <a:ext cx="11391900" cy="1209675"/>
+          <p:cNvPr id="18" name="Shape 15"/>
+          <p:cNvSpPr/>
+          <p:nvPr/>
+        </p:nvSpPr>
+        <p:spPr>
+          <a:xfrm>
+            <a:off x="400050" y="5010150"/>
+            <a:ext cx="11391900" cy="1314450"/>
           </a:xfrm>
           <a:prstGeom prst="roundRect">
             <a:avLst>
-              <a:gd name="adj" fmla="val 7559"/>
+              <a:gd name="adj" fmla="val 6957"/>
             </a:avLst>
           </a:prstGeom>
           <a:solidFill>
@@ -8796,14 +8999,14 @@
       </p:sp>
       <p:sp>
         <p:nvSpPr>
-          <p:cNvPr id="18" name="Shape 16"/>
-          <p:cNvSpPr/>
-          <p:nvPr/>
-        </p:nvSpPr>
-        <p:spPr>
-          <a:xfrm>
-            <a:off x="400050" y="5095875"/>
-            <a:ext cx="114300" cy="1209675"/>
+          <p:cNvPr id="19" name="Shape 16"/>
+          <p:cNvSpPr/>
+          <p:nvPr/>
+        </p:nvSpPr>
+        <p:spPr>
+          <a:xfrm>
+            <a:off x="400050" y="5010150"/>
+            <a:ext cx="114300" cy="1314450"/>
           </a:xfrm>
           <a:prstGeom prst="rect">
             <a:avLst/>
@@ -8821,13 +9024,13 @@
       </p:sp>
       <p:sp>
         <p:nvSpPr>
-          <p:cNvPr id="19" name="Text 17"/>
-          <p:cNvSpPr/>
-          <p:nvPr/>
-        </p:nvSpPr>
-        <p:spPr>
-          <a:xfrm>
-            <a:off x="704850" y="5210175"/>
+          <p:cNvPr id="20" name="Text 17"/>
+          <p:cNvSpPr/>
+          <p:nvPr/>
+        </p:nvSpPr>
+        <p:spPr>
+          <a:xfrm>
+            <a:off x="704850" y="5124450"/>
             <a:ext cx="5126355" cy="266700"/>
           </a:xfrm>
           <a:prstGeom prst="rect">
@@ -8860,13 +9063,13 @@
       </p:sp>
       <p:sp>
         <p:nvSpPr>
-          <p:cNvPr id="20" name="Text 18"/>
-          <p:cNvSpPr/>
-          <p:nvPr/>
-        </p:nvSpPr>
-        <p:spPr>
-          <a:xfrm>
-            <a:off x="5184648" y="5219700"/>
+          <p:cNvPr id="21" name="Text 18"/>
+          <p:cNvSpPr/>
+          <p:nvPr/>
+        </p:nvSpPr>
+        <p:spPr>
+          <a:xfrm>
+            <a:off x="5184648" y="5133975"/>
             <a:ext cx="5923788" cy="266700"/>
           </a:xfrm>
           <a:prstGeom prst="rect">

--- a/examples/moe-llms.pptx
+++ b/examples/moe-llms.pptx
@@ -1932,7 +1932,7 @@
         <p:spPr>
           <a:xfrm>
             <a:off x="400050" y="838200"/>
-            <a:ext cx="7239000" cy="914400"/>
+            <a:ext cx="7239000" cy="933450"/>
           </a:xfrm>
           <a:prstGeom prst="rect">
             <a:avLst/>
@@ -1993,8 +1993,8 @@
         </p:nvSpPr>
         <p:spPr>
           <a:xfrm>
-            <a:off x="400050" y="1924050"/>
-            <a:ext cx="6858000" cy="609600"/>
+            <a:off x="400050" y="2038350"/>
+            <a:ext cx="6858000" cy="457200"/>
           </a:xfrm>
           <a:prstGeom prst="rect">
             <a:avLst/>
@@ -2032,7 +2032,7 @@
         </p:nvSpPr>
         <p:spPr>
           <a:xfrm>
-            <a:off x="400050" y="2609850"/>
+            <a:off x="400050" y="2686050"/>
             <a:ext cx="1238250" cy="285750"/>
           </a:xfrm>
           <a:prstGeom prst="roundRect">
@@ -2059,7 +2059,7 @@
         </p:nvSpPr>
         <p:spPr>
           <a:xfrm>
-            <a:off x="476250" y="2667000"/>
+            <a:off x="476250" y="2743200"/>
             <a:ext cx="1085850" cy="171450"/>
           </a:xfrm>
           <a:prstGeom prst="rect">
@@ -2098,7 +2098,7 @@
         </p:nvSpPr>
         <p:spPr>
           <a:xfrm>
-            <a:off x="400050" y="3028950"/>
+            <a:off x="400050" y="3105150"/>
             <a:ext cx="6667500" cy="342900"/>
           </a:xfrm>
           <a:prstGeom prst="rect">
@@ -2479,7 +2479,7 @@
         <p:spPr>
           <a:xfrm>
             <a:off x="400050" y="247650"/>
-            <a:ext cx="10839450" cy="381000"/>
+            <a:ext cx="10839450" cy="428625"/>
           </a:xfrm>
           <a:prstGeom prst="rect">
             <a:avLst/>
@@ -2495,7 +2495,7 @@
               <a:buNone/>
             </a:pPr>
             <a:r>
-              <a:rPr lang="en-US" sz="3000" b="1" dirty="0">
+              <a:rPr lang="en-US" sz="3200" b="1" dirty="0">
                 <a:solidFill>
                   <a:srgbClr val="EAEAEA"/>
                 </a:solidFill>
@@ -2505,7 +2505,7 @@
               </a:rPr>
               <a:t>Design space and operating points</a:t>
             </a:r>
-            <a:endParaRPr lang="en-US" sz="3000" dirty="0"/>
+            <a:endParaRPr lang="en-US" sz="3200" dirty="0"/>
           </a:p>
         </p:txBody>
       </p:sp>
@@ -2595,7 +2595,7 @@
         </p:nvSpPr>
         <p:spPr>
           <a:xfrm>
-            <a:off x="400050" y="819150"/>
+            <a:off x="400050" y="962025"/>
             <a:ext cx="6600825" cy="171450"/>
           </a:xfrm>
           <a:prstGeom prst="rect">
@@ -2634,12 +2634,12 @@
         </p:nvSpPr>
         <p:spPr>
           <a:xfrm>
-            <a:off x="1543050" y="1143000"/>
-            <a:ext cx="2538413" cy="2266950"/>
+            <a:off x="1085850" y="1266825"/>
+            <a:ext cx="2852738" cy="2290763"/>
           </a:xfrm>
           <a:prstGeom prst="roundRect">
             <a:avLst>
-              <a:gd name="adj" fmla="val 4034"/>
+              <a:gd name="adj" fmla="val 3992"/>
             </a:avLst>
           </a:prstGeom>
           <a:solidFill>
@@ -2661,12 +2661,12 @@
         </p:nvSpPr>
         <p:spPr>
           <a:xfrm>
-            <a:off x="4176712" y="1143000"/>
-            <a:ext cx="2538413" cy="2266950"/>
+            <a:off x="4033837" y="1266825"/>
+            <a:ext cx="2852738" cy="2290763"/>
           </a:xfrm>
           <a:prstGeom prst="roundRect">
             <a:avLst>
-              <a:gd name="adj" fmla="val 4034"/>
+              <a:gd name="adj" fmla="val 3992"/>
             </a:avLst>
           </a:prstGeom>
           <a:solidFill>
@@ -2688,12 +2688,12 @@
         </p:nvSpPr>
         <p:spPr>
           <a:xfrm>
-            <a:off x="1543050" y="3505200"/>
-            <a:ext cx="2538413" cy="2266950"/>
+            <a:off x="1085850" y="3652838"/>
+            <a:ext cx="2852738" cy="2290763"/>
           </a:xfrm>
           <a:prstGeom prst="roundRect">
             <a:avLst>
-              <a:gd name="adj" fmla="val 4034"/>
+              <a:gd name="adj" fmla="val 3992"/>
             </a:avLst>
           </a:prstGeom>
           <a:solidFill>
@@ -2715,12 +2715,12 @@
         </p:nvSpPr>
         <p:spPr>
           <a:xfrm>
-            <a:off x="4176712" y="3505200"/>
-            <a:ext cx="2538413" cy="2266950"/>
+            <a:off x="4033837" y="3652838"/>
+            <a:ext cx="2852738" cy="2290763"/>
           </a:xfrm>
           <a:prstGeom prst="roundRect">
             <a:avLst>
-              <a:gd name="adj" fmla="val 4034"/>
+              <a:gd name="adj" fmla="val 3992"/>
             </a:avLst>
           </a:prstGeom>
           <a:solidFill>
@@ -2742,8 +2742,8 @@
         </p:nvSpPr>
         <p:spPr>
           <a:xfrm>
-            <a:off x="400050" y="1143000"/>
-            <a:ext cx="1047750" cy="266700"/>
+            <a:off x="400050" y="1266825"/>
+            <a:ext cx="628650" cy="266700"/>
           </a:xfrm>
           <a:prstGeom prst="rect">
             <a:avLst/>
@@ -2781,8 +2781,8 @@
         </p:nvSpPr>
         <p:spPr>
           <a:xfrm>
-            <a:off x="1543050" y="5924550"/>
-            <a:ext cx="5172075" cy="266700"/>
+            <a:off x="1085850" y="6000750"/>
+            <a:ext cx="5800725" cy="228600"/>
           </a:xfrm>
           <a:prstGeom prst="rect">
             <a:avLst/>
@@ -2820,8 +2820,8 @@
         </p:nvSpPr>
         <p:spPr>
           <a:xfrm>
-            <a:off x="1695450" y="1276350"/>
-            <a:ext cx="2233613" cy="171450"/>
+            <a:off x="1238250" y="1400175"/>
+            <a:ext cx="2547938" cy="171450"/>
           </a:xfrm>
           <a:prstGeom prst="rect">
             <a:avLst/>
@@ -2859,8 +2859,8 @@
         </p:nvSpPr>
         <p:spPr>
           <a:xfrm>
-            <a:off x="4329113" y="1276350"/>
-            <a:ext cx="2233613" cy="171450"/>
+            <a:off x="4186238" y="1400175"/>
+            <a:ext cx="2547938" cy="171450"/>
           </a:xfrm>
           <a:prstGeom prst="rect">
             <a:avLst/>
@@ -2898,8 +2898,8 @@
         </p:nvSpPr>
         <p:spPr>
           <a:xfrm>
-            <a:off x="1695450" y="3638550"/>
-            <a:ext cx="2233613" cy="171450"/>
+            <a:off x="1238250" y="3786188"/>
+            <a:ext cx="2547938" cy="171450"/>
           </a:xfrm>
           <a:prstGeom prst="rect">
             <a:avLst/>
@@ -2937,8 +2937,8 @@
         </p:nvSpPr>
         <p:spPr>
           <a:xfrm>
-            <a:off x="4329113" y="3638550"/>
-            <a:ext cx="2233613" cy="171450"/>
+            <a:off x="4186238" y="3786188"/>
+            <a:ext cx="2547938" cy="171450"/>
           </a:xfrm>
           <a:prstGeom prst="rect">
             <a:avLst/>
@@ -2976,12 +2976,12 @@
         </p:nvSpPr>
         <p:spPr>
           <a:xfrm>
-            <a:off x="1695450" y="1562100"/>
-            <a:ext cx="2233613" cy="381000"/>
+            <a:off x="1200150" y="1685925"/>
+            <a:ext cx="2624138" cy="400050"/>
           </a:xfrm>
           <a:prstGeom prst="roundRect">
             <a:avLst>
-              <a:gd name="adj" fmla="val 24000"/>
+              <a:gd name="adj" fmla="val 22857"/>
             </a:avLst>
           </a:prstGeom>
           <a:solidFill>
@@ -3003,8 +3003,8 @@
         </p:nvSpPr>
         <p:spPr>
           <a:xfrm>
-            <a:off x="1809750" y="1562100"/>
-            <a:ext cx="2005013" cy="381000"/>
+            <a:off x="1295400" y="1685925"/>
+            <a:ext cx="2433638" cy="400050"/>
           </a:xfrm>
           <a:prstGeom prst="rect">
             <a:avLst/>
@@ -3020,7 +3020,7 @@
               <a:buNone/>
             </a:pPr>
             <a:r>
-              <a:rPr lang="en-US" sz="1600" b="1" dirty="0">
+              <a:rPr lang="en-US" sz="1500" b="1" dirty="0">
                 <a:solidFill>
                   <a:srgbClr val="EAEAEA"/>
                 </a:solidFill>
@@ -3030,7 +3030,7 @@
               </a:rPr>
               <a:t>Token hashing</a:t>
             </a:r>
-            <a:endParaRPr lang="en-US" sz="1600" dirty="0"/>
+            <a:endParaRPr lang="en-US" sz="1500" dirty="0"/>
           </a:p>
         </p:txBody>
       </p:sp>
@@ -3042,12 +3042,12 @@
         </p:nvSpPr>
         <p:spPr>
           <a:xfrm>
-            <a:off x="4329113" y="1562100"/>
-            <a:ext cx="2233613" cy="381000"/>
+            <a:off x="4148137" y="1685925"/>
+            <a:ext cx="2624138" cy="400050"/>
           </a:xfrm>
           <a:prstGeom prst="roundRect">
             <a:avLst>
-              <a:gd name="adj" fmla="val 24000"/>
+              <a:gd name="adj" fmla="val 22857"/>
             </a:avLst>
           </a:prstGeom>
           <a:solidFill>
@@ -3069,8 +3069,8 @@
         </p:nvSpPr>
         <p:spPr>
           <a:xfrm>
-            <a:off x="4443413" y="1562100"/>
-            <a:ext cx="2005013" cy="381000"/>
+            <a:off x="4243388" y="1685925"/>
+            <a:ext cx="2433638" cy="400050"/>
           </a:xfrm>
           <a:prstGeom prst="rect">
             <a:avLst/>
@@ -3086,7 +3086,7 @@
               <a:buNone/>
             </a:pPr>
             <a:r>
-              <a:rPr lang="en-US" sz="1600" b="1" dirty="0">
+              <a:rPr lang="en-US" sz="1500" b="1" dirty="0">
                 <a:solidFill>
                   <a:srgbClr val="EAEAEA"/>
                 </a:solidFill>
@@ -3096,7 +3096,7 @@
               </a:rPr>
               <a:t>Switch / GShard</a:t>
             </a:r>
-            <a:endParaRPr lang="en-US" sz="1600" dirty="0"/>
+            <a:endParaRPr lang="en-US" sz="1500" dirty="0"/>
           </a:p>
         </p:txBody>
       </p:sp>
@@ -3108,12 +3108,12 @@
         </p:nvSpPr>
         <p:spPr>
           <a:xfrm>
-            <a:off x="1695450" y="3924300"/>
-            <a:ext cx="2233613" cy="381000"/>
+            <a:off x="1200150" y="4071938"/>
+            <a:ext cx="2624138" cy="400050"/>
           </a:xfrm>
           <a:prstGeom prst="roundRect">
             <a:avLst>
-              <a:gd name="adj" fmla="val 24000"/>
+              <a:gd name="adj" fmla="val 22857"/>
             </a:avLst>
           </a:prstGeom>
           <a:solidFill>
@@ -3135,8 +3135,8 @@
         </p:nvSpPr>
         <p:spPr>
           <a:xfrm>
-            <a:off x="1809750" y="3924300"/>
-            <a:ext cx="2005013" cy="381000"/>
+            <a:off x="1295400" y="4071938"/>
+            <a:ext cx="2433638" cy="400050"/>
           </a:xfrm>
           <a:prstGeom prst="rect">
             <a:avLst/>
@@ -3152,7 +3152,7 @@
               <a:buNone/>
             </a:pPr>
             <a:r>
-              <a:rPr lang="en-US" sz="1600" b="1" dirty="0">
+              <a:rPr lang="en-US" sz="1500" b="1" dirty="0">
                 <a:solidFill>
                   <a:srgbClr val="EAEAEA"/>
                 </a:solidFill>
@@ -3162,7 +3162,7 @@
               </a:rPr>
               <a:t>Dense LLaMA-style</a:t>
             </a:r>
-            <a:endParaRPr lang="en-US" sz="1600" dirty="0"/>
+            <a:endParaRPr lang="en-US" sz="1500" dirty="0"/>
           </a:p>
         </p:txBody>
       </p:sp>
@@ -3174,12 +3174,12 @@
         </p:nvSpPr>
         <p:spPr>
           <a:xfrm>
-            <a:off x="4329113" y="3924300"/>
-            <a:ext cx="2233613" cy="381000"/>
+            <a:off x="4148137" y="4071938"/>
+            <a:ext cx="2624138" cy="400050"/>
           </a:xfrm>
           <a:prstGeom prst="roundRect">
             <a:avLst>
-              <a:gd name="adj" fmla="val 24000"/>
+              <a:gd name="adj" fmla="val 22857"/>
             </a:avLst>
           </a:prstGeom>
           <a:solidFill>
@@ -3201,8 +3201,8 @@
         </p:nvSpPr>
         <p:spPr>
           <a:xfrm>
-            <a:off x="4443413" y="3924300"/>
-            <a:ext cx="2005013" cy="381000"/>
+            <a:off x="4243388" y="4071938"/>
+            <a:ext cx="2433638" cy="400050"/>
           </a:xfrm>
           <a:prstGeom prst="rect">
             <a:avLst/>
@@ -3218,7 +3218,7 @@
               <a:buNone/>
             </a:pPr>
             <a:r>
-              <a:rPr lang="en-US" sz="1600" b="1" dirty="0">
+              <a:rPr lang="en-US" sz="1500" b="1" dirty="0">
                 <a:solidFill>
                   <a:srgbClr val="EAEAEA"/>
                 </a:solidFill>
@@ -3228,7 +3228,7 @@
               </a:rPr>
               <a:t>Expert Choice</a:t>
             </a:r>
-            <a:endParaRPr lang="en-US" sz="1600" dirty="0"/>
+            <a:endParaRPr lang="en-US" sz="1500" dirty="0"/>
           </a:p>
         </p:txBody>
       </p:sp>
@@ -3240,8 +3240,8 @@
         </p:nvSpPr>
         <p:spPr>
           <a:xfrm>
-            <a:off x="7153275" y="819150"/>
-            <a:ext cx="4638675" cy="171450"/>
+            <a:off x="7229475" y="962025"/>
+            <a:ext cx="4562475" cy="171450"/>
           </a:xfrm>
           <a:prstGeom prst="rect">
             <a:avLst/>
@@ -3279,12 +3279,12 @@
         </p:nvSpPr>
         <p:spPr>
           <a:xfrm>
-            <a:off x="7153275" y="1143000"/>
-            <a:ext cx="2200275" cy="2343150"/>
+            <a:off x="7229475" y="1228725"/>
+            <a:ext cx="2209800" cy="1647825"/>
           </a:xfrm>
           <a:prstGeom prst="roundRect">
             <a:avLst>
-              <a:gd name="adj" fmla="val 4156"/>
+              <a:gd name="adj" fmla="val 5549"/>
             </a:avLst>
           </a:prstGeom>
           <a:solidFill>
@@ -3306,8 +3306,8 @@
         </p:nvSpPr>
         <p:spPr>
           <a:xfrm>
-            <a:off x="7153275" y="1143000"/>
-            <a:ext cx="2200275" cy="76200"/>
+            <a:off x="7229475" y="1228725"/>
+            <a:ext cx="2209800" cy="76200"/>
           </a:xfrm>
           <a:prstGeom prst="rect">
             <a:avLst/>
@@ -3331,8 +3331,8 @@
         </p:nvSpPr>
         <p:spPr>
           <a:xfrm>
-            <a:off x="7343775" y="1390650"/>
-            <a:ext cx="1819275" cy="171450"/>
+            <a:off x="7400925" y="1438275"/>
+            <a:ext cx="1866900" cy="171450"/>
           </a:xfrm>
           <a:prstGeom prst="rect">
             <a:avLst/>
@@ -3370,8 +3370,8 @@
         </p:nvSpPr>
         <p:spPr>
           <a:xfrm>
-            <a:off x="7343775" y="1790700"/>
-            <a:ext cx="1819275" cy="1009650"/>
+            <a:off x="7400925" y="1762125"/>
+            <a:ext cx="1866900" cy="542925"/>
           </a:xfrm>
           <a:prstGeom prst="rect">
             <a:avLst/>
@@ -3409,8 +3409,8 @@
         </p:nvSpPr>
         <p:spPr>
           <a:xfrm>
-            <a:off x="7343775" y="2933700"/>
-            <a:ext cx="1819275" cy="381000"/>
+            <a:off x="7400925" y="2400300"/>
+            <a:ext cx="1866900" cy="342900"/>
           </a:xfrm>
           <a:prstGeom prst="rect">
             <a:avLst/>
@@ -3426,7 +3426,7 @@
               <a:buNone/>
             </a:pPr>
             <a:r>
-              <a:rPr lang="en-US" sz="1300" dirty="0">
+              <a:rPr lang="en-US" sz="1200" dirty="0">
                 <a:solidFill>
                   <a:srgbClr val="6C6C8A"/>
                 </a:solidFill>
@@ -3436,7 +3436,7 @@
               </a:rPr>
               <a:t>Per MoE layer</a:t>
             </a:r>
-            <a:endParaRPr lang="en-US" sz="1300" dirty="0"/>
+            <a:endParaRPr lang="en-US" sz="1200" dirty="0"/>
           </a:p>
         </p:txBody>
       </p:sp>
@@ -3448,12 +3448,12 @@
         </p:nvSpPr>
         <p:spPr>
           <a:xfrm>
-            <a:off x="9582150" y="1143000"/>
-            <a:ext cx="2200275" cy="2343150"/>
+            <a:off x="9572625" y="1228725"/>
+            <a:ext cx="2209800" cy="1647825"/>
           </a:xfrm>
           <a:prstGeom prst="roundRect">
             <a:avLst>
-              <a:gd name="adj" fmla="val 4156"/>
+              <a:gd name="adj" fmla="val 5549"/>
             </a:avLst>
           </a:prstGeom>
           <a:solidFill>
@@ -3475,8 +3475,8 @@
         </p:nvSpPr>
         <p:spPr>
           <a:xfrm>
-            <a:off x="9582150" y="1143000"/>
-            <a:ext cx="2200275" cy="76200"/>
+            <a:off x="9572625" y="1228725"/>
+            <a:ext cx="2209800" cy="76200"/>
           </a:xfrm>
           <a:prstGeom prst="rect">
             <a:avLst/>
@@ -3500,8 +3500,8 @@
         </p:nvSpPr>
         <p:spPr>
           <a:xfrm>
-            <a:off x="9772650" y="1390650"/>
-            <a:ext cx="1819275" cy="171450"/>
+            <a:off x="9744075" y="1438275"/>
+            <a:ext cx="1866900" cy="171450"/>
           </a:xfrm>
           <a:prstGeom prst="rect">
             <a:avLst/>
@@ -3539,8 +3539,8 @@
         </p:nvSpPr>
         <p:spPr>
           <a:xfrm>
-            <a:off x="9772650" y="1790700"/>
-            <a:ext cx="1819275" cy="1009650"/>
+            <a:off x="9744075" y="1762125"/>
+            <a:ext cx="1866900" cy="542925"/>
           </a:xfrm>
           <a:prstGeom prst="rect">
             <a:avLst/>
@@ -3578,8 +3578,8 @@
         </p:nvSpPr>
         <p:spPr>
           <a:xfrm>
-            <a:off x="9772650" y="2933700"/>
-            <a:ext cx="1819275" cy="381000"/>
+            <a:off x="9744075" y="2400300"/>
+            <a:ext cx="1866900" cy="342900"/>
           </a:xfrm>
           <a:prstGeom prst="rect">
             <a:avLst/>
@@ -3595,7 +3595,7 @@
               <a:buNone/>
             </a:pPr>
             <a:r>
-              <a:rPr lang="en-US" sz="1300" dirty="0">
+              <a:rPr lang="en-US" sz="1200" dirty="0">
                 <a:solidFill>
                   <a:srgbClr val="6C6C8A"/>
                 </a:solidFill>
@@ -3605,7 +3605,7 @@
               </a:rPr>
               <a:t>Active per token</a:t>
             </a:r>
-            <a:endParaRPr lang="en-US" sz="1300" dirty="0"/>
+            <a:endParaRPr lang="en-US" sz="1200" dirty="0"/>
           </a:p>
         </p:txBody>
       </p:sp>
@@ -3617,8 +3617,8 @@
         </p:nvSpPr>
         <p:spPr>
           <a:xfrm>
-            <a:off x="7153275" y="3543300"/>
-            <a:ext cx="4638675" cy="171450"/>
+            <a:off x="7229475" y="3619500"/>
+            <a:ext cx="4562475" cy="171450"/>
           </a:xfrm>
           <a:prstGeom prst="rect">
             <a:avLst/>
@@ -3656,12 +3656,12 @@
         </p:nvSpPr>
         <p:spPr>
           <a:xfrm>
-            <a:off x="7153275" y="3752850"/>
-            <a:ext cx="4638675" cy="1238250"/>
+            <a:off x="7229475" y="3886200"/>
+            <a:ext cx="4562475" cy="533400"/>
           </a:xfrm>
           <a:prstGeom prst="roundRect">
             <a:avLst>
-              <a:gd name="adj" fmla="val 7385"/>
+              <a:gd name="adj" fmla="val 17143"/>
             </a:avLst>
           </a:prstGeom>
           <a:solidFill>
@@ -3683,8 +3683,8 @@
         </p:nvSpPr>
         <p:spPr>
           <a:xfrm>
-            <a:off x="7153275" y="3752850"/>
-            <a:ext cx="114300" cy="1238250"/>
+            <a:off x="7229475" y="3886200"/>
+            <a:ext cx="114300" cy="533400"/>
           </a:xfrm>
           <a:prstGeom prst="rect">
             <a:avLst/>
@@ -3708,8 +3708,8 @@
         </p:nvSpPr>
         <p:spPr>
           <a:xfrm>
-            <a:off x="7458075" y="3867150"/>
-            <a:ext cx="2087404" cy="266700"/>
+            <a:off x="7496175" y="4048125"/>
+            <a:ext cx="1733741" cy="209550"/>
           </a:xfrm>
           <a:prstGeom prst="rect">
             <a:avLst/>
@@ -3725,7 +3725,7 @@
               <a:buNone/>
             </a:pPr>
             <a:r>
-              <a:rPr lang="en-US" sz="1800" b="1" dirty="0">
+              <a:rPr lang="en-US" sz="1600" b="1" dirty="0">
                 <a:solidFill>
                   <a:srgbClr val="EAEAEA"/>
                 </a:solidFill>
@@ -3735,7 +3735,7 @@
               </a:rPr>
               <a:t>Collapse</a:t>
             </a:r>
-            <a:endParaRPr lang="en-US" sz="1800" dirty="0"/>
+            <a:endParaRPr lang="en-US" sz="1600" dirty="0"/>
           </a:p>
         </p:txBody>
       </p:sp>
@@ -3747,8 +3747,8 @@
         </p:nvSpPr>
         <p:spPr>
           <a:xfrm>
-            <a:off x="9101519" y="3876675"/>
-            <a:ext cx="2412111" cy="266700"/>
+            <a:off x="9054465" y="4048125"/>
+            <a:ext cx="2509361" cy="209550"/>
           </a:xfrm>
           <a:prstGeom prst="rect">
             <a:avLst/>
@@ -3764,7 +3764,7 @@
               <a:buNone/>
             </a:pPr>
             <a:r>
-              <a:rPr lang="en-US" sz="1600" dirty="0">
+              <a:rPr lang="en-US" sz="1400" dirty="0">
                 <a:solidFill>
                   <a:srgbClr val="6C6C8A"/>
                 </a:solidFill>
@@ -3774,7 +3774,7 @@
               </a:rPr>
               <a:t>Router sticks to 1–2 experts</a:t>
             </a:r>
-            <a:endParaRPr lang="en-US" sz="1600" dirty="0"/>
+            <a:endParaRPr lang="en-US" sz="1400" dirty="0"/>
           </a:p>
         </p:txBody>
       </p:sp>
@@ -3786,12 +3786,12 @@
         </p:nvSpPr>
         <p:spPr>
           <a:xfrm>
-            <a:off x="7153275" y="5086350"/>
-            <a:ext cx="4638675" cy="1238250"/>
+            <a:off x="7229475" y="4514850"/>
+            <a:ext cx="4562475" cy="533400"/>
           </a:xfrm>
           <a:prstGeom prst="roundRect">
             <a:avLst>
-              <a:gd name="adj" fmla="val 7385"/>
+              <a:gd name="adj" fmla="val 17143"/>
             </a:avLst>
           </a:prstGeom>
           <a:solidFill>
@@ -3813,8 +3813,8 @@
         </p:nvSpPr>
         <p:spPr>
           <a:xfrm>
-            <a:off x="7153275" y="5086350"/>
-            <a:ext cx="114300" cy="1238250"/>
+            <a:off x="7229475" y="4514850"/>
+            <a:ext cx="114300" cy="533400"/>
           </a:xfrm>
           <a:prstGeom prst="rect">
             <a:avLst/>
@@ -3838,8 +3838,8 @@
         </p:nvSpPr>
         <p:spPr>
           <a:xfrm>
-            <a:off x="7458075" y="5200650"/>
-            <a:ext cx="2087404" cy="266700"/>
+            <a:off x="7496175" y="4676775"/>
+            <a:ext cx="1733741" cy="209550"/>
           </a:xfrm>
           <a:prstGeom prst="rect">
             <a:avLst/>
@@ -3855,7 +3855,7 @@
               <a:buNone/>
             </a:pPr>
             <a:r>
-              <a:rPr lang="en-US" sz="1800" b="1" dirty="0">
+              <a:rPr lang="en-US" sz="1600" b="1" dirty="0">
                 <a:solidFill>
                   <a:srgbClr val="EAEAEA"/>
                 </a:solidFill>
@@ -3865,7 +3865,7 @@
               </a:rPr>
               <a:t>Imbalance</a:t>
             </a:r>
-            <a:endParaRPr lang="en-US" sz="1800" dirty="0"/>
+            <a:endParaRPr lang="en-US" sz="1600" dirty="0"/>
           </a:p>
         </p:txBody>
       </p:sp>
@@ -3877,8 +3877,8 @@
         </p:nvSpPr>
         <p:spPr>
           <a:xfrm>
-            <a:off x="9101519" y="5210175"/>
-            <a:ext cx="2412111" cy="266700"/>
+            <a:off x="9054465" y="4676775"/>
+            <a:ext cx="2509361" cy="209550"/>
           </a:xfrm>
           <a:prstGeom prst="rect">
             <a:avLst/>
@@ -3894,7 +3894,7 @@
               <a:buNone/>
             </a:pPr>
             <a:r>
-              <a:rPr lang="en-US" sz="1600" dirty="0">
+              <a:rPr lang="en-US" sz="1400" dirty="0">
                 <a:solidFill>
                   <a:srgbClr val="6C6C8A"/>
                 </a:solidFill>
@@ -3904,7 +3904,7 @@
               </a:rPr>
               <a:t>Capacity overflow / drops</a:t>
             </a:r>
-            <a:endParaRPr lang="en-US" sz="1600" dirty="0"/>
+            <a:endParaRPr lang="en-US" sz="1400" dirty="0"/>
           </a:p>
         </p:txBody>
       </p:sp>
@@ -3979,7 +3979,7 @@
         <p:spPr>
           <a:xfrm>
             <a:off x="400050" y="247650"/>
-            <a:ext cx="10839450" cy="381000"/>
+            <a:ext cx="10839450" cy="428625"/>
           </a:xfrm>
           <a:prstGeom prst="rect">
             <a:avLst/>
@@ -3995,7 +3995,7 @@
               <a:buNone/>
             </a:pPr>
             <a:r>
-              <a:rPr lang="en-US" sz="3000" b="1" dirty="0">
+              <a:rPr lang="en-US" sz="3200" b="1" dirty="0">
                 <a:solidFill>
                   <a:srgbClr val="EAEAEA"/>
                 </a:solidFill>
@@ -4005,7 +4005,7 @@
               </a:rPr>
               <a:t>Stack to get right (bottom → top)</a:t>
             </a:r>
-            <a:endParaRPr lang="en-US" sz="3000" dirty="0"/>
+            <a:endParaRPr lang="en-US" sz="3200" dirty="0"/>
           </a:p>
         </p:txBody>
       </p:sp>
@@ -4095,12 +4095,12 @@
         </p:nvSpPr>
         <p:spPr>
           <a:xfrm>
-            <a:off x="3176826" y="781050"/>
-            <a:ext cx="5838349" cy="1323975"/>
+            <a:off x="3176826" y="904875"/>
+            <a:ext cx="5838349" cy="1295400"/>
           </a:xfrm>
           <a:prstGeom prst="roundRect">
             <a:avLst>
-              <a:gd name="adj" fmla="val 6906"/>
+              <a:gd name="adj" fmla="val 7059"/>
             </a:avLst>
           </a:prstGeom>
           <a:solidFill>
@@ -4122,7 +4122,7 @@
         </p:nvSpPr>
         <p:spPr>
           <a:xfrm>
-            <a:off x="3291126" y="1347788"/>
+            <a:off x="3291126" y="1457325"/>
             <a:ext cx="5609749" cy="209550"/>
           </a:xfrm>
           <a:prstGeom prst="rect">
@@ -4161,12 +4161,12 @@
         </p:nvSpPr>
         <p:spPr>
           <a:xfrm>
-            <a:off x="2251234" y="2181225"/>
-            <a:ext cx="7689533" cy="1323975"/>
+            <a:off x="2251234" y="2276475"/>
+            <a:ext cx="7689533" cy="1295400"/>
           </a:xfrm>
           <a:prstGeom prst="roundRect">
             <a:avLst>
-              <a:gd name="adj" fmla="val 6906"/>
+              <a:gd name="adj" fmla="val 7059"/>
             </a:avLst>
           </a:prstGeom>
           <a:solidFill>
@@ -4188,7 +4188,7 @@
         </p:nvSpPr>
         <p:spPr>
           <a:xfrm>
-            <a:off x="2365534" y="2747963"/>
+            <a:off x="2365534" y="2828925"/>
             <a:ext cx="7460933" cy="209550"/>
           </a:xfrm>
           <a:prstGeom prst="rect">
@@ -4227,12 +4227,12 @@
         </p:nvSpPr>
         <p:spPr>
           <a:xfrm>
-            <a:off x="1325642" y="3581400"/>
-            <a:ext cx="9540716" cy="1323975"/>
+            <a:off x="1325642" y="3648075"/>
+            <a:ext cx="9540716" cy="1295400"/>
           </a:xfrm>
           <a:prstGeom prst="roundRect">
             <a:avLst>
-              <a:gd name="adj" fmla="val 6906"/>
+              <a:gd name="adj" fmla="val 7059"/>
             </a:avLst>
           </a:prstGeom>
           <a:solidFill>
@@ -4254,7 +4254,7 @@
         </p:nvSpPr>
         <p:spPr>
           <a:xfrm>
-            <a:off x="1439942" y="4148137"/>
+            <a:off x="1439942" y="4200525"/>
             <a:ext cx="9312116" cy="209550"/>
           </a:xfrm>
           <a:prstGeom prst="rect">
@@ -4293,12 +4293,12 @@
         </p:nvSpPr>
         <p:spPr>
           <a:xfrm>
-            <a:off x="400050" y="4981575"/>
-            <a:ext cx="11391900" cy="1323975"/>
+            <a:off x="400050" y="5019675"/>
+            <a:ext cx="11391900" cy="1295400"/>
           </a:xfrm>
           <a:prstGeom prst="roundRect">
             <a:avLst>
-              <a:gd name="adj" fmla="val 6906"/>
+              <a:gd name="adj" fmla="val 7059"/>
             </a:avLst>
           </a:prstGeom>
           <a:solidFill>
@@ -4320,7 +4320,7 @@
         </p:nvSpPr>
         <p:spPr>
           <a:xfrm>
-            <a:off x="514350" y="5548313"/>
+            <a:off x="514350" y="5572125"/>
             <a:ext cx="11163300" cy="209550"/>
           </a:xfrm>
           <a:prstGeom prst="rect">
@@ -4460,8 +4460,8 @@
         </p:nvSpPr>
         <p:spPr>
           <a:xfrm>
-            <a:off x="400050" y="1238250"/>
-            <a:ext cx="9525000" cy="1333500"/>
+            <a:off x="400050" y="1143000"/>
+            <a:ext cx="9525000" cy="1371600"/>
           </a:xfrm>
           <a:prstGeom prst="rect">
             <a:avLst/>
@@ -4522,8 +4522,8 @@
         </p:nvSpPr>
         <p:spPr>
           <a:xfrm>
-            <a:off x="400050" y="2952750"/>
-            <a:ext cx="8572500" cy="571500"/>
+            <a:off x="400050" y="2781300"/>
+            <a:ext cx="8572500" cy="533400"/>
           </a:xfrm>
           <a:prstGeom prst="rect">
             <a:avLst/>
@@ -4613,7 +4613,7 @@
         </p:nvSpPr>
         <p:spPr>
           <a:xfrm>
-            <a:off x="571500" y="4152900"/>
+            <a:off x="571500" y="4114800"/>
             <a:ext cx="3105150" cy="171450"/>
           </a:xfrm>
           <a:prstGeom prst="rect">
@@ -4652,8 +4652,8 @@
         </p:nvSpPr>
         <p:spPr>
           <a:xfrm>
-            <a:off x="571500" y="4419600"/>
-            <a:ext cx="3105150" cy="571500"/>
+            <a:off x="571500" y="4362450"/>
+            <a:ext cx="3105150" cy="666750"/>
           </a:xfrm>
           <a:prstGeom prst="rect">
             <a:avLst/>
@@ -4743,7 +4743,7 @@
         </p:nvSpPr>
         <p:spPr>
           <a:xfrm>
-            <a:off x="4343400" y="4152900"/>
+            <a:off x="4343400" y="4114800"/>
             <a:ext cx="3105150" cy="171450"/>
           </a:xfrm>
           <a:prstGeom prst="rect">
@@ -4782,8 +4782,8 @@
         </p:nvSpPr>
         <p:spPr>
           <a:xfrm>
-            <a:off x="4343400" y="4419600"/>
-            <a:ext cx="3105150" cy="571500"/>
+            <a:off x="4343400" y="4362450"/>
+            <a:ext cx="3105150" cy="666750"/>
           </a:xfrm>
           <a:prstGeom prst="rect">
             <a:avLst/>
@@ -4873,7 +4873,7 @@
         </p:nvSpPr>
         <p:spPr>
           <a:xfrm>
-            <a:off x="8115300" y="4152900"/>
+            <a:off x="8115300" y="4114800"/>
             <a:ext cx="3105150" cy="171450"/>
           </a:xfrm>
           <a:prstGeom prst="rect">
@@ -4912,8 +4912,8 @@
         </p:nvSpPr>
         <p:spPr>
           <a:xfrm>
-            <a:off x="8115300" y="4419600"/>
-            <a:ext cx="3105150" cy="571500"/>
+            <a:off x="8115300" y="4362450"/>
+            <a:ext cx="3105150" cy="666750"/>
           </a:xfrm>
           <a:prstGeom prst="rect">
             <a:avLst/>
@@ -5169,8 +5169,8 @@
         </p:nvSpPr>
         <p:spPr>
           <a:xfrm>
-            <a:off x="1524000" y="2190750"/>
-            <a:ext cx="9144000" cy="1047750"/>
+            <a:off x="1524000" y="2552700"/>
+            <a:ext cx="9144000" cy="609600"/>
           </a:xfrm>
           <a:prstGeom prst="rect">
             <a:avLst/>
@@ -5208,8 +5208,8 @@
         </p:nvSpPr>
         <p:spPr>
           <a:xfrm>
-            <a:off x="1524000" y="3381375"/>
-            <a:ext cx="9144000" cy="428625"/>
+            <a:off x="1524000" y="3467100"/>
+            <a:ext cx="9144000" cy="457200"/>
           </a:xfrm>
           <a:prstGeom prst="rect">
             <a:avLst/>
@@ -5388,7 +5388,7 @@
         <p:spPr>
           <a:xfrm>
             <a:off x="400050" y="247650"/>
-            <a:ext cx="10839450" cy="381000"/>
+            <a:ext cx="10839450" cy="428625"/>
           </a:xfrm>
           <a:prstGeom prst="rect">
             <a:avLst/>
@@ -5404,7 +5404,7 @@
               <a:buNone/>
             </a:pPr>
             <a:r>
-              <a:rPr lang="en-US" sz="3000" b="1" dirty="0">
+              <a:rPr lang="en-US" sz="3200" b="1" dirty="0">
                 <a:solidFill>
                   <a:srgbClr val="EAEAEA"/>
                 </a:solidFill>
@@ -5414,7 +5414,7 @@
               </a:rPr>
               <a:t>Dense vs sparse activation</a:t>
             </a:r>
-            <a:endParaRPr lang="en-US" sz="3000" dirty="0"/>
+            <a:endParaRPr lang="en-US" sz="3200" dirty="0"/>
           </a:p>
         </p:txBody>
       </p:sp>
@@ -5426,8 +5426,8 @@
         </p:nvSpPr>
         <p:spPr>
           <a:xfrm>
-            <a:off x="400050" y="800100"/>
-            <a:ext cx="10648950" cy="266700"/>
+            <a:off x="400050" y="942975"/>
+            <a:ext cx="10648950" cy="285750"/>
           </a:xfrm>
           <a:prstGeom prst="rect">
             <a:avLst/>
@@ -5543,12 +5543,12 @@
         </p:nvSpPr>
         <p:spPr>
           <a:xfrm>
-            <a:off x="400050" y="1219200"/>
-            <a:ext cx="5695950" cy="5105400"/>
+            <a:off x="400050" y="1457325"/>
+            <a:ext cx="5695950" cy="4867275"/>
           </a:xfrm>
           <a:prstGeom prst="roundRect">
             <a:avLst>
-              <a:gd name="adj" fmla="val 1791"/>
+              <a:gd name="adj" fmla="val 1879"/>
             </a:avLst>
           </a:prstGeom>
           <a:solidFill>
@@ -5570,7 +5570,7 @@
         </p:nvSpPr>
         <p:spPr>
           <a:xfrm>
-            <a:off x="400050" y="1219200"/>
+            <a:off x="400050" y="1457325"/>
             <a:ext cx="5695950" cy="76200"/>
           </a:xfrm>
           <a:prstGeom prst="rect">
@@ -5595,7 +5595,7 @@
         </p:nvSpPr>
         <p:spPr>
           <a:xfrm>
-            <a:off x="609600" y="1447800"/>
+            <a:off x="609600" y="1685925"/>
             <a:ext cx="5276850" cy="171450"/>
           </a:xfrm>
           <a:prstGeom prst="rect">
@@ -5634,7 +5634,7 @@
         </p:nvSpPr>
         <p:spPr>
           <a:xfrm>
-            <a:off x="609600" y="1743075"/>
+            <a:off x="609600" y="1981200"/>
             <a:ext cx="5276850" cy="476250"/>
           </a:xfrm>
           <a:prstGeom prst="rect">
@@ -5673,7 +5673,7 @@
         </p:nvSpPr>
         <p:spPr>
           <a:xfrm>
-            <a:off x="609600" y="2505075"/>
+            <a:off x="609600" y="2828925"/>
             <a:ext cx="66675" cy="66675"/>
           </a:xfrm>
           <a:prstGeom prst="roundRect">
@@ -5700,17 +5700,17 @@
         </p:nvSpPr>
         <p:spPr>
           <a:xfrm>
-            <a:off x="800100" y="2419350"/>
-            <a:ext cx="5086350" cy="342900"/>
-          </a:xfrm>
-          <a:prstGeom prst="rect">
-            <a:avLst/>
-          </a:prstGeom>
-          <a:noFill/>
-          <a:ln/>
-        </p:spPr>
-        <p:txBody>
-          <a:bodyPr wrap="square" lIns="0" tIns="0" rIns="0" bIns="0" rtlCol="0" anchor="t"/>
+            <a:off x="800100" y="2657475"/>
+            <a:ext cx="5086350" cy="419100"/>
+          </a:xfrm>
+          <a:prstGeom prst="rect">
+            <a:avLst/>
+          </a:prstGeom>
+          <a:noFill/>
+          <a:ln/>
+        </p:spPr>
+        <p:txBody>
+          <a:bodyPr wrap="square" lIns="0" tIns="0" rIns="0" bIns="0" rtlCol="0" anchor="ctr"/>
           <a:lstStyle/>
           <a:p>
             <a:pPr algn="l" indent="0" marL="0">
@@ -5739,7 +5739,7 @@
         </p:nvSpPr>
         <p:spPr>
           <a:xfrm>
-            <a:off x="609600" y="3038475"/>
+            <a:off x="609600" y="3286125"/>
             <a:ext cx="66675" cy="66675"/>
           </a:xfrm>
           <a:prstGeom prst="roundRect">
@@ -5766,17 +5766,17 @@
         </p:nvSpPr>
         <p:spPr>
           <a:xfrm>
-            <a:off x="800100" y="2952750"/>
-            <a:ext cx="5086350" cy="342900"/>
-          </a:xfrm>
-          <a:prstGeom prst="rect">
-            <a:avLst/>
-          </a:prstGeom>
-          <a:noFill/>
-          <a:ln/>
-        </p:spPr>
-        <p:txBody>
-          <a:bodyPr wrap="square" lIns="0" tIns="0" rIns="0" bIns="0" rtlCol="0" anchor="t"/>
+            <a:off x="800100" y="3114675"/>
+            <a:ext cx="5086350" cy="419100"/>
+          </a:xfrm>
+          <a:prstGeom prst="rect">
+            <a:avLst/>
+          </a:prstGeom>
+          <a:noFill/>
+          <a:ln/>
+        </p:spPr>
+        <p:txBody>
+          <a:bodyPr wrap="square" lIns="0" tIns="0" rIns="0" bIns="0" rtlCol="0" anchor="ctr"/>
           <a:lstStyle/>
           <a:p>
             <a:pPr algn="l" indent="0" marL="0">
@@ -5805,7 +5805,7 @@
         </p:nvSpPr>
         <p:spPr>
           <a:xfrm>
-            <a:off x="609600" y="3571875"/>
+            <a:off x="609600" y="3743325"/>
             <a:ext cx="66675" cy="66675"/>
           </a:xfrm>
           <a:prstGeom prst="roundRect">
@@ -5832,17 +5832,17 @@
         </p:nvSpPr>
         <p:spPr>
           <a:xfrm>
-            <a:off x="800100" y="3486150"/>
-            <a:ext cx="5086350" cy="342900"/>
-          </a:xfrm>
-          <a:prstGeom prst="rect">
-            <a:avLst/>
-          </a:prstGeom>
-          <a:noFill/>
-          <a:ln/>
-        </p:spPr>
-        <p:txBody>
-          <a:bodyPr wrap="square" lIns="0" tIns="0" rIns="0" bIns="0" rtlCol="0" anchor="t"/>
+            <a:off x="800100" y="3571875"/>
+            <a:ext cx="5086350" cy="419100"/>
+          </a:xfrm>
+          <a:prstGeom prst="rect">
+            <a:avLst/>
+          </a:prstGeom>
+          <a:noFill/>
+          <a:ln/>
+        </p:spPr>
+        <p:txBody>
+          <a:bodyPr wrap="square" lIns="0" tIns="0" rIns="0" bIns="0" rtlCol="0" anchor="ctr"/>
           <a:lstStyle/>
           <a:p>
             <a:pPr algn="l" indent="0" marL="0">
@@ -5871,12 +5871,12 @@
         </p:nvSpPr>
         <p:spPr>
           <a:xfrm>
-            <a:off x="6324600" y="1219200"/>
-            <a:ext cx="5467350" cy="5105400"/>
+            <a:off x="6324600" y="1457325"/>
+            <a:ext cx="5467350" cy="4867275"/>
           </a:xfrm>
           <a:prstGeom prst="roundRect">
             <a:avLst>
-              <a:gd name="adj" fmla="val 1791"/>
+              <a:gd name="adj" fmla="val 1879"/>
             </a:avLst>
           </a:prstGeom>
           <a:solidFill>
@@ -5898,7 +5898,7 @@
         </p:nvSpPr>
         <p:spPr>
           <a:xfrm>
-            <a:off x="6324600" y="1219200"/>
+            <a:off x="6324600" y="1457325"/>
             <a:ext cx="5467350" cy="76200"/>
           </a:xfrm>
           <a:prstGeom prst="rect">
@@ -5923,7 +5923,7 @@
         </p:nvSpPr>
         <p:spPr>
           <a:xfrm>
-            <a:off x="6534150" y="1447800"/>
+            <a:off x="6534150" y="1685925"/>
             <a:ext cx="5048250" cy="171450"/>
           </a:xfrm>
           <a:prstGeom prst="rect">
@@ -5962,7 +5962,7 @@
         </p:nvSpPr>
         <p:spPr>
           <a:xfrm>
-            <a:off x="6534150" y="1743075"/>
+            <a:off x="6534150" y="1981200"/>
             <a:ext cx="5048250" cy="476250"/>
           </a:xfrm>
           <a:prstGeom prst="rect">
@@ -6001,7 +6001,7 @@
         </p:nvSpPr>
         <p:spPr>
           <a:xfrm>
-            <a:off x="6534150" y="2505075"/>
+            <a:off x="6534150" y="2828925"/>
             <a:ext cx="66675" cy="66675"/>
           </a:xfrm>
           <a:prstGeom prst="roundRect">
@@ -6028,17 +6028,17 @@
         </p:nvSpPr>
         <p:spPr>
           <a:xfrm>
-            <a:off x="6724650" y="2419350"/>
-            <a:ext cx="4857750" cy="342900"/>
-          </a:xfrm>
-          <a:prstGeom prst="rect">
-            <a:avLst/>
-          </a:prstGeom>
-          <a:noFill/>
-          <a:ln/>
-        </p:spPr>
-        <p:txBody>
-          <a:bodyPr wrap="square" lIns="0" tIns="0" rIns="0" bIns="0" rtlCol="0" anchor="t"/>
+            <a:off x="6724650" y="2657475"/>
+            <a:ext cx="4857750" cy="419100"/>
+          </a:xfrm>
+          <a:prstGeom prst="rect">
+            <a:avLst/>
+          </a:prstGeom>
+          <a:noFill/>
+          <a:ln/>
+        </p:spPr>
+        <p:txBody>
+          <a:bodyPr wrap="square" lIns="0" tIns="0" rIns="0" bIns="0" rtlCol="0" anchor="ctr"/>
           <a:lstStyle/>
           <a:p>
             <a:pPr algn="l" indent="0" marL="0">
@@ -6067,7 +6067,7 @@
         </p:nvSpPr>
         <p:spPr>
           <a:xfrm>
-            <a:off x="6534150" y="3038475"/>
+            <a:off x="6534150" y="3286125"/>
             <a:ext cx="66675" cy="66675"/>
           </a:xfrm>
           <a:prstGeom prst="roundRect">
@@ -6094,17 +6094,17 @@
         </p:nvSpPr>
         <p:spPr>
           <a:xfrm>
-            <a:off x="6724650" y="2952750"/>
-            <a:ext cx="4857750" cy="342900"/>
-          </a:xfrm>
-          <a:prstGeom prst="rect">
-            <a:avLst/>
-          </a:prstGeom>
-          <a:noFill/>
-          <a:ln/>
-        </p:spPr>
-        <p:txBody>
-          <a:bodyPr wrap="square" lIns="0" tIns="0" rIns="0" bIns="0" rtlCol="0" anchor="t"/>
+            <a:off x="6724650" y="3114675"/>
+            <a:ext cx="4857750" cy="419100"/>
+          </a:xfrm>
+          <a:prstGeom prst="rect">
+            <a:avLst/>
+          </a:prstGeom>
+          <a:noFill/>
+          <a:ln/>
+        </p:spPr>
+        <p:txBody>
+          <a:bodyPr wrap="square" lIns="0" tIns="0" rIns="0" bIns="0" rtlCol="0" anchor="ctr"/>
           <a:lstStyle/>
           <a:p>
             <a:pPr algn="l" indent="0" marL="0">
@@ -6133,7 +6133,7 @@
         </p:nvSpPr>
         <p:spPr>
           <a:xfrm>
-            <a:off x="6534150" y="3571875"/>
+            <a:off x="6534150" y="3743325"/>
             <a:ext cx="66675" cy="66675"/>
           </a:xfrm>
           <a:prstGeom prst="roundRect">
@@ -6160,17 +6160,17 @@
         </p:nvSpPr>
         <p:spPr>
           <a:xfrm>
-            <a:off x="6724650" y="3486150"/>
-            <a:ext cx="4857750" cy="342900"/>
-          </a:xfrm>
-          <a:prstGeom prst="rect">
-            <a:avLst/>
-          </a:prstGeom>
-          <a:noFill/>
-          <a:ln/>
-        </p:spPr>
-        <p:txBody>
-          <a:bodyPr wrap="square" lIns="0" tIns="0" rIns="0" bIns="0" rtlCol="0" anchor="t"/>
+            <a:off x="6724650" y="3571875"/>
+            <a:ext cx="4857750" cy="419100"/>
+          </a:xfrm>
+          <a:prstGeom prst="rect">
+            <a:avLst/>
+          </a:prstGeom>
+          <a:noFill/>
+          <a:ln/>
+        </p:spPr>
+        <p:txBody>
+          <a:bodyPr wrap="square" lIns="0" tIns="0" rIns="0" bIns="0" rtlCol="0" anchor="ctr"/>
           <a:lstStyle/>
           <a:p>
             <a:pPr algn="l" indent="0" marL="0">
@@ -6262,7 +6262,7 @@
         <p:spPr>
           <a:xfrm>
             <a:off x="400050" y="247650"/>
-            <a:ext cx="10839450" cy="381000"/>
+            <a:ext cx="10839450" cy="428625"/>
           </a:xfrm>
           <a:prstGeom prst="rect">
             <a:avLst/>
@@ -6278,7 +6278,7 @@
               <a:buNone/>
             </a:pPr>
             <a:r>
-              <a:rPr lang="en-US" sz="3000" b="1" dirty="0">
+              <a:rPr lang="en-US" sz="3200" b="1" dirty="0">
                 <a:solidFill>
                   <a:srgbClr val="EAEAEA"/>
                 </a:solidFill>
@@ -6288,7 +6288,7 @@
               </a:rPr>
               <a:t>Canonical MoE block</a:t>
             </a:r>
-            <a:endParaRPr lang="en-US" sz="3000" dirty="0"/>
+            <a:endParaRPr lang="en-US" sz="3200" dirty="0"/>
           </a:p>
         </p:txBody>
       </p:sp>
@@ -6378,7 +6378,7 @@
         </p:nvSpPr>
         <p:spPr>
           <a:xfrm>
-            <a:off x="4045458" y="857250"/>
+            <a:off x="4045458" y="981075"/>
             <a:ext cx="4101084" cy="838200"/>
           </a:xfrm>
           <a:prstGeom prst="roundRect">
@@ -6405,7 +6405,7 @@
         </p:nvSpPr>
         <p:spPr>
           <a:xfrm>
-            <a:off x="4045458" y="857250"/>
+            <a:off x="4045458" y="981075"/>
             <a:ext cx="57150" cy="838200"/>
           </a:xfrm>
           <a:prstGeom prst="rect">
@@ -6430,7 +6430,7 @@
         </p:nvSpPr>
         <p:spPr>
           <a:xfrm>
-            <a:off x="4216908" y="1009650"/>
+            <a:off x="4216908" y="1095375"/>
             <a:ext cx="3758184" cy="171450"/>
           </a:xfrm>
           <a:prstGeom prst="rect">
@@ -6469,7 +6469,7 @@
         </p:nvSpPr>
         <p:spPr>
           <a:xfrm>
-            <a:off x="6081713" y="1695450"/>
+            <a:off x="6081713" y="1819275"/>
             <a:ext cx="28575" cy="342900"/>
           </a:xfrm>
           <a:prstGeom prst="rect">
@@ -6494,7 +6494,7 @@
         </p:nvSpPr>
         <p:spPr>
           <a:xfrm>
-            <a:off x="2233613" y="2024062"/>
+            <a:off x="2233613" y="2147888"/>
             <a:ext cx="7715250" cy="28575"/>
           </a:xfrm>
           <a:prstGeom prst="rect">
@@ -6519,7 +6519,7 @@
         </p:nvSpPr>
         <p:spPr>
           <a:xfrm>
-            <a:off x="2219325" y="2038350"/>
+            <a:off x="2219325" y="2162175"/>
             <a:ext cx="28575" cy="342900"/>
           </a:xfrm>
           <a:prstGeom prst="rect">
@@ -6544,7 +6544,7 @@
         </p:nvSpPr>
         <p:spPr>
           <a:xfrm>
-            <a:off x="6076950" y="2038350"/>
+            <a:off x="6076950" y="2162175"/>
             <a:ext cx="28575" cy="342900"/>
           </a:xfrm>
           <a:prstGeom prst="rect">
@@ -6569,7 +6569,7 @@
         </p:nvSpPr>
         <p:spPr>
           <a:xfrm>
-            <a:off x="9934575" y="2038350"/>
+            <a:off x="9934575" y="2162175"/>
             <a:ext cx="28575" cy="342900"/>
           </a:xfrm>
           <a:prstGeom prst="rect">
@@ -6594,7 +6594,7 @@
         </p:nvSpPr>
         <p:spPr>
           <a:xfrm>
-            <a:off x="400050" y="2381250"/>
+            <a:off x="400050" y="2505075"/>
             <a:ext cx="3667125" cy="1047750"/>
           </a:xfrm>
           <a:prstGeom prst="roundRect">
@@ -6621,7 +6621,7 @@
         </p:nvSpPr>
         <p:spPr>
           <a:xfrm>
-            <a:off x="400050" y="2381250"/>
+            <a:off x="400050" y="2505075"/>
             <a:ext cx="57150" cy="1047750"/>
           </a:xfrm>
           <a:prstGeom prst="rect">
@@ -6646,7 +6646,7 @@
         </p:nvSpPr>
         <p:spPr>
           <a:xfrm>
-            <a:off x="571500" y="2533650"/>
+            <a:off x="571500" y="2619375"/>
             <a:ext cx="3324225" cy="171450"/>
           </a:xfrm>
           <a:prstGeom prst="rect">
@@ -6685,7 +6685,7 @@
         </p:nvSpPr>
         <p:spPr>
           <a:xfrm>
-            <a:off x="4257675" y="2381250"/>
+            <a:off x="4257675" y="2505075"/>
             <a:ext cx="3667125" cy="1047750"/>
           </a:xfrm>
           <a:prstGeom prst="roundRect">
@@ -6712,7 +6712,7 @@
         </p:nvSpPr>
         <p:spPr>
           <a:xfrm>
-            <a:off x="4257675" y="2381250"/>
+            <a:off x="4257675" y="2505075"/>
             <a:ext cx="57150" cy="1047750"/>
           </a:xfrm>
           <a:prstGeom prst="rect">
@@ -6737,7 +6737,7 @@
         </p:nvSpPr>
         <p:spPr>
           <a:xfrm>
-            <a:off x="4429125" y="2533650"/>
+            <a:off x="4429125" y="2619375"/>
             <a:ext cx="3324225" cy="171450"/>
           </a:xfrm>
           <a:prstGeom prst="rect">
@@ -6776,7 +6776,7 @@
         </p:nvSpPr>
         <p:spPr>
           <a:xfrm>
-            <a:off x="8115300" y="2381250"/>
+            <a:off x="8115300" y="2505075"/>
             <a:ext cx="3667125" cy="1047750"/>
           </a:xfrm>
           <a:prstGeom prst="roundRect">
@@ -6803,7 +6803,7 @@
         </p:nvSpPr>
         <p:spPr>
           <a:xfrm>
-            <a:off x="8115300" y="2381250"/>
+            <a:off x="8115300" y="2505075"/>
             <a:ext cx="57150" cy="1047750"/>
           </a:xfrm>
           <a:prstGeom prst="rect">
@@ -6828,7 +6828,7 @@
         </p:nvSpPr>
         <p:spPr>
           <a:xfrm>
-            <a:off x="8286750" y="2533650"/>
+            <a:off x="8286750" y="2619375"/>
             <a:ext cx="3324225" cy="171450"/>
           </a:xfrm>
           <a:prstGeom prst="rect">
@@ -6930,7 +6930,7 @@
         <p:spPr>
           <a:xfrm>
             <a:off x="400050" y="247650"/>
-            <a:ext cx="10839450" cy="381000"/>
+            <a:ext cx="10839450" cy="428625"/>
           </a:xfrm>
           <a:prstGeom prst="rect">
             <a:avLst/>
@@ -6946,7 +6946,7 @@
               <a:buNone/>
             </a:pPr>
             <a:r>
-              <a:rPr lang="en-US" sz="3000" b="1" dirty="0">
+              <a:rPr lang="en-US" sz="3200" b="1" dirty="0">
                 <a:solidFill>
                   <a:srgbClr val="EAEAEA"/>
                 </a:solidFill>
@@ -6956,7 +6956,7 @@
               </a:rPr>
               <a:t>Expert load is uneven in practice</a:t>
             </a:r>
-            <a:endParaRPr lang="en-US" sz="3000" dirty="0"/>
+            <a:endParaRPr lang="en-US" sz="3200" dirty="0"/>
           </a:p>
         </p:txBody>
       </p:sp>
@@ -7199,7 +7199,7 @@
         <p:spPr>
           <a:xfrm>
             <a:off x="400050" y="247650"/>
-            <a:ext cx="10839450" cy="381000"/>
+            <a:ext cx="10839450" cy="428625"/>
           </a:xfrm>
           <a:prstGeom prst="rect">
             <a:avLst/>
@@ -7215,7 +7215,7 @@
               <a:buNone/>
             </a:pPr>
             <a:r>
-              <a:rPr lang="en-US" sz="3000" b="1" dirty="0">
+              <a:rPr lang="en-US" sz="3200" b="1" dirty="0">
                 <a:solidFill>
                   <a:srgbClr val="EAEAEA"/>
                 </a:solidFill>
@@ -7225,7 +7225,7 @@
               </a:rPr>
               <a:t>Gating and load-balance objective</a:t>
             </a:r>
-            <a:endParaRPr lang="en-US" sz="3000" dirty="0"/>
+            <a:endParaRPr lang="en-US" sz="3200" dirty="0"/>
           </a:p>
         </p:txBody>
       </p:sp>
@@ -7315,7 +7315,7 @@
         </p:nvSpPr>
         <p:spPr>
           <a:xfrm>
-            <a:off x="400050" y="2295525"/>
+            <a:off x="400050" y="2362200"/>
             <a:ext cx="11391900" cy="2505075"/>
           </a:xfrm>
           <a:prstGeom prst="roundRect">
@@ -7350,7 +7350,7 @@
         </p:blipFill>
         <p:spPr>
           <a:xfrm>
-            <a:off x="3476625" y="2600325"/>
+            <a:off x="3476625" y="2667000"/>
             <a:ext cx="5238750" cy="1209675"/>
           </a:xfrm>
           <a:prstGeom prst="rect">
@@ -7366,7 +7366,7 @@
         </p:nvSpPr>
         <p:spPr>
           <a:xfrm>
-            <a:off x="857250" y="4114800"/>
+            <a:off x="857250" y="4181475"/>
             <a:ext cx="10477500" cy="533400"/>
           </a:xfrm>
           <a:prstGeom prst="rect">
@@ -7468,7 +7468,7 @@
         <p:spPr>
           <a:xfrm>
             <a:off x="400050" y="247650"/>
-            <a:ext cx="10839450" cy="381000"/>
+            <a:ext cx="10839450" cy="428625"/>
           </a:xfrm>
           <a:prstGeom prst="rect">
             <a:avLst/>
@@ -7484,7 +7484,7 @@
               <a:buNone/>
             </a:pPr>
             <a:r>
-              <a:rPr lang="en-US" sz="3000" b="1" dirty="0">
+              <a:rPr lang="en-US" sz="3200" b="1" dirty="0">
                 <a:solidFill>
                   <a:srgbClr val="EAEAEA"/>
                 </a:solidFill>
@@ -7494,7 +7494,7 @@
               </a:rPr>
               <a:t>Router → experts → train constraints</a:t>
             </a:r>
-            <a:endParaRPr lang="en-US" sz="3000" dirty="0"/>
+            <a:endParaRPr lang="en-US" sz="3200" dirty="0"/>
           </a:p>
         </p:txBody>
       </p:sp>
@@ -7698,7 +7698,7 @@
         <p:spPr>
           <a:xfrm>
             <a:off x="400050" y="247650"/>
-            <a:ext cx="10839450" cy="381000"/>
+            <a:ext cx="10839450" cy="428625"/>
           </a:xfrm>
           <a:prstGeom prst="rect">
             <a:avLst/>
@@ -7714,7 +7714,7 @@
               <a:buNone/>
             </a:pPr>
             <a:r>
-              <a:rPr lang="en-US" sz="3000" b="1" dirty="0">
+              <a:rPr lang="en-US" sz="3200" b="1" dirty="0">
                 <a:solidFill>
                   <a:srgbClr val="EAEAEA"/>
                 </a:solidFill>
@@ -7724,7 +7724,7 @@
               </a:rPr>
               <a:t>Forward pass (simplified)</a:t>
             </a:r>
-            <a:endParaRPr lang="en-US" sz="3000" dirty="0"/>
+            <a:endParaRPr lang="en-US" sz="3200" dirty="0"/>
           </a:p>
         </p:txBody>
       </p:sp>
@@ -7814,8 +7814,8 @@
         </p:nvSpPr>
         <p:spPr>
           <a:xfrm>
-            <a:off x="400050" y="781050"/>
-            <a:ext cx="2714625" cy="5543550"/>
+            <a:off x="400050" y="904875"/>
+            <a:ext cx="2714625" cy="5419725"/>
           </a:xfrm>
           <a:prstGeom prst="roundRect">
             <a:avLst>
@@ -7841,8 +7841,8 @@
         </p:nvSpPr>
         <p:spPr>
           <a:xfrm>
-            <a:off x="400050" y="781050"/>
-            <a:ext cx="57150" cy="5543550"/>
+            <a:off x="400050" y="904875"/>
+            <a:ext cx="57150" cy="5419725"/>
           </a:xfrm>
           <a:prstGeom prst="rect">
             <a:avLst/>
@@ -7866,7 +7866,7 @@
         </p:nvSpPr>
         <p:spPr>
           <a:xfrm>
-            <a:off x="571500" y="933450"/>
+            <a:off x="571500" y="1019175"/>
             <a:ext cx="2371725" cy="171450"/>
           </a:xfrm>
           <a:prstGeom prst="rect">
@@ -7905,8 +7905,8 @@
         </p:nvSpPr>
         <p:spPr>
           <a:xfrm>
-            <a:off x="571500" y="1200150"/>
-            <a:ext cx="2371725" cy="4972050"/>
+            <a:off x="571500" y="1285875"/>
+            <a:ext cx="2371725" cy="4924425"/>
           </a:xfrm>
           <a:prstGeom prst="rect">
             <a:avLst/>
@@ -7944,7 +7944,7 @@
         </p:nvSpPr>
         <p:spPr>
           <a:xfrm>
-            <a:off x="3114675" y="3543300"/>
+            <a:off x="3114675" y="3605213"/>
             <a:ext cx="171450" cy="19050"/>
           </a:xfrm>
           <a:prstGeom prst="rect">
@@ -7969,8 +7969,8 @@
         </p:nvSpPr>
         <p:spPr>
           <a:xfrm>
-            <a:off x="3286125" y="781050"/>
-            <a:ext cx="2714625" cy="5543550"/>
+            <a:off x="3286125" y="904875"/>
+            <a:ext cx="2714625" cy="5419725"/>
           </a:xfrm>
           <a:prstGeom prst="roundRect">
             <a:avLst>
@@ -7996,8 +7996,8 @@
         </p:nvSpPr>
         <p:spPr>
           <a:xfrm>
-            <a:off x="3286125" y="781050"/>
-            <a:ext cx="57150" cy="5543550"/>
+            <a:off x="3286125" y="904875"/>
+            <a:ext cx="57150" cy="5419725"/>
           </a:xfrm>
           <a:prstGeom prst="rect">
             <a:avLst/>
@@ -8021,7 +8021,7 @@
         </p:nvSpPr>
         <p:spPr>
           <a:xfrm>
-            <a:off x="3457575" y="933450"/>
+            <a:off x="3457575" y="1019175"/>
             <a:ext cx="2371725" cy="171450"/>
           </a:xfrm>
           <a:prstGeom prst="rect">
@@ -8060,8 +8060,8 @@
         </p:nvSpPr>
         <p:spPr>
           <a:xfrm>
-            <a:off x="3457575" y="1200150"/>
-            <a:ext cx="2371725" cy="4972050"/>
+            <a:off x="3457575" y="1285875"/>
+            <a:ext cx="2371725" cy="4924425"/>
           </a:xfrm>
           <a:prstGeom prst="rect">
             <a:avLst/>
@@ -8099,7 +8099,7 @@
         </p:nvSpPr>
         <p:spPr>
           <a:xfrm>
-            <a:off x="6000750" y="3543300"/>
+            <a:off x="6000750" y="3605213"/>
             <a:ext cx="171450" cy="19050"/>
           </a:xfrm>
           <a:prstGeom prst="rect">
@@ -8124,8 +8124,8 @@
         </p:nvSpPr>
         <p:spPr>
           <a:xfrm>
-            <a:off x="6172200" y="781050"/>
-            <a:ext cx="2714625" cy="5543550"/>
+            <a:off x="6172200" y="904875"/>
+            <a:ext cx="2714625" cy="5419725"/>
           </a:xfrm>
           <a:prstGeom prst="roundRect">
             <a:avLst>
@@ -8151,8 +8151,8 @@
         </p:nvSpPr>
         <p:spPr>
           <a:xfrm>
-            <a:off x="6172200" y="781050"/>
-            <a:ext cx="57150" cy="5543550"/>
+            <a:off x="6172200" y="904875"/>
+            <a:ext cx="57150" cy="5419725"/>
           </a:xfrm>
           <a:prstGeom prst="rect">
             <a:avLst/>
@@ -8176,7 +8176,7 @@
         </p:nvSpPr>
         <p:spPr>
           <a:xfrm>
-            <a:off x="6343650" y="933450"/>
+            <a:off x="6343650" y="1019175"/>
             <a:ext cx="2371725" cy="171450"/>
           </a:xfrm>
           <a:prstGeom prst="rect">
@@ -8215,8 +8215,8 @@
         </p:nvSpPr>
         <p:spPr>
           <a:xfrm>
-            <a:off x="6343650" y="1200150"/>
-            <a:ext cx="2371725" cy="4972050"/>
+            <a:off x="6343650" y="1285875"/>
+            <a:ext cx="2371725" cy="4924425"/>
           </a:xfrm>
           <a:prstGeom prst="rect">
             <a:avLst/>
@@ -8254,7 +8254,7 @@
         </p:nvSpPr>
         <p:spPr>
           <a:xfrm>
-            <a:off x="8886825" y="3543300"/>
+            <a:off x="8886825" y="3605213"/>
             <a:ext cx="171450" cy="19050"/>
           </a:xfrm>
           <a:prstGeom prst="rect">
@@ -8279,8 +8279,8 @@
         </p:nvSpPr>
         <p:spPr>
           <a:xfrm>
-            <a:off x="9058275" y="781050"/>
-            <a:ext cx="2714625" cy="5543550"/>
+            <a:off x="9058275" y="904875"/>
+            <a:ext cx="2714625" cy="5419725"/>
           </a:xfrm>
           <a:prstGeom prst="roundRect">
             <a:avLst>
@@ -8306,8 +8306,8 @@
         </p:nvSpPr>
         <p:spPr>
           <a:xfrm>
-            <a:off x="9058275" y="781050"/>
-            <a:ext cx="57150" cy="5543550"/>
+            <a:off x="9058275" y="904875"/>
+            <a:ext cx="57150" cy="5419725"/>
           </a:xfrm>
           <a:prstGeom prst="rect">
             <a:avLst/>
@@ -8331,7 +8331,7 @@
         </p:nvSpPr>
         <p:spPr>
           <a:xfrm>
-            <a:off x="9229725" y="933450"/>
+            <a:off x="9229725" y="1019175"/>
             <a:ext cx="2371725" cy="171450"/>
           </a:xfrm>
           <a:prstGeom prst="rect">
@@ -8370,8 +8370,8 @@
         </p:nvSpPr>
         <p:spPr>
           <a:xfrm>
-            <a:off x="9229725" y="1200150"/>
-            <a:ext cx="2371725" cy="4972050"/>
+            <a:off x="9229725" y="1285875"/>
+            <a:ext cx="2371725" cy="4924425"/>
           </a:xfrm>
           <a:prstGeom prst="rect">
             <a:avLst/>
@@ -8472,7 +8472,7 @@
         <p:spPr>
           <a:xfrm>
             <a:off x="400050" y="247650"/>
-            <a:ext cx="10839450" cy="381000"/>
+            <a:ext cx="10839450" cy="428625"/>
           </a:xfrm>
           <a:prstGeom prst="rect">
             <a:avLst/>
@@ -8488,7 +8488,7 @@
               <a:buNone/>
             </a:pPr>
             <a:r>
-              <a:rPr lang="en-US" sz="3000" b="1" dirty="0">
+              <a:rPr lang="en-US" sz="3200" b="1" dirty="0">
                 <a:solidFill>
                   <a:srgbClr val="EAEAEA"/>
                 </a:solidFill>
@@ -8498,7 +8498,7 @@
               </a:rPr>
               <a:t>Failure modes to monitor</a:t>
             </a:r>
-            <a:endParaRPr lang="en-US" sz="3000" dirty="0"/>
+            <a:endParaRPr lang="en-US" sz="3200" dirty="0"/>
           </a:p>
         </p:txBody>
       </p:sp>
@@ -8588,12 +8588,12 @@
         </p:nvSpPr>
         <p:spPr>
           <a:xfrm>
-            <a:off x="400050" y="781050"/>
-            <a:ext cx="11391900" cy="1314450"/>
+            <a:off x="400050" y="904875"/>
+            <a:ext cx="11391900" cy="1276350"/>
           </a:xfrm>
           <a:prstGeom prst="roundRect">
             <a:avLst>
-              <a:gd name="adj" fmla="val 6957"/>
+              <a:gd name="adj" fmla="val 7164"/>
             </a:avLst>
           </a:prstGeom>
           <a:solidFill>
@@ -8615,8 +8615,8 @@
         </p:nvSpPr>
         <p:spPr>
           <a:xfrm>
-            <a:off x="400050" y="781050"/>
-            <a:ext cx="114300" cy="1314450"/>
+            <a:off x="400050" y="904875"/>
+            <a:ext cx="114300" cy="1276350"/>
           </a:xfrm>
           <a:prstGeom prst="rect">
             <a:avLst/>
@@ -8640,8 +8640,8 @@
         </p:nvSpPr>
         <p:spPr>
           <a:xfrm>
-            <a:off x="704850" y="895350"/>
-            <a:ext cx="5126355" cy="266700"/>
+            <a:off x="666750" y="1438275"/>
+            <a:ext cx="4328922" cy="209550"/>
           </a:xfrm>
           <a:prstGeom prst="rect">
             <a:avLst/>
@@ -8657,7 +8657,7 @@
               <a:buNone/>
             </a:pPr>
             <a:r>
-              <a:rPr lang="en-US" sz="1800" b="1" dirty="0">
+              <a:rPr lang="en-US" sz="1600" b="1" dirty="0">
                 <a:solidFill>
                   <a:srgbClr val="EAEAEA"/>
                 </a:solidFill>
@@ -8667,7 +8667,7 @@
               </a:rPr>
               <a:t>Collapse</a:t>
             </a:r>
-            <a:endParaRPr lang="en-US" sz="1800" dirty="0"/>
+            <a:endParaRPr lang="en-US" sz="1600" dirty="0"/>
           </a:p>
         </p:txBody>
       </p:sp>
@@ -8679,8 +8679,8 @@
         </p:nvSpPr>
         <p:spPr>
           <a:xfrm>
-            <a:off x="5184648" y="904875"/>
-            <a:ext cx="5923788" cy="266700"/>
+            <a:off x="4956810" y="1438275"/>
+            <a:ext cx="6265545" cy="209550"/>
           </a:xfrm>
           <a:prstGeom prst="rect">
             <a:avLst/>
@@ -8696,7 +8696,7 @@
               <a:buNone/>
             </a:pPr>
             <a:r>
-              <a:rPr lang="en-US" sz="1600" dirty="0">
+              <a:rPr lang="en-US" sz="1400" dirty="0">
                 <a:solidFill>
                   <a:srgbClr val="6C6C8A"/>
                 </a:solidFill>
@@ -8706,7 +8706,7 @@
               </a:rPr>
               <a:t>Router picks 1–2 experts always</a:t>
             </a:r>
-            <a:endParaRPr lang="en-US" sz="1600" dirty="0"/>
+            <a:endParaRPr lang="en-US" sz="1400" dirty="0"/>
           </a:p>
         </p:txBody>
       </p:sp>
@@ -8718,12 +8718,12 @@
         </p:nvSpPr>
         <p:spPr>
           <a:xfrm>
-            <a:off x="400050" y="2190750"/>
-            <a:ext cx="11391900" cy="1314450"/>
+            <a:off x="400050" y="2276475"/>
+            <a:ext cx="11391900" cy="1276350"/>
           </a:xfrm>
           <a:prstGeom prst="roundRect">
             <a:avLst>
-              <a:gd name="adj" fmla="val 6957"/>
+              <a:gd name="adj" fmla="val 7164"/>
             </a:avLst>
           </a:prstGeom>
           <a:solidFill>
@@ -8745,8 +8745,8 @@
         </p:nvSpPr>
         <p:spPr>
           <a:xfrm>
-            <a:off x="400050" y="2190750"/>
-            <a:ext cx="114300" cy="1314450"/>
+            <a:off x="400050" y="2276475"/>
+            <a:ext cx="114300" cy="1276350"/>
           </a:xfrm>
           <a:prstGeom prst="rect">
             <a:avLst/>
@@ -8770,8 +8770,8 @@
         </p:nvSpPr>
         <p:spPr>
           <a:xfrm>
-            <a:off x="704850" y="2305050"/>
-            <a:ext cx="5126355" cy="266700"/>
+            <a:off x="666750" y="2809875"/>
+            <a:ext cx="4328922" cy="209550"/>
           </a:xfrm>
           <a:prstGeom prst="rect">
             <a:avLst/>
@@ -8787,7 +8787,7 @@
               <a:buNone/>
             </a:pPr>
             <a:r>
-              <a:rPr lang="en-US" sz="1800" b="1" dirty="0">
+              <a:rPr lang="en-US" sz="1600" b="1" dirty="0">
                 <a:solidFill>
                   <a:srgbClr val="EAEAEA"/>
                 </a:solidFill>
@@ -8797,7 +8797,7 @@
               </a:rPr>
               <a:t>Imbalance</a:t>
             </a:r>
-            <a:endParaRPr lang="en-US" sz="1800" dirty="0"/>
+            <a:endParaRPr lang="en-US" sz="1600" dirty="0"/>
           </a:p>
         </p:txBody>
       </p:sp>
@@ -8809,8 +8809,8 @@
         </p:nvSpPr>
         <p:spPr>
           <a:xfrm>
-            <a:off x="5184648" y="2314575"/>
-            <a:ext cx="5923788" cy="266700"/>
+            <a:off x="4956810" y="2809875"/>
+            <a:ext cx="6265545" cy="209550"/>
           </a:xfrm>
           <a:prstGeom prst="rect">
             <a:avLst/>
@@ -8826,7 +8826,7 @@
               <a:buNone/>
             </a:pPr>
             <a:r>
-              <a:rPr lang="en-US" sz="1600" dirty="0">
+              <a:rPr lang="en-US" sz="1400" dirty="0">
                 <a:solidFill>
                   <a:srgbClr val="6C6C8A"/>
                 </a:solidFill>
@@ -8836,7 +8836,7 @@
               </a:rPr>
               <a:t>Capacity overflow / dropped tokens</a:t>
             </a:r>
-            <a:endParaRPr lang="en-US" sz="1600" dirty="0"/>
+            <a:endParaRPr lang="en-US" sz="1400" dirty="0"/>
           </a:p>
         </p:txBody>
       </p:sp>
@@ -8848,12 +8848,12 @@
         </p:nvSpPr>
         <p:spPr>
           <a:xfrm>
-            <a:off x="400050" y="3600450"/>
-            <a:ext cx="11391900" cy="1314450"/>
+            <a:off x="400050" y="3648075"/>
+            <a:ext cx="11391900" cy="1276350"/>
           </a:xfrm>
           <a:prstGeom prst="roundRect">
             <a:avLst>
-              <a:gd name="adj" fmla="val 6957"/>
+              <a:gd name="adj" fmla="val 7164"/>
             </a:avLst>
           </a:prstGeom>
           <a:solidFill>
@@ -8875,8 +8875,8 @@
         </p:nvSpPr>
         <p:spPr>
           <a:xfrm>
-            <a:off x="400050" y="3600450"/>
-            <a:ext cx="114300" cy="1314450"/>
+            <a:off x="400050" y="3648075"/>
+            <a:ext cx="114300" cy="1276350"/>
           </a:xfrm>
           <a:prstGeom prst="rect">
             <a:avLst/>
@@ -8900,8 +8900,8 @@
         </p:nvSpPr>
         <p:spPr>
           <a:xfrm>
-            <a:off x="704850" y="3714750"/>
-            <a:ext cx="5126355" cy="266700"/>
+            <a:off x="666750" y="4181475"/>
+            <a:ext cx="4328922" cy="209550"/>
           </a:xfrm>
           <a:prstGeom prst="rect">
             <a:avLst/>
@@ -8917,7 +8917,7 @@
               <a:buNone/>
             </a:pPr>
             <a:r>
-              <a:rPr lang="en-US" sz="1800" b="1" dirty="0">
+              <a:rPr lang="en-US" sz="1600" b="1" dirty="0">
                 <a:solidFill>
                   <a:srgbClr val="EAEAEA"/>
                 </a:solidFill>
@@ -8927,7 +8927,7 @@
               </a:rPr>
               <a:t>Under-train</a:t>
             </a:r>
-            <a:endParaRPr lang="en-US" sz="1800" dirty="0"/>
+            <a:endParaRPr lang="en-US" sz="1600" dirty="0"/>
           </a:p>
         </p:txBody>
       </p:sp>
@@ -8939,8 +8939,8 @@
         </p:nvSpPr>
         <p:spPr>
           <a:xfrm>
-            <a:off x="5184648" y="3724275"/>
-            <a:ext cx="5923788" cy="266700"/>
+            <a:off x="4956810" y="4181475"/>
+            <a:ext cx="6265545" cy="209550"/>
           </a:xfrm>
           <a:prstGeom prst="rect">
             <a:avLst/>
@@ -8956,7 +8956,7 @@
               <a:buNone/>
             </a:pPr>
             <a:r>
-              <a:rPr lang="en-US" sz="1600" dirty="0">
+              <a:rPr lang="en-US" sz="1400" dirty="0">
                 <a:solidFill>
                   <a:srgbClr val="6C6C8A"/>
                 </a:solidFill>
@@ -8966,7 +8966,7 @@
               </a:rPr>
               <a:t>Rare experts never specialize</a:t>
             </a:r>
-            <a:endParaRPr lang="en-US" sz="1600" dirty="0"/>
+            <a:endParaRPr lang="en-US" sz="1400" dirty="0"/>
           </a:p>
         </p:txBody>
       </p:sp>
@@ -8978,12 +8978,12 @@
         </p:nvSpPr>
         <p:spPr>
           <a:xfrm>
-            <a:off x="400050" y="5010150"/>
-            <a:ext cx="11391900" cy="1314450"/>
+            <a:off x="400050" y="5019675"/>
+            <a:ext cx="11391900" cy="1276350"/>
           </a:xfrm>
           <a:prstGeom prst="roundRect">
             <a:avLst>
-              <a:gd name="adj" fmla="val 6957"/>
+              <a:gd name="adj" fmla="val 7164"/>
             </a:avLst>
           </a:prstGeom>
           <a:solidFill>
@@ -9005,8 +9005,8 @@
         </p:nvSpPr>
         <p:spPr>
           <a:xfrm>
-            <a:off x="400050" y="5010150"/>
-            <a:ext cx="114300" cy="1314450"/>
+            <a:off x="400050" y="5019675"/>
+            <a:ext cx="114300" cy="1276350"/>
           </a:xfrm>
           <a:prstGeom prst="rect">
             <a:avLst/>
@@ -9030,8 +9030,8 @@
         </p:nvSpPr>
         <p:spPr>
           <a:xfrm>
-            <a:off x="704850" y="5124450"/>
-            <a:ext cx="5126355" cy="266700"/>
+            <a:off x="666750" y="5553075"/>
+            <a:ext cx="4328922" cy="209550"/>
           </a:xfrm>
           <a:prstGeom prst="rect">
             <a:avLst/>
@@ -9047,7 +9047,7 @@
               <a:buNone/>
             </a:pPr>
             <a:r>
-              <a:rPr lang="en-US" sz="1800" b="1" dirty="0">
+              <a:rPr lang="en-US" sz="1600" b="1" dirty="0">
                 <a:solidFill>
                   <a:srgbClr val="EAEAEA"/>
                 </a:solidFill>
@@ -9057,7 +9057,7 @@
               </a:rPr>
               <a:t>Latency tails</a:t>
             </a:r>
-            <a:endParaRPr lang="en-US" sz="1800" dirty="0"/>
+            <a:endParaRPr lang="en-US" sz="1600" dirty="0"/>
           </a:p>
         </p:txBody>
       </p:sp>
@@ -9069,8 +9069,8 @@
         </p:nvSpPr>
         <p:spPr>
           <a:xfrm>
-            <a:off x="5184648" y="5133975"/>
-            <a:ext cx="5923788" cy="266700"/>
+            <a:off x="4956810" y="5553075"/>
+            <a:ext cx="6265545" cy="209550"/>
           </a:xfrm>
           <a:prstGeom prst="rect">
             <a:avLst/>
@@ -9086,7 +9086,7 @@
               <a:buNone/>
             </a:pPr>
             <a:r>
-              <a:rPr lang="en-US" sz="1600" dirty="0">
+              <a:rPr lang="en-US" sz="1400" dirty="0">
                 <a:solidFill>
                   <a:srgbClr val="6C6C8A"/>
                 </a:solidFill>
@@ -9096,7 +9096,7 @@
               </a:rPr>
               <a:t>Hot experts dominate p99</a:t>
             </a:r>
-            <a:endParaRPr lang="en-US" sz="1600" dirty="0"/>
+            <a:endParaRPr lang="en-US" sz="1400" dirty="0"/>
           </a:p>
         </p:txBody>
       </p:sp>
